--- a/Aula15_Encerramento_e_Discussao/Aula15_Teoria_com_rastreamento.pptx
+++ b/Aula15_Encerramento_e_Discussao/Aula15_Teoria_com_rastreamento.pptx
@@ -20,6 +20,7 @@
     <p:sldId id="265" r:id="rId11"/>
     <p:sldId id="266" r:id="rId12"/>
     <p:sldId id="267" r:id="rId13"/>
+    <p:sldId id="271" r:id="rId22"/>
   </p:sldIdLst>
   <p:notesMasterIdLst>
     <p:notesMasterId r:id="rId14"/>
@@ -1839,7 +1840,375 @@
     <p:bg>
       <p:bgPr>
         <a:solidFill>
-          <a:srgbClr val="0E1B2A"/>
+          <a:srgbClr val="12233B"/>
+        </a:solidFill>
+        <a:effectLst/>
+      </p:bgPr>
+    </p:bg>
+    <p:spTree>
+      <p:nvGrpSpPr>
+        <p:cNvPr id="1" name=""/>
+        <p:cNvGrpSpPr/>
+        <p:nvPr/>
+      </p:nvGrpSpPr>
+      <p:grpSpPr>
+        <a:xfrm>
+          <a:off x="0" y="0"/>
+          <a:ext cx="0" cy="0"/>
+          <a:chOff x="0" y="0"/>
+          <a:chExt cx="0" cy="0"/>
+        </a:xfrm>
+      </p:grpSpPr>
+      <p:sp>
+        <p:nvSpPr>
+          <p:cNvPr id="2" name="Oval 1"/>
+          <p:cNvSpPr/>
+          <p:nvPr/>
+        </p:nvSpPr>
+        <p:spPr>
+          <a:xfrm>
+            <a:off x="8899855" y="-1645920"/>
+            <a:ext cx="4206240" cy="4206240"/>
+          </a:xfrm>
+          <a:prstGeom prst="ellipse">
+            <a:avLst/>
+          </a:prstGeom>
+          <a:solidFill>
+            <a:srgbClr val="2C7A8C">
+              <a:alpha val="12000"/>
+            </a:srgbClr>
+          </a:solidFill>
+          <a:ln>
+            <a:noFill/>
+          </a:ln>
+          <a:effectLst/>
+        </p:spPr>
+        <p:style>
+          <a:lnRef idx="1">
+            <a:schemeClr val="accent1"/>
+          </a:lnRef>
+          <a:fillRef idx="3">
+            <a:schemeClr val="accent1"/>
+          </a:fillRef>
+          <a:effectRef idx="2">
+            <a:schemeClr val="accent1"/>
+          </a:effectRef>
+          <a:fontRef idx="minor">
+            <a:schemeClr val="lt1"/>
+          </a:fontRef>
+        </p:style>
+        <p:txBody>
+          <a:bodyPr rtlCol="0" anchor="ctr"/>
+          <a:lstStyle/>
+          <a:p>
+            <a:pPr algn="ctr"/>
+          </a:p>
+        </p:txBody>
+      </p:sp>
+      <p:sp>
+        <p:nvSpPr>
+          <p:cNvPr id="3" name="Oval 2"/>
+          <p:cNvSpPr/>
+          <p:nvPr/>
+        </p:nvSpPr>
+        <p:spPr>
+          <a:xfrm>
+            <a:off x="10454335" y="548640"/>
+            <a:ext cx="2194560" cy="2194560"/>
+          </a:xfrm>
+          <a:prstGeom prst="ellipse">
+            <a:avLst/>
+          </a:prstGeom>
+          <a:solidFill>
+            <a:srgbClr val="E8963C">
+              <a:alpha val="15000"/>
+            </a:srgbClr>
+          </a:solidFill>
+          <a:ln>
+            <a:noFill/>
+          </a:ln>
+          <a:effectLst/>
+        </p:spPr>
+        <p:style>
+          <a:lnRef idx="1">
+            <a:schemeClr val="accent1"/>
+          </a:lnRef>
+          <a:fillRef idx="3">
+            <a:schemeClr val="accent1"/>
+          </a:fillRef>
+          <a:effectRef idx="2">
+            <a:schemeClr val="accent1"/>
+          </a:effectRef>
+          <a:fontRef idx="minor">
+            <a:schemeClr val="lt1"/>
+          </a:fontRef>
+        </p:style>
+        <p:txBody>
+          <a:bodyPr rtlCol="0" anchor="ctr"/>
+          <a:lstStyle/>
+          <a:p>
+            <a:pPr algn="ctr"/>
+          </a:p>
+        </p:txBody>
+      </p:sp>
+      <p:sp>
+        <p:nvSpPr>
+          <p:cNvPr id="4" name="Oval 3"/>
+          <p:cNvSpPr/>
+          <p:nvPr/>
+        </p:nvSpPr>
+        <p:spPr>
+          <a:xfrm>
+            <a:off x="822960" y="914400"/>
+            <a:ext cx="868680" cy="868680"/>
+          </a:xfrm>
+          <a:prstGeom prst="ellipse">
+            <a:avLst/>
+          </a:prstGeom>
+          <a:solidFill>
+            <a:srgbClr val="2C7A8C"/>
+          </a:solidFill>
+          <a:ln>
+            <a:noFill/>
+          </a:ln>
+          <a:effectLst/>
+        </p:spPr>
+        <p:style>
+          <a:lnRef idx="1">
+            <a:schemeClr val="accent1"/>
+          </a:lnRef>
+          <a:fillRef idx="3">
+            <a:schemeClr val="accent1"/>
+          </a:fillRef>
+          <a:effectRef idx="2">
+            <a:schemeClr val="accent1"/>
+          </a:effectRef>
+          <a:fontRef idx="minor">
+            <a:schemeClr val="lt1"/>
+          </a:fontRef>
+        </p:style>
+        <p:txBody>
+          <a:bodyPr rtlCol="0" anchor="ctr"/>
+          <a:lstStyle/>
+          <a:p>
+            <a:pPr algn="ctr"/>
+          </a:p>
+        </p:txBody>
+      </p:sp>
+      <p:pic>
+        <p:nvPicPr>
+          <p:cNvPr id="5" name="Picture 4" descr="Aula09.png"/>
+          <p:cNvPicPr>
+            <a:picLocks noChangeAspect="1"/>
+          </p:cNvPicPr>
+          <p:nvPr/>
+        </p:nvPicPr>
+        <p:blipFill>
+          <a:blip r:embed="rId3"/>
+          <a:stretch>
+            <a:fillRect/>
+          </a:stretch>
+        </p:blipFill>
+        <p:spPr>
+          <a:xfrm>
+            <a:off x="1028700" y="1120140"/>
+            <a:ext cx="457200" cy="457200"/>
+          </a:xfrm>
+          <a:prstGeom prst="rect">
+            <a:avLst/>
+          </a:prstGeom>
+        </p:spPr>
+      </p:pic>
+      <p:sp>
+        <p:nvSpPr>
+          <p:cNvPr id="6" name="TextBox 5"/>
+          <p:cNvSpPr txBox="1"/>
+          <p:nvPr/>
+        </p:nvSpPr>
+        <p:spPr>
+          <a:xfrm>
+            <a:off x="457200" y="2148840"/>
+            <a:ext cx="9144000" cy="274320"/>
+          </a:xfrm>
+          <a:prstGeom prst="rect">
+            <a:avLst/>
+          </a:prstGeom>
+          <a:noFill/>
+        </p:spPr>
+        <p:txBody>
+          <a:bodyPr wrap="square">
+            <a:spAutoFit/>
+          </a:bodyPr>
+          <a:lstStyle/>
+          <a:p>
+            <a:pPr algn="l"/>
+            <a:r>
+              <a:rPr sz="1100" b="1" i="0">
+                <a:solidFill>
+                  <a:srgbClr val="E8963C"/>
+                </a:solidFill>
+                <a:latin typeface="Calibri"/>
+              </a:rPr>
+              <a:t>PENSAMENTO COMPUTACIONAL · AULA 15 DE 15</a:t>
+            </a:r>
+          </a:p>
+        </p:txBody>
+      </p:sp>
+      <p:sp>
+        <p:nvSpPr>
+          <p:cNvPr id="7" name="TextBox 6"/>
+          <p:cNvSpPr txBox="1"/>
+          <p:nvPr/>
+        </p:nvSpPr>
+        <p:spPr>
+          <a:xfrm>
+            <a:off x="457200" y="2514600"/>
+            <a:ext cx="10789920" cy="1463040"/>
+          </a:xfrm>
+          <a:prstGeom prst="rect">
+            <a:avLst/>
+          </a:prstGeom>
+          <a:noFill/>
+        </p:spPr>
+        <p:txBody>
+          <a:bodyPr wrap="square">
+            <a:spAutoFit/>
+          </a:bodyPr>
+          <a:lstStyle/>
+          <a:p>
+            <a:pPr algn="l"/>
+            <a:r>
+              <a:rPr sz="4000" b="1" i="0">
+                <a:solidFill>
+                  <a:srgbClr val="FFFFFF"/>
+                </a:solidFill>
+                <a:latin typeface="Cambria"/>
+              </a:rPr>
+              <a:t>Fechamento para discussão</a:t>
+            </a:r>
+          </a:p>
+        </p:txBody>
+      </p:sp>
+      <p:sp>
+        <p:nvSpPr>
+          <p:cNvPr id="8" name="TextBox 7"/>
+          <p:cNvSpPr txBox="1"/>
+          <p:nvPr/>
+        </p:nvSpPr>
+        <p:spPr>
+          <a:xfrm>
+            <a:off x="457200" y="3977640"/>
+            <a:ext cx="9509760" cy="1005840"/>
+          </a:xfrm>
+          <a:prstGeom prst="rect">
+            <a:avLst/>
+          </a:prstGeom>
+          <a:noFill/>
+        </p:spPr>
+        <p:txBody>
+          <a:bodyPr wrap="square">
+            <a:spAutoFit/>
+          </a:bodyPr>
+          <a:lstStyle/>
+          <a:p>
+            <a:pPr algn="l"/>
+            <a:r>
+              <a:rPr sz="1700" b="0" i="1">
+                <a:solidFill>
+                  <a:srgbClr val="C9D3DE"/>
+                </a:solidFill>
+                <a:latin typeface="Calibri"/>
+              </a:rPr>
+              <a:t>Julia e Pluto na disciplina de Pensamento Computacional — PROFCOMP, Mestrado Profissional em Computação em Rede Nacional.</a:t>
+            </a:r>
+          </a:p>
+        </p:txBody>
+      </p:sp>
+      <p:sp>
+        <p:nvSpPr>
+          <p:cNvPr id="9" name="TextBox 8"/>
+          <p:cNvSpPr txBox="1"/>
+          <p:nvPr/>
+        </p:nvSpPr>
+        <p:spPr>
+          <a:xfrm>
+            <a:off x="457200" y="6528816"/>
+            <a:ext cx="7315200" cy="256032"/>
+          </a:xfrm>
+          <a:prstGeom prst="rect">
+            <a:avLst/>
+          </a:prstGeom>
+          <a:noFill/>
+        </p:spPr>
+        <p:txBody>
+          <a:bodyPr wrap="square">
+            <a:spAutoFit/>
+          </a:bodyPr>
+          <a:lstStyle/>
+          <a:p>
+            <a:pPr algn="l"/>
+            <a:r>
+              <a:rPr sz="900" b="0" i="0">
+                <a:solidFill>
+                  <a:srgbClr val="8CA0B3"/>
+                </a:solidFill>
+                <a:latin typeface="Calibri"/>
+              </a:rPr>
+              <a:t>Aula 15 · Fechamento e Discussão</a:t>
+            </a:r>
+          </a:p>
+        </p:txBody>
+      </p:sp>
+      <p:sp>
+        <p:nvSpPr>
+          <p:cNvPr id="10" name="TextBox 9"/>
+          <p:cNvSpPr txBox="1"/>
+          <p:nvPr/>
+        </p:nvSpPr>
+        <p:spPr>
+          <a:xfrm>
+            <a:off x="10362895" y="6528816"/>
+            <a:ext cx="1371600" cy="256032"/>
+          </a:xfrm>
+          <a:prstGeom prst="rect">
+            <a:avLst/>
+          </a:prstGeom>
+          <a:noFill/>
+        </p:spPr>
+        <p:txBody>
+          <a:bodyPr wrap="square">
+            <a:spAutoFit/>
+          </a:bodyPr>
+          <a:lstStyle/>
+          <a:p>
+            <a:pPr algn="r"/>
+            <a:r>
+              <a:rPr sz="900" b="0" i="0">
+                <a:solidFill>
+                  <a:srgbClr val="8CA0B3"/>
+                </a:solidFill>
+                <a:latin typeface="Calibri"/>
+              </a:rPr>
+              <a:t>01 / 16</a:t>
+            </a:r>
+          </a:p>
+        </p:txBody>
+      </p:sp>
+    </p:spTree>
+  </p:cSld>
+  <p:clrMapOvr>
+    <a:masterClrMapping/>
+  </p:clrMapOvr>
+</p:sld>
+</file>
+
+<file path=ppt/slides/slide10.xml><?xml version="1.0" encoding="utf-8"?>
+<p:sld xmlns:a="http://schemas.openxmlformats.org/drawingml/2006/main" xmlns:r="http://schemas.openxmlformats.org/officeDocument/2006/relationships" xmlns:p="http://schemas.openxmlformats.org/presentationml/2006/main">
+  <p:cSld name="Slide 8">
+    <p:bg>
+      <p:bgPr>
+        <a:solidFill>
+          <a:srgbClr val="F8FAFC"/>
         </a:solidFill>
       </p:bgPr>
     </p:bg>
@@ -1872,11 +2241,11 @@
             <a:avLst/>
           </a:prstGeom>
           <a:solidFill>
-            <a:srgbClr val="0E1B2A"/>
+            <a:srgbClr val="F8FAFC"/>
           </a:solidFill>
           <a:ln w="12700">
             <a:solidFill>
-              <a:srgbClr val="0E1B2A">
+              <a:srgbClr val="F8FAFC">
                 <a:alpha val="0"/>
               </a:srgbClr>
             </a:solidFill>
@@ -1919,8 +2288,46 @@
         </p:nvSpPr>
         <p:spPr>
           <a:xfrm>
-            <a:off x="685800" y="777240"/>
-            <a:ext cx="10058400" cy="457200"/>
+            <a:off x="594360" y="411480"/>
+            <a:ext cx="9875520" cy="502920"/>
+          </a:xfrm>
+          <a:prstGeom prst="rect">
+            <a:avLst/>
+          </a:prstGeom>
+          <a:noFill/>
+          <a:ln/>
+        </p:spPr>
+        <p:txBody>
+          <a:bodyPr wrap="square" lIns="254" tIns="254" rIns="254" bIns="254" rtlCol="0" anchor="ctr">
+            <a:normAutofit/>
+          </a:bodyPr>
+          <a:lstStyle/>
+          <a:p>
+            <a:pPr indent="0" marL="0">
+              <a:buNone/>
+            </a:pPr>
+            <a:r>
+              <a:rPr lang="en-US" sz="2500" b="1" dirty="0">
+                <a:solidFill>
+                  <a:srgbClr val="0E1B2A"/>
+                </a:solidFill>
+              </a:rPr>
+              <a:t>6. Onde apareceu generalização?</a:t>
+            </a:r>
+            <a:endParaRPr lang="en-US" sz="2500" dirty="0"/>
+          </a:p>
+        </p:txBody>
+      </p:sp>
+      <p:sp>
+        <p:nvSpPr>
+          <p:cNvPr id="5" name="Text 3"/>
+          <p:cNvSpPr/>
+          <p:nvPr/>
+        </p:nvSpPr>
+        <p:spPr>
+          <a:xfrm>
+            <a:off x="621792" y="960120"/>
+            <a:ext cx="10698480" cy="292608"/>
           </a:xfrm>
           <a:prstGeom prst="rect">
             <a:avLst/>
@@ -1936,111 +2343,35 @@
               <a:buNone/>
             </a:pPr>
             <a:r>
-              <a:rPr lang="en-US" sz="2800" b="1" dirty="0">
-                <a:solidFill>
-                  <a:srgbClr val="FFFFFF"/>
-                </a:solidFill>
-              </a:rPr>
-              <a:t>Fechamento para discussão</a:t>
-            </a:r>
-            <a:endParaRPr lang="en-US" sz="2800" dirty="0"/>
-          </a:p>
-        </p:txBody>
-      </p:sp>
-      <p:sp>
-        <p:nvSpPr>
-          <p:cNvPr id="5" name="Text 3"/>
-          <p:cNvSpPr/>
-          <p:nvPr/>
-        </p:nvSpPr>
-        <p:spPr>
-          <a:xfrm>
-            <a:off x="713232" y="1325880"/>
-            <a:ext cx="9875520" cy="347472"/>
-          </a:xfrm>
-          <a:prstGeom prst="rect">
-            <a:avLst/>
-          </a:prstGeom>
-          <a:noFill/>
-          <a:ln/>
-        </p:spPr>
-        <p:txBody>
-          <a:bodyPr wrap="square" lIns="0" tIns="0" rIns="0" bIns="0" rtlCol="0" anchor="ctr"/>
-          <a:lstStyle/>
-          <a:p>
-            <a:pPr indent="0" marL="0">
-              <a:buNone/>
-            </a:pPr>
-            <a:r>
-              <a:rPr lang="en-US" sz="1650" dirty="0">
-                <a:solidFill>
-                  <a:srgbClr val="DDEAF2"/>
-                </a:solidFill>
-              </a:rPr>
-              <a:t>Julia e Pluto na disciplina de Pensamento Computacional</a:t>
-            </a:r>
-            <a:endParaRPr lang="en-US" sz="1650" dirty="0"/>
-          </a:p>
-        </p:txBody>
-      </p:sp>
-      <p:sp>
-        <p:nvSpPr>
-          <p:cNvPr id="6" name="Text 4"/>
-          <p:cNvSpPr/>
-          <p:nvPr/>
-        </p:nvSpPr>
-        <p:spPr>
-          <a:xfrm>
-            <a:off x="731520" y="1828800"/>
-            <a:ext cx="9692640" cy="237744"/>
-          </a:xfrm>
-          <a:prstGeom prst="rect">
-            <a:avLst/>
-          </a:prstGeom>
-          <a:noFill/>
-          <a:ln/>
-        </p:spPr>
-        <p:txBody>
-          <a:bodyPr wrap="square" lIns="0" tIns="0" rIns="0" bIns="0" rtlCol="0" anchor="ctr"/>
-          <a:lstStyle/>
-          <a:p>
-            <a:pPr indent="0" marL="0">
-              <a:buNone/>
-            </a:pPr>
-            <a:r>
-              <a:rPr lang="en-US" sz="1150" dirty="0">
-                <a:solidFill>
-                  <a:srgbClr val="9CC7D9"/>
-                </a:solidFill>
-              </a:rPr>
-              <a:t>PROFCOMP · Mestrado Profissional em Computação em Rede Nacional</a:t>
-            </a:r>
-            <a:endParaRPr lang="en-US" sz="1150" dirty="0"/>
-          </a:p>
-        </p:txBody>
-      </p:sp>
-      <p:sp>
-        <p:nvSpPr>
-          <p:cNvPr id="7" name="Shape 5"/>
-          <p:cNvSpPr/>
-          <p:nvPr/>
-        </p:nvSpPr>
-        <p:spPr>
-          <a:xfrm>
-            <a:off x="960120" y="3703320"/>
-            <a:ext cx="2651760" cy="1325880"/>
-          </a:xfrm>
-          <a:prstGeom prst="roundRect">
-            <a:avLst>
-              <a:gd name="adj" fmla="val 8276"/>
-            </a:avLst>
-          </a:prstGeom>
-          <a:solidFill>
-            <a:srgbClr val="122B3A"/>
-          </a:solidFill>
-          <a:ln w="19050">
+              <a:rPr lang="en-US" sz="1250" dirty="0">
+                <a:solidFill>
+                  <a:srgbClr val="52616B"/>
+                </a:solidFill>
+              </a:rPr>
+              <a:t>Foco: reconstrução de estratégia e passagem do caso particular para função.</a:t>
+            </a:r>
+            <a:endParaRPr lang="en-US" sz="1250" dirty="0"/>
+          </a:p>
+        </p:txBody>
+      </p:sp>
+      <p:sp>
+        <p:nvSpPr>
+          <p:cNvPr id="6" name="Shape 4"/>
+          <p:cNvSpPr/>
+          <p:nvPr/>
+        </p:nvSpPr>
+        <p:spPr>
+          <a:xfrm>
+            <a:off x="594360" y="1316736"/>
+            <a:ext cx="10972800" cy="0"/>
+          </a:xfrm>
+          <a:prstGeom prst="line">
+            <a:avLst/>
+          </a:prstGeom>
+          <a:noFill/>
+          <a:ln w="15240">
             <a:solidFill>
-              <a:srgbClr val="2AA7C9"/>
+              <a:srgbClr val="E9EEF3"/>
             </a:solidFill>
             <a:prstDash val="solid"/>
           </a:ln>
@@ -2048,151 +2379,157 @@
       </p:sp>
       <p:sp>
         <p:nvSpPr>
-          <p:cNvPr id="8" name="Text 6"/>
-          <p:cNvSpPr/>
-          <p:nvPr/>
-        </p:nvSpPr>
-        <p:spPr>
-          <a:xfrm>
-            <a:off x="1143000" y="3867912"/>
-            <a:ext cx="2286000" cy="201168"/>
-          </a:xfrm>
-          <a:prstGeom prst="rect">
-            <a:avLst/>
-          </a:prstGeom>
-          <a:noFill/>
-          <a:ln/>
-        </p:spPr>
-        <p:txBody>
-          <a:bodyPr wrap="square" lIns="0" tIns="0" rIns="0" bIns="0" rtlCol="0" anchor="ctr"/>
-          <a:lstStyle/>
-          <a:p>
-            <a:pPr indent="0" marL="0">
-              <a:buNone/>
-            </a:pPr>
-            <a:r>
-              <a:rPr lang="en-US" sz="1800" b="1" dirty="0">
-                <a:solidFill>
-                  <a:srgbClr val="FFFFFF"/>
-                </a:solidFill>
-              </a:rPr>
-              <a:t>código</a:t>
-            </a:r>
-            <a:endParaRPr lang="en-US" sz="1800" dirty="0"/>
-          </a:p>
-        </p:txBody>
-      </p:sp>
-      <p:sp>
-        <p:nvSpPr>
-          <p:cNvPr id="9" name="Text 7"/>
-          <p:cNvSpPr/>
-          <p:nvPr/>
-        </p:nvSpPr>
-        <p:spPr>
-          <a:xfrm>
-            <a:off x="1143000" y="4343400"/>
-            <a:ext cx="2286000" cy="411480"/>
-          </a:xfrm>
-          <a:prstGeom prst="rect">
-            <a:avLst/>
-          </a:prstGeom>
-          <a:noFill/>
-          <a:ln/>
-        </p:spPr>
-        <p:txBody>
-          <a:bodyPr wrap="square" lIns="0" tIns="0" rIns="0" bIns="0" rtlCol="0" anchor="ctr"/>
-          <a:lstStyle/>
-          <a:p>
-            <a:pPr indent="0" marL="0">
-              <a:buNone/>
-            </a:pPr>
-            <a:r>
-              <a:rPr lang="en-US" sz="1250" dirty="0">
-                <a:solidFill>
-                  <a:srgbClr val="DDEAF2"/>
-                </a:solidFill>
-              </a:rPr>
-              <a:t>variáveis</a:t>
-            </a:r>
-            <a:endParaRPr lang="en-US" sz="1250" dirty="0"/>
-          </a:p>
-          <a:p>
-            <a:pPr indent="0" marL="0">
-              <a:buNone/>
-            </a:pPr>
-            <a:r>
-              <a:rPr lang="en-US" sz="1250" dirty="0">
-                <a:solidFill>
-                  <a:srgbClr val="DDEAF2"/>
-                </a:solidFill>
-              </a:rPr>
-              <a:t>funções</a:t>
-            </a:r>
-            <a:endParaRPr lang="en-US" sz="1250" dirty="0"/>
-          </a:p>
-        </p:txBody>
-      </p:sp>
-      <p:sp>
-        <p:nvSpPr>
-          <p:cNvPr id="10" name="Shape 8"/>
-          <p:cNvSpPr/>
-          <p:nvPr/>
-        </p:nvSpPr>
-        <p:spPr>
-          <a:xfrm>
-            <a:off x="3703320" y="4361688"/>
-            <a:ext cx="777240" cy="0"/>
-          </a:xfrm>
-          <a:prstGeom prst="line">
-            <a:avLst/>
-          </a:prstGeom>
-          <a:noFill/>
-          <a:ln w="27940">
-            <a:solidFill>
-              <a:srgbClr val="2AA7C9"/>
-            </a:solidFill>
-            <a:prstDash val="solid"/>
-            <a:tailEnd type="triangle"/>
-          </a:ln>
-        </p:spPr>
-      </p:sp>
-      <p:sp>
-        <p:nvSpPr>
-          <p:cNvPr id="11" name="Shape 9"/>
-          <p:cNvSpPr/>
-          <p:nvPr/>
-        </p:nvSpPr>
-        <p:spPr>
-          <a:xfrm>
-            <a:off x="4617720" y="3703320"/>
-            <a:ext cx="2651760" cy="1325880"/>
+          <p:cNvPr id="7" name="Shape 5"/>
+          <p:cNvSpPr/>
+          <p:nvPr/>
+        </p:nvSpPr>
+        <p:spPr>
+          <a:xfrm>
+            <a:off x="640080" y="1554480"/>
+            <a:ext cx="4892040" cy="3611880"/>
           </a:xfrm>
           <a:prstGeom prst="roundRect">
             <a:avLst>
-              <a:gd name="adj" fmla="val 8276"/>
+              <a:gd name="adj" fmla="val 2025"/>
             </a:avLst>
           </a:prstGeom>
           <a:solidFill>
-            <a:srgbClr val="143F50"/>
+            <a:srgbClr val="111827"/>
           </a:solidFill>
-          <a:ln w="19050">
+          <a:ln w="12700">
             <a:solidFill>
-              <a:srgbClr val="2AA7C9"/>
+              <a:srgbClr val="111827"/>
             </a:solidFill>
             <a:prstDash val="solid"/>
           </a:ln>
-        </p:spPr>
-      </p:sp>
-      <p:sp>
-        <p:nvSpPr>
-          <p:cNvPr id="12" name="Text 10"/>
-          <p:cNvSpPr/>
-          <p:nvPr/>
-        </p:nvSpPr>
-        <p:spPr>
-          <a:xfrm>
-            <a:off x="4800600" y="3867912"/>
-            <a:ext cx="2286000" cy="201168"/>
+          <a:effectLst>
+            <a:outerShdw sx="100000" sy="100000" kx="0" ky="0" algn="bl" rotWithShape="0" blurRad="25400" dist="12700" dir="2700000">
+              <a:srgbClr val="000000">
+                <a:alpha val="12000"/>
+              </a:srgbClr>
+            </a:outerShdw>
+          </a:effectLst>
+        </p:spPr>
+      </p:sp>
+      <p:sp>
+        <p:nvSpPr>
+          <p:cNvPr id="8" name="Text 6"/>
+          <p:cNvSpPr/>
+          <p:nvPr/>
+        </p:nvSpPr>
+        <p:spPr>
+          <a:xfrm>
+            <a:off x="804672" y="1700784"/>
+            <a:ext cx="4562856" cy="3355848"/>
+          </a:xfrm>
+          <a:prstGeom prst="rect">
+            <a:avLst/>
+          </a:prstGeom>
+          <a:noFill/>
+          <a:ln/>
+        </p:spPr>
+        <p:txBody>
+          <a:bodyPr wrap="square" lIns="254" tIns="254" rIns="254" bIns="254" rtlCol="0" anchor="ctr">
+            <a:normAutofit/>
+          </a:bodyPr>
+          <a:lstStyle/>
+          <a:p>
+            <a:pPr indent="0" marL="0">
+              <a:buNone/>
+            </a:pPr>
+            <a:r>
+              <a:rPr lang="en-US" sz="1220" dirty="0">
+                <a:solidFill>
+                  <a:srgbClr val="E5E7EB"/>
+                </a:solidFill>
+                <a:latin typeface="Aptos Mono" pitchFamily="34" charset="0"/>
+                <a:ea typeface="Aptos Mono" pitchFamily="34" charset="-122"/>
+                <a:cs typeface="Aptos Mono" pitchFamily="34" charset="-120"/>
+              </a:rPr>
+              <a:t>function media(notas)</a:t>
+            </a:r>
+            <a:endParaRPr lang="en-US" sz="1220" dirty="0"/>
+          </a:p>
+          <a:p>
+            <a:pPr indent="0" marL="0">
+              <a:buNone/>
+            </a:pPr>
+            <a:r>
+              <a:rPr lang="en-US" sz="1220" dirty="0">
+                <a:solidFill>
+                  <a:srgbClr val="E5E7EB"/>
+                </a:solidFill>
+                <a:latin typeface="Aptos Mono" pitchFamily="34" charset="0"/>
+                <a:ea typeface="Aptos Mono" pitchFamily="34" charset="-122"/>
+                <a:cs typeface="Aptos Mono" pitchFamily="34" charset="-120"/>
+              </a:rPr>
+              <a:t>    sum(notas) / length(notas)</a:t>
+            </a:r>
+            <a:endParaRPr lang="en-US" sz="1220" dirty="0"/>
+          </a:p>
+          <a:p>
+            <a:pPr indent="0" marL="0">
+              <a:buNone/>
+            </a:pPr>
+            <a:r>
+              <a:rPr lang="en-US" sz="1220" dirty="0">
+                <a:solidFill>
+                  <a:srgbClr val="E5E7EB"/>
+                </a:solidFill>
+                <a:latin typeface="Aptos Mono" pitchFamily="34" charset="0"/>
+                <a:ea typeface="Aptos Mono" pitchFamily="34" charset="-122"/>
+                <a:cs typeface="Aptos Mono" pitchFamily="34" charset="-120"/>
+              </a:rPr>
+              <a:t>end</a:t>
+            </a:r>
+            <a:endParaRPr lang="en-US" sz="1220" dirty="0"/>
+          </a:p>
+          <a:p>
+            <a:pPr indent="0" marL="0">
+              <a:buNone/>
+            </a:pPr>
+            <a:r>
+              <a:rPr lang="en-US" sz="1220" dirty="0">
+                <a:solidFill>
+                  <a:srgbClr val="E5E7EB"/>
+                </a:solidFill>
+                <a:latin typeface="Aptos Mono" pitchFamily="34" charset="0"/>
+                <a:ea typeface="Aptos Mono" pitchFamily="34" charset="-122"/>
+                <a:cs typeface="Aptos Mono" pitchFamily="34" charset="-120"/>
+              </a:rPr>
+              <a:t>media([8, 6, 7])</a:t>
+            </a:r>
+            <a:endParaRPr lang="en-US" sz="1220" dirty="0"/>
+          </a:p>
+          <a:p>
+            <a:pPr indent="0" marL="0">
+              <a:buNone/>
+            </a:pPr>
+            <a:r>
+              <a:rPr lang="en-US" sz="1220" dirty="0">
+                <a:solidFill>
+                  <a:srgbClr val="E5E7EB"/>
+                </a:solidFill>
+                <a:latin typeface="Aptos Mono" pitchFamily="34" charset="0"/>
+                <a:ea typeface="Aptos Mono" pitchFamily="34" charset="-122"/>
+                <a:cs typeface="Aptos Mono" pitchFamily="34" charset="-120"/>
+              </a:rPr>
+              <a:t>media([10, 9, 8])</a:t>
+            </a:r>
+            <a:endParaRPr lang="en-US" sz="1220" dirty="0"/>
+          </a:p>
+        </p:txBody>
+      </p:sp>
+      <p:sp>
+        <p:nvSpPr>
+          <p:cNvPr id="9" name="Text 7"/>
+          <p:cNvSpPr/>
+          <p:nvPr/>
+        </p:nvSpPr>
+        <p:spPr>
+          <a:xfrm>
+            <a:off x="5897880" y="1536192"/>
+            <a:ext cx="5349240" cy="274320"/>
           </a:xfrm>
           <a:prstGeom prst="rect">
             <a:avLst/>
@@ -2208,113 +2545,37 @@
               <a:buNone/>
             </a:pPr>
             <a:r>
-              <a:rPr lang="en-US" sz="1800" b="1" dirty="0">
-                <a:solidFill>
-                  <a:srgbClr val="FFFFFF"/>
-                </a:solidFill>
-              </a:rPr>
-              <a:t>modelo</a:t>
-            </a:r>
-            <a:endParaRPr lang="en-US" sz="1800" dirty="0"/>
-          </a:p>
-        </p:txBody>
-      </p:sp>
-      <p:sp>
-        <p:nvSpPr>
-          <p:cNvPr id="13" name="Text 11"/>
-          <p:cNvSpPr/>
-          <p:nvPr/>
-        </p:nvSpPr>
-        <p:spPr>
-          <a:xfrm>
-            <a:off x="4800600" y="4343400"/>
-            <a:ext cx="2286000" cy="411480"/>
-          </a:xfrm>
-          <a:prstGeom prst="rect">
-            <a:avLst/>
-          </a:prstGeom>
-          <a:noFill/>
-          <a:ln/>
-        </p:spPr>
-        <p:txBody>
-          <a:bodyPr wrap="square" lIns="0" tIns="0" rIns="0" bIns="0" rtlCol="0" anchor="ctr"/>
-          <a:lstStyle/>
-          <a:p>
-            <a:pPr indent="0" marL="0">
-              <a:buNone/>
-            </a:pPr>
-            <a:r>
-              <a:rPr lang="en-US" sz="1250" dirty="0">
-                <a:solidFill>
-                  <a:srgbClr val="DDEAF2"/>
-                </a:solidFill>
-              </a:rPr>
-              <a:t>gráfico</a:t>
-            </a:r>
-            <a:endParaRPr lang="en-US" sz="1250" dirty="0"/>
-          </a:p>
-          <a:p>
-            <a:pPr indent="0" marL="0">
-              <a:buNone/>
-            </a:pPr>
-            <a:r>
-              <a:rPr lang="en-US" sz="1250" dirty="0">
-                <a:solidFill>
-                  <a:srgbClr val="DDEAF2"/>
-                </a:solidFill>
-              </a:rPr>
-              <a:t>tabela</a:t>
-            </a:r>
-            <a:endParaRPr lang="en-US" sz="1250" dirty="0"/>
-          </a:p>
-        </p:txBody>
-      </p:sp>
-      <p:sp>
-        <p:nvSpPr>
-          <p:cNvPr id="14" name="Shape 12"/>
-          <p:cNvSpPr/>
-          <p:nvPr/>
-        </p:nvSpPr>
-        <p:spPr>
-          <a:xfrm>
-            <a:off x="7360920" y="4361688"/>
-            <a:ext cx="777240" cy="0"/>
-          </a:xfrm>
-          <a:prstGeom prst="line">
-            <a:avLst/>
-          </a:prstGeom>
-          <a:noFill/>
-          <a:ln w="27940">
+              <a:rPr lang="en-US" sz="1550" b="1" dirty="0">
+                <a:solidFill>
+                  <a:srgbClr val="0E1B2A"/>
+                </a:solidFill>
+              </a:rPr>
+              <a:t>Pequena tarefa no Pluto</a:t>
+            </a:r>
+            <a:endParaRPr lang="en-US" sz="1550" dirty="0"/>
+          </a:p>
+        </p:txBody>
+      </p:sp>
+      <p:sp>
+        <p:nvSpPr>
+          <p:cNvPr id="10" name="Shape 8"/>
+          <p:cNvSpPr/>
+          <p:nvPr/>
+        </p:nvSpPr>
+        <p:spPr>
+          <a:xfrm>
+            <a:off x="5897880" y="1901952"/>
+            <a:ext cx="512064" cy="512064"/>
+          </a:xfrm>
+          <a:prstGeom prst="ellipse">
+            <a:avLst/>
+          </a:prstGeom>
+          <a:solidFill>
+            <a:srgbClr val="2C7A7B"/>
+          </a:solidFill>
+          <a:ln w="12700">
             <a:solidFill>
-              <a:srgbClr val="2AA7C9"/>
-            </a:solidFill>
-            <a:prstDash val="solid"/>
-            <a:tailEnd type="triangle"/>
-          </a:ln>
-        </p:spPr>
-      </p:sp>
-      <p:sp>
-        <p:nvSpPr>
-          <p:cNvPr id="15" name="Shape 13"/>
-          <p:cNvSpPr/>
-          <p:nvPr/>
-        </p:nvSpPr>
-        <p:spPr>
-          <a:xfrm>
-            <a:off x="8275320" y="3703320"/>
-            <a:ext cx="2651760" cy="1325880"/>
-          </a:xfrm>
-          <a:prstGeom prst="roundRect">
-            <a:avLst>
-              <a:gd name="adj" fmla="val 8276"/>
-            </a:avLst>
-          </a:prstGeom>
-          <a:solidFill>
-            <a:srgbClr val="184D5B"/>
-          </a:solidFill>
-          <a:ln w="19050">
-            <a:solidFill>
-              <a:srgbClr val="2AA7C9"/>
+              <a:srgbClr val="2C7A7B"/>
             </a:solidFill>
             <a:prstDash val="solid"/>
           </a:ln>
@@ -2322,14 +2583,14 @@
       </p:sp>
       <p:sp>
         <p:nvSpPr>
-          <p:cNvPr id="16" name="Text 14"/>
-          <p:cNvSpPr/>
-          <p:nvPr/>
-        </p:nvSpPr>
-        <p:spPr>
-          <a:xfrm>
-            <a:off x="8458200" y="3867912"/>
-            <a:ext cx="2286000" cy="201168"/>
+          <p:cNvPr id="11" name="Text 9"/>
+          <p:cNvSpPr/>
+          <p:nvPr/>
+        </p:nvSpPr>
+        <p:spPr>
+          <a:xfrm>
+            <a:off x="5897880" y="1984248"/>
+            <a:ext cx="512064" cy="182880"/>
           </a:xfrm>
           <a:prstGeom prst="rect">
             <a:avLst/>
@@ -2341,20 +2602,182 @@
           <a:bodyPr wrap="square" lIns="0" tIns="0" rIns="0" bIns="0" rtlCol="0" anchor="ctr"/>
           <a:lstStyle/>
           <a:p>
-            <a:pPr indent="0" marL="0">
-              <a:buNone/>
-            </a:pPr>
-            <a:r>
-              <a:rPr lang="en-US" sz="1800" b="1" dirty="0">
+            <a:pPr algn="ctr" indent="0" marL="0">
+              <a:buNone/>
+            </a:pPr>
+            <a:r>
+              <a:rPr lang="en-US" sz="1500" b="1" dirty="0">
                 <a:solidFill>
                   <a:srgbClr val="FFFFFF"/>
                 </a:solidFill>
               </a:rPr>
-              <a:t>discussão</a:t>
-            </a:r>
-            <a:endParaRPr lang="en-US" sz="1800" dirty="0"/>
-          </a:p>
-        </p:txBody>
+              <a:t>1</a:t>
+            </a:r>
+            <a:endParaRPr lang="en-US" sz="1500" dirty="0"/>
+          </a:p>
+        </p:txBody>
+      </p:sp>
+      <p:sp>
+        <p:nvSpPr>
+          <p:cNvPr id="12" name="Text 10"/>
+          <p:cNvSpPr/>
+          <p:nvPr/>
+        </p:nvSpPr>
+        <p:spPr>
+          <a:xfrm>
+            <a:off x="6510528" y="1901952"/>
+            <a:ext cx="4892040" cy="384048"/>
+          </a:xfrm>
+          <a:prstGeom prst="rect">
+            <a:avLst/>
+          </a:prstGeom>
+          <a:noFill/>
+          <a:ln/>
+        </p:spPr>
+        <p:txBody>
+          <a:bodyPr wrap="square" lIns="254" tIns="254" rIns="254" bIns="254" rtlCol="0" anchor="ctr">
+            <a:normAutofit/>
+          </a:bodyPr>
+          <a:lstStyle/>
+          <a:p>
+            <a:pPr indent="0" marL="0">
+              <a:buNone/>
+            </a:pPr>
+            <a:r>
+              <a:rPr lang="en-US" sz="1220" dirty="0">
+                <a:solidFill>
+                  <a:srgbClr val="0E1B2A"/>
+                </a:solidFill>
+              </a:rPr>
+              <a:t>Resolver primeiro um caso manualmente.</a:t>
+            </a:r>
+            <a:endParaRPr lang="en-US" sz="1220" dirty="0"/>
+          </a:p>
+        </p:txBody>
+      </p:sp>
+      <p:sp>
+        <p:nvSpPr>
+          <p:cNvPr id="13" name="Shape 11"/>
+          <p:cNvSpPr/>
+          <p:nvPr/>
+        </p:nvSpPr>
+        <p:spPr>
+          <a:xfrm>
+            <a:off x="5897880" y="2505456"/>
+            <a:ext cx="512064" cy="512064"/>
+          </a:xfrm>
+          <a:prstGeom prst="ellipse">
+            <a:avLst/>
+          </a:prstGeom>
+          <a:solidFill>
+            <a:srgbClr val="2C7A7B"/>
+          </a:solidFill>
+          <a:ln w="12700">
+            <a:solidFill>
+              <a:srgbClr val="2C7A7B"/>
+            </a:solidFill>
+            <a:prstDash val="solid"/>
+          </a:ln>
+        </p:spPr>
+      </p:sp>
+      <p:sp>
+        <p:nvSpPr>
+          <p:cNvPr id="14" name="Text 12"/>
+          <p:cNvSpPr/>
+          <p:nvPr/>
+        </p:nvSpPr>
+        <p:spPr>
+          <a:xfrm>
+            <a:off x="5897880" y="2587752"/>
+            <a:ext cx="512064" cy="182880"/>
+          </a:xfrm>
+          <a:prstGeom prst="rect">
+            <a:avLst/>
+          </a:prstGeom>
+          <a:noFill/>
+          <a:ln/>
+        </p:spPr>
+        <p:txBody>
+          <a:bodyPr wrap="square" lIns="0" tIns="0" rIns="0" bIns="0" rtlCol="0" anchor="ctr"/>
+          <a:lstStyle/>
+          <a:p>
+            <a:pPr algn="ctr" indent="0" marL="0">
+              <a:buNone/>
+            </a:pPr>
+            <a:r>
+              <a:rPr lang="en-US" sz="1500" b="1" dirty="0">
+                <a:solidFill>
+                  <a:srgbClr val="FFFFFF"/>
+                </a:solidFill>
+              </a:rPr>
+              <a:t>2</a:t>
+            </a:r>
+            <a:endParaRPr lang="en-US" sz="1500" dirty="0"/>
+          </a:p>
+        </p:txBody>
+      </p:sp>
+      <p:sp>
+        <p:nvSpPr>
+          <p:cNvPr id="15" name="Text 13"/>
+          <p:cNvSpPr/>
+          <p:nvPr/>
+        </p:nvSpPr>
+        <p:spPr>
+          <a:xfrm>
+            <a:off x="6510528" y="2523744"/>
+            <a:ext cx="4892040" cy="384048"/>
+          </a:xfrm>
+          <a:prstGeom prst="rect">
+            <a:avLst/>
+          </a:prstGeom>
+          <a:noFill/>
+          <a:ln/>
+        </p:spPr>
+        <p:txBody>
+          <a:bodyPr wrap="square" lIns="254" tIns="254" rIns="254" bIns="254" rtlCol="0" anchor="ctr">
+            <a:normAutofit/>
+          </a:bodyPr>
+          <a:lstStyle/>
+          <a:p>
+            <a:pPr indent="0" marL="0">
+              <a:buNone/>
+            </a:pPr>
+            <a:r>
+              <a:rPr lang="en-US" sz="1220" dirty="0">
+                <a:solidFill>
+                  <a:srgbClr val="0E1B2A"/>
+                </a:solidFill>
+              </a:rPr>
+              <a:t>Transformar o cálculo repetido em função.</a:t>
+            </a:r>
+            <a:endParaRPr lang="en-US" sz="1220" dirty="0"/>
+          </a:p>
+        </p:txBody>
+      </p:sp>
+      <p:sp>
+        <p:nvSpPr>
+          <p:cNvPr id="16" name="Shape 14"/>
+          <p:cNvSpPr/>
+          <p:nvPr/>
+        </p:nvSpPr>
+        <p:spPr>
+          <a:xfrm>
+            <a:off x="5897880" y="3108960"/>
+            <a:ext cx="512064" cy="512064"/>
+          </a:xfrm>
+          <a:prstGeom prst="ellipse">
+            <a:avLst/>
+          </a:prstGeom>
+          <a:solidFill>
+            <a:srgbClr val="2C7A7B"/>
+          </a:solidFill>
+          <a:ln w="12700">
+            <a:solidFill>
+              <a:srgbClr val="2C7A7B"/>
+            </a:solidFill>
+            <a:prstDash val="solid"/>
+          </a:ln>
+        </p:spPr>
       </p:sp>
       <p:sp>
         <p:nvSpPr>
@@ -2364,8 +2787,8 @@
         </p:nvSpPr>
         <p:spPr>
           <a:xfrm>
-            <a:off x="8458200" y="4343400"/>
-            <a:ext cx="2286000" cy="411480"/>
+            <a:off x="5897880" y="3191256"/>
+            <a:ext cx="512064" cy="182880"/>
           </a:xfrm>
           <a:prstGeom prst="rect">
             <a:avLst/>
@@ -2377,32 +2800,18 @@
           <a:bodyPr wrap="square" lIns="0" tIns="0" rIns="0" bIns="0" rtlCol="0" anchor="ctr"/>
           <a:lstStyle/>
           <a:p>
-            <a:pPr indent="0" marL="0">
-              <a:buNone/>
-            </a:pPr>
-            <a:r>
-              <a:rPr lang="en-US" sz="1250" dirty="0">
-                <a:solidFill>
-                  <a:srgbClr val="DDEAF2"/>
-                </a:solidFill>
-              </a:rPr>
-              <a:t>interpretação</a:t>
-            </a:r>
-            <a:endParaRPr lang="en-US" sz="1250" dirty="0"/>
-          </a:p>
-          <a:p>
-            <a:pPr indent="0" marL="0">
-              <a:buNone/>
-            </a:pPr>
-            <a:r>
-              <a:rPr lang="en-US" sz="1250" dirty="0">
-                <a:solidFill>
-                  <a:srgbClr val="DDEAF2"/>
-                </a:solidFill>
-              </a:rPr>
-              <a:t>limites</a:t>
-            </a:r>
-            <a:endParaRPr lang="en-US" sz="1250" dirty="0"/>
+            <a:pPr algn="ctr" indent="0" marL="0">
+              <a:buNone/>
+            </a:pPr>
+            <a:r>
+              <a:rPr lang="en-US" sz="1500" b="1" dirty="0">
+                <a:solidFill>
+                  <a:srgbClr val="FFFFFF"/>
+                </a:solidFill>
+              </a:rPr>
+              <a:t>3</a:t>
+            </a:r>
+            <a:endParaRPr lang="en-US" sz="1500" dirty="0"/>
           </a:p>
         </p:txBody>
       </p:sp>
@@ -2414,8 +2823,73 @@
         </p:nvSpPr>
         <p:spPr>
           <a:xfrm>
-            <a:off x="731520" y="5715000"/>
-            <a:ext cx="10698480" cy="320040"/>
+            <a:off x="6510528" y="3145536"/>
+            <a:ext cx="4892040" cy="384048"/>
+          </a:xfrm>
+          <a:prstGeom prst="rect">
+            <a:avLst/>
+          </a:prstGeom>
+          <a:noFill/>
+          <a:ln/>
+        </p:spPr>
+        <p:txBody>
+          <a:bodyPr wrap="square" lIns="254" tIns="254" rIns="254" bIns="254" rtlCol="0" anchor="ctr">
+            <a:normAutofit/>
+          </a:bodyPr>
+          <a:lstStyle/>
+          <a:p>
+            <a:pPr indent="0" marL="0">
+              <a:buNone/>
+            </a:pPr>
+            <a:r>
+              <a:rPr lang="en-US" sz="1220" dirty="0">
+                <a:solidFill>
+                  <a:srgbClr val="0E1B2A"/>
+                </a:solidFill>
+              </a:rPr>
+              <a:t>Aplicar a função a casos novos e comparar.</a:t>
+            </a:r>
+            <a:endParaRPr lang="en-US" sz="1220" dirty="0"/>
+          </a:p>
+        </p:txBody>
+      </p:sp>
+      <p:sp>
+        <p:nvSpPr>
+          <p:cNvPr id="19" name="Shape 17"/>
+          <p:cNvSpPr/>
+          <p:nvPr/>
+        </p:nvSpPr>
+        <p:spPr>
+          <a:xfrm>
+            <a:off x="5897880" y="4754880"/>
+            <a:ext cx="2240280" cy="914400"/>
+          </a:xfrm>
+          <a:prstGeom prst="roundRect">
+            <a:avLst>
+              <a:gd name="adj" fmla="val 8000"/>
+            </a:avLst>
+          </a:prstGeom>
+          <a:solidFill>
+            <a:srgbClr val="D8F1F6"/>
+          </a:solidFill>
+          <a:ln w="12700">
+            <a:solidFill>
+              <a:srgbClr val="D8F1F6"/>
+            </a:solidFill>
+            <a:prstDash val="solid"/>
+          </a:ln>
+        </p:spPr>
+      </p:sp>
+      <p:sp>
+        <p:nvSpPr>
+          <p:cNvPr id="20" name="Text 18"/>
+          <p:cNvSpPr/>
+          <p:nvPr/>
+        </p:nvSpPr>
+        <p:spPr>
+          <a:xfrm>
+            <a:off x="6062472" y="4892040"/>
+            <a:ext cx="1920240" cy="182880"/>
           </a:xfrm>
           <a:prstGeom prst="rect">
             <a:avLst/>
@@ -2431,20 +2905,195 @@
               <a:buNone/>
             </a:pPr>
             <a:r>
-              <a:rPr lang="en-US" sz="1500" dirty="0">
-                <a:solidFill>
-                  <a:srgbClr val="FFFFFF"/>
-                </a:solidFill>
-              </a:rPr>
-              <a:t>A linguagem aparece como meio para representar, testar, visualizar e discutir problemas.</a:t>
-            </a:r>
-            <a:endParaRPr lang="en-US" sz="1500" dirty="0"/>
-          </a:p>
-        </p:txBody>
-      </p:sp>
-      <p:sp>
-        <p:nvSpPr>
-          <p:cNvPr id="19" name="Text 17"/>
+              <a:rPr lang="en-US" sz="950" b="1" dirty="0">
+                <a:solidFill>
+                  <a:srgbClr val="1B4E7A"/>
+                </a:solidFill>
+              </a:rPr>
+              <a:t>Aspecto qualitativo</a:t>
+            </a:r>
+            <a:endParaRPr lang="en-US" sz="950" dirty="0"/>
+          </a:p>
+        </p:txBody>
+      </p:sp>
+      <p:sp>
+        <p:nvSpPr>
+          <p:cNvPr id="21" name="Text 19"/>
+          <p:cNvSpPr/>
+          <p:nvPr/>
+        </p:nvSpPr>
+        <p:spPr>
+          <a:xfrm>
+            <a:off x="6062472" y="5120640"/>
+            <a:ext cx="1920240" cy="292608"/>
+          </a:xfrm>
+          <a:prstGeom prst="rect">
+            <a:avLst/>
+          </a:prstGeom>
+          <a:noFill/>
+          <a:ln/>
+        </p:spPr>
+        <p:txBody>
+          <a:bodyPr wrap="square" lIns="0" tIns="0" rIns="0" bIns="0" rtlCol="0" anchor="ctr">
+            <a:normAutofit/>
+          </a:bodyPr>
+          <a:lstStyle/>
+          <a:p>
+            <a:pPr indent="0" marL="0">
+              <a:buNone/>
+            </a:pPr>
+            <a:r>
+              <a:rPr lang="en-US" sz="980" dirty="0">
+                <a:solidFill>
+                  <a:srgbClr val="0E1B2A"/>
+                </a:solidFill>
+              </a:rPr>
+              <a:t>Flexibilidade notacional</a:t>
+            </a:r>
+            <a:endParaRPr lang="en-US" sz="980" dirty="0"/>
+          </a:p>
+        </p:txBody>
+      </p:sp>
+      <p:sp>
+        <p:nvSpPr>
+          <p:cNvPr id="22" name="Shape 20"/>
+          <p:cNvSpPr/>
+          <p:nvPr/>
+        </p:nvSpPr>
+        <p:spPr>
+          <a:xfrm>
+            <a:off x="8366760" y="4754880"/>
+            <a:ext cx="2926080" cy="914400"/>
+          </a:xfrm>
+          <a:prstGeom prst="roundRect">
+            <a:avLst>
+              <a:gd name="adj" fmla="val 8000"/>
+            </a:avLst>
+          </a:prstGeom>
+          <a:solidFill>
+            <a:srgbClr val="FEF3C7"/>
+          </a:solidFill>
+          <a:ln w="12700">
+            <a:solidFill>
+              <a:srgbClr val="FEF3C7"/>
+            </a:solidFill>
+            <a:prstDash val="solid"/>
+          </a:ln>
+        </p:spPr>
+      </p:sp>
+      <p:sp>
+        <p:nvSpPr>
+          <p:cNvPr id="23" name="Text 21"/>
+          <p:cNvSpPr/>
+          <p:nvPr/>
+        </p:nvSpPr>
+        <p:spPr>
+          <a:xfrm>
+            <a:off x="8549640" y="4892040"/>
+            <a:ext cx="2560320" cy="182880"/>
+          </a:xfrm>
+          <a:prstGeom prst="rect">
+            <a:avLst/>
+          </a:prstGeom>
+          <a:noFill/>
+          <a:ln/>
+        </p:spPr>
+        <p:txBody>
+          <a:bodyPr wrap="square" lIns="0" tIns="0" rIns="0" bIns="0" rtlCol="0" anchor="ctr"/>
+          <a:lstStyle/>
+          <a:p>
+            <a:pPr indent="0" marL="0">
+              <a:buNone/>
+            </a:pPr>
+            <a:r>
+              <a:rPr lang="en-US" sz="950" b="1" dirty="0">
+                <a:solidFill>
+                  <a:srgbClr val="92400E"/>
+                </a:solidFill>
+              </a:rPr>
+              <a:t>Registro esperado</a:t>
+            </a:r>
+            <a:endParaRPr lang="en-US" sz="950" dirty="0"/>
+          </a:p>
+        </p:txBody>
+      </p:sp>
+      <p:sp>
+        <p:nvSpPr>
+          <p:cNvPr id="24" name="Text 22"/>
+          <p:cNvSpPr/>
+          <p:nvPr/>
+        </p:nvSpPr>
+        <p:spPr>
+          <a:xfrm>
+            <a:off x="8549640" y="5120640"/>
+            <a:ext cx="2560320" cy="292608"/>
+          </a:xfrm>
+          <a:prstGeom prst="rect">
+            <a:avLst/>
+          </a:prstGeom>
+          <a:noFill/>
+          <a:ln/>
+        </p:spPr>
+        <p:txBody>
+          <a:bodyPr wrap="square" lIns="0" tIns="0" rIns="0" bIns="0" rtlCol="0" anchor="ctr">
+            <a:normAutofit/>
+          </a:bodyPr>
+          <a:lstStyle/>
+          <a:p>
+            <a:pPr indent="0" marL="0">
+              <a:buNone/>
+            </a:pPr>
+            <a:r>
+              <a:rPr lang="en-US" sz="980" dirty="0">
+                <a:solidFill>
+                  <a:srgbClr val="0E1B2A"/>
+                </a:solidFill>
+              </a:rPr>
+              <a:t>Descrição do que a função generalizou.</a:t>
+            </a:r>
+            <a:endParaRPr lang="en-US" sz="980" dirty="0"/>
+          </a:p>
+        </p:txBody>
+      </p:sp>
+      <p:sp>
+        <p:nvSpPr>
+          <p:cNvPr id="25" name="Text 23"/>
+          <p:cNvSpPr/>
+          <p:nvPr/>
+        </p:nvSpPr>
+        <p:spPr>
+          <a:xfrm>
+            <a:off x="502920" y="6510528"/>
+            <a:ext cx="8686800" cy="201168"/>
+          </a:xfrm>
+          <a:prstGeom prst="rect">
+            <a:avLst/>
+          </a:prstGeom>
+          <a:noFill/>
+          <a:ln/>
+        </p:spPr>
+        <p:txBody>
+          <a:bodyPr wrap="square" lIns="0" tIns="0" rIns="0" bIns="0" rtlCol="0" anchor="ctr"/>
+          <a:lstStyle/>
+          <a:p>
+            <a:pPr indent="0" marL="0">
+              <a:buNone/>
+            </a:pPr>
+            <a:r>
+              <a:rPr lang="en-US" sz="850" dirty="0">
+                <a:solidFill>
+                  <a:srgbClr val="52616B"/>
+                </a:solidFill>
+              </a:rPr>
+              <a:t>PROFCOMP · Pensamento Computacional · Julia + Pluto</a:t>
+            </a:r>
+            <a:endParaRPr lang="en-US" sz="850" dirty="0"/>
+          </a:p>
+        </p:txBody>
+      </p:sp>
+      <p:sp>
+        <p:nvSpPr>
+          <p:cNvPr id="26" name="Text 24"/>
           <p:cNvSpPr/>
           <p:nvPr/>
         </p:nvSpPr>
@@ -2457,11 +3106,11 @@
             <a:avLst/>
           </a:prstGeom>
           <a:solidFill>
-            <a:srgbClr val="FFFFFF"/>
+            <a:srgbClr val="1B4E7A"/>
           </a:solidFill>
           <a:ln>
             <a:solidFill>
-              <a:srgbClr val="FFFFFF"/>
+              <a:srgbClr val="1B4E7A"/>
             </a:solidFill>
           </a:ln>
         </p:spPr>
@@ -2475,10 +3124,10 @@
             <a:r>
               <a:rPr lang="en-US" sz="850" b="1" dirty="0">
                 <a:solidFill>
-                  <a:srgbClr val="0E1B2A"/>
-                </a:solidFill>
-              </a:rPr>
-              <a:t>01</a:t>
+                  <a:srgbClr val="FFFFFF"/>
+                </a:solidFill>
+              </a:rPr>
+              <a:t>08</a:t>
             </a:r>
             <a:endParaRPr lang="en-US" sz="850" dirty="0"/>
           </a:p>
@@ -2492,7 +3141,1376 @@
 </p:sld>
 </file>
 
-<file path=ppt/slides/slide10.xml><?xml version="1.0" encoding="utf-8"?>
+<file path=ppt/slides/slide11.xml><?xml version="1.0" encoding="utf-8"?>
+<p:sld xmlns:a="http://schemas.openxmlformats.org/drawingml/2006/main" xmlns:r="http://schemas.openxmlformats.org/officeDocument/2006/relationships" xmlns:p="http://schemas.openxmlformats.org/presentationml/2006/main">
+  <p:cSld name="Slide 4">
+    <p:bg>
+      <p:bgPr>
+        <a:solidFill>
+          <a:srgbClr val="FFFFFF"/>
+        </a:solidFill>
+      </p:bgPr>
+    </p:bg>
+    <p:spTree>
+      <p:nvGrpSpPr>
+        <p:cNvPr id="1" name=""/>
+        <p:cNvGrpSpPr/>
+        <p:nvPr/>
+      </p:nvGrpSpPr>
+      <p:grpSpPr>
+        <a:xfrm>
+          <a:off x="0" y="0"/>
+          <a:ext cx="0" cy="0"/>
+          <a:chOff x="0" y="0"/>
+          <a:chExt cx="0" cy="0"/>
+        </a:xfrm>
+      </p:grpSpPr>
+      <p:sp>
+        <p:nvSpPr>
+          <p:cNvPr id="2" name="Text 0"/>
+          <p:cNvSpPr/>
+          <p:nvPr/>
+        </p:nvSpPr>
+        <p:spPr>
+          <a:xfrm>
+            <a:off x="502920" y="320040"/>
+            <a:ext cx="11185855" cy="365760"/>
+          </a:xfrm>
+          <a:prstGeom prst="rect">
+            <a:avLst/>
+          </a:prstGeom>
+          <a:noFill/>
+          <a:ln/>
+        </p:spPr>
+        <p:txBody>
+          <a:bodyPr wrap="square" rtlCol="0" anchor="ctr"/>
+          <a:lstStyle/>
+          <a:p>
+            <a:pPr indent="0" marL="0">
+              <a:buNone/>
+            </a:pPr>
+            <a:r>
+              <a:rPr lang="en-US" sz="1300" b="1" spc="200" kern="0" dirty="0">
+                <a:solidFill>
+                  <a:srgbClr val="B5651D"/>
+                </a:solidFill>
+                <a:latin typeface="Calibri" pitchFamily="34" charset="0"/>
+                <a:ea typeface="Calibri" pitchFamily="34" charset="-122"/>
+                <a:cs typeface="Calibri" pitchFamily="34" charset="-120"/>
+              </a:rPr>
+              <a:t>AULA 15  ·  6. Onde apareceu generalização?</a:t>
+            </a:r>
+            <a:endParaRPr lang="en-US" sz="1300" dirty="0"/>
+          </a:p>
+        </p:txBody>
+      </p:sp>
+      <p:sp>
+        <p:nvSpPr>
+          <p:cNvPr id="3" name="Text 1"/>
+          <p:cNvSpPr/>
+          <p:nvPr/>
+        </p:nvSpPr>
+        <p:spPr>
+          <a:xfrm>
+            <a:off x="502920" y="658368"/>
+            <a:ext cx="11185855" cy="502920"/>
+          </a:xfrm>
+          <a:prstGeom prst="rect">
+            <a:avLst/>
+          </a:prstGeom>
+          <a:noFill/>
+          <a:ln/>
+        </p:spPr>
+        <p:txBody>
+          <a:bodyPr wrap="square" rtlCol="0" anchor="ctr"/>
+          <a:lstStyle/>
+          <a:p>
+            <a:pPr indent="0" marL="0">
+              <a:buNone/>
+            </a:pPr>
+            <a:r>
+              <a:rPr lang="en-US" sz="1900" b="1" dirty="0">
+                <a:solidFill>
+                  <a:srgbClr val="1B3A5C"/>
+                </a:solidFill>
+                <a:latin typeface="Calibri" pitchFamily="34" charset="0"/>
+                <a:ea typeface="Calibri" pitchFamily="34" charset="-122"/>
+                <a:cs typeface="Calibri" pitchFamily="34" charset="-120"/>
+              </a:rPr>
+              <a:t>Pequena tarefa no Pluto</a:t>
+            </a:r>
+            <a:endParaRPr lang="en-US" sz="1900" dirty="0"/>
+          </a:p>
+        </p:txBody>
+      </p:sp>
+      <p:sp>
+        <p:nvSpPr>
+          <p:cNvPr id="4" name="Shape 2"/>
+          <p:cNvSpPr/>
+          <p:nvPr/>
+        </p:nvSpPr>
+        <p:spPr>
+          <a:xfrm>
+            <a:off x="502920" y="1298448"/>
+            <a:ext cx="11185855" cy="1558290"/>
+          </a:xfrm>
+          <a:prstGeom prst="rect">
+            <a:avLst/>
+          </a:prstGeom>
+          <a:solidFill>
+            <a:srgbClr val="F2F4F7"/>
+          </a:solidFill>
+          <a:ln w="9525">
+            <a:solidFill>
+              <a:srgbClr val="C7CFDA"/>
+            </a:solidFill>
+            <a:prstDash val="solid"/>
+          </a:ln>
+        </p:spPr>
+      </p:sp>
+      <p:sp>
+        <p:nvSpPr>
+          <p:cNvPr id="5" name="Shape 3"/>
+          <p:cNvSpPr/>
+          <p:nvPr/>
+        </p:nvSpPr>
+        <p:spPr>
+          <a:xfrm>
+            <a:off x="502920" y="1298448"/>
+            <a:ext cx="54864" cy="1558290"/>
+          </a:xfrm>
+          <a:prstGeom prst="rect">
+            <a:avLst/>
+          </a:prstGeom>
+          <a:solidFill>
+            <a:srgbClr val="2C7A8C"/>
+          </a:solidFill>
+          <a:ln/>
+        </p:spPr>
+      </p:sp>
+      <p:sp>
+        <p:nvSpPr>
+          <p:cNvPr id="6" name="Text 4"/>
+          <p:cNvSpPr/>
+          <p:nvPr/>
+        </p:nvSpPr>
+        <p:spPr>
+          <a:xfrm>
+            <a:off x="731520" y="1371600"/>
+            <a:ext cx="10728655" cy="1411986"/>
+          </a:xfrm>
+          <a:prstGeom prst="rect">
+            <a:avLst/>
+          </a:prstGeom>
+          <a:noFill/>
+          <a:ln/>
+        </p:spPr>
+        <p:txBody>
+          <a:bodyPr wrap="square" rtlCol="0" anchor="t"/>
+          <a:lstStyle/>
+          <a:p>
+            <a:pPr indent="0" marL="0">
+              <a:lnSpc>
+                <a:spcPct val="115000"/>
+              </a:lnSpc>
+              <a:buNone/>
+            </a:pPr>
+            <a:r>
+              <a:rPr lang="en-US" sz="1300" dirty="0">
+                <a:solidFill>
+                  <a:srgbClr val="1A1A1A"/>
+                </a:solidFill>
+                <a:latin typeface="Consolas" pitchFamily="34" charset="0"/>
+                <a:ea typeface="Consolas" pitchFamily="34" charset="-122"/>
+                <a:cs typeface="Consolas" pitchFamily="34" charset="-120"/>
+              </a:rPr>
+              <a:t>function media(notas)</a:t>
+            </a:r>
+            <a:endParaRPr lang="en-US" sz="1300" dirty="0"/>
+          </a:p>
+          <a:p>
+            <a:pPr indent="0" marL="0">
+              <a:lnSpc>
+                <a:spcPct val="115000"/>
+              </a:lnSpc>
+              <a:buNone/>
+            </a:pPr>
+            <a:r>
+              <a:rPr lang="en-US" sz="1300" dirty="0">
+                <a:solidFill>
+                  <a:srgbClr val="1A1A1A"/>
+                </a:solidFill>
+                <a:latin typeface="Consolas" pitchFamily="34" charset="0"/>
+                <a:ea typeface="Consolas" pitchFamily="34" charset="-122"/>
+                <a:cs typeface="Consolas" pitchFamily="34" charset="-120"/>
+              </a:rPr>
+              <a:t>    sum(notas) / length(notas)</a:t>
+            </a:r>
+            <a:endParaRPr lang="en-US" sz="1300" dirty="0"/>
+          </a:p>
+          <a:p>
+            <a:pPr indent="0" marL="0">
+              <a:lnSpc>
+                <a:spcPct val="115000"/>
+              </a:lnSpc>
+              <a:buNone/>
+            </a:pPr>
+            <a:r>
+              <a:rPr lang="en-US" sz="1300" dirty="0">
+                <a:solidFill>
+                  <a:srgbClr val="1A1A1A"/>
+                </a:solidFill>
+                <a:latin typeface="Consolas" pitchFamily="34" charset="0"/>
+                <a:ea typeface="Consolas" pitchFamily="34" charset="-122"/>
+                <a:cs typeface="Consolas" pitchFamily="34" charset="-120"/>
+              </a:rPr>
+              <a:t>end</a:t>
+            </a:r>
+            <a:endParaRPr lang="en-US" sz="1300" dirty="0"/>
+          </a:p>
+          <a:p>
+            <a:pPr indent="0" marL="0">
+              <a:lnSpc>
+                <a:spcPct val="115000"/>
+              </a:lnSpc>
+              <a:buNone/>
+            </a:pPr>
+            <a:r>
+              <a:rPr lang="en-US" sz="1300" dirty="0">
+                <a:solidFill>
+                  <a:srgbClr val="1A1A1A"/>
+                </a:solidFill>
+                <a:latin typeface="Consolas" pitchFamily="34" charset="0"/>
+                <a:ea typeface="Consolas" pitchFamily="34" charset="-122"/>
+                <a:cs typeface="Consolas" pitchFamily="34" charset="-120"/>
+              </a:rPr>
+              <a:t>media([8, 6, 7])</a:t>
+            </a:r>
+            <a:endParaRPr lang="en-US" sz="1300" dirty="0"/>
+          </a:p>
+          <a:p>
+            <a:pPr indent="0" marL="0">
+              <a:lnSpc>
+                <a:spcPct val="115000"/>
+              </a:lnSpc>
+              <a:buNone/>
+            </a:pPr>
+            <a:r>
+              <a:rPr lang="en-US" sz="1300" dirty="0">
+                <a:solidFill>
+                  <a:srgbClr val="1A1A1A"/>
+                </a:solidFill>
+                <a:latin typeface="Consolas" pitchFamily="34" charset="0"/>
+                <a:ea typeface="Consolas" pitchFamily="34" charset="-122"/>
+                <a:cs typeface="Consolas" pitchFamily="34" charset="-120"/>
+              </a:rPr>
+              <a:t>media([10, 9, 8])</a:t>
+            </a:r>
+            <a:endParaRPr lang="en-US" sz="1300" dirty="0"/>
+          </a:p>
+        </p:txBody>
+      </p:sp>
+      <p:sp>
+        <p:nvSpPr>
+          <p:cNvPr id="7" name="Shape 5"/>
+          <p:cNvSpPr/>
+          <p:nvPr/>
+        </p:nvSpPr>
+        <p:spPr>
+          <a:xfrm>
+            <a:off x="502920" y="3021330"/>
+            <a:ext cx="11185855" cy="3516630"/>
+          </a:xfrm>
+          <a:prstGeom prst="rect">
+            <a:avLst/>
+          </a:prstGeom>
+          <a:solidFill>
+            <a:srgbClr val="EFF5F1"/>
+          </a:solidFill>
+          <a:ln w="9525">
+            <a:solidFill>
+              <a:srgbClr val="C7CFDA"/>
+            </a:solidFill>
+            <a:prstDash val="solid"/>
+          </a:ln>
+        </p:spPr>
+      </p:sp>
+      <p:sp>
+        <p:nvSpPr>
+          <p:cNvPr id="8" name="Shape 6"/>
+          <p:cNvSpPr/>
+          <p:nvPr/>
+        </p:nvSpPr>
+        <p:spPr>
+          <a:xfrm>
+            <a:off x="502920" y="3021330"/>
+            <a:ext cx="54864" cy="3516630"/>
+          </a:xfrm>
+          <a:prstGeom prst="rect">
+            <a:avLst/>
+          </a:prstGeom>
+          <a:solidFill>
+            <a:srgbClr val="2C7A8C"/>
+          </a:solidFill>
+          <a:ln/>
+        </p:spPr>
+      </p:sp>
+      <p:sp>
+        <p:nvSpPr>
+          <p:cNvPr id="9" name="Text 7"/>
+          <p:cNvSpPr/>
+          <p:nvPr/>
+        </p:nvSpPr>
+        <p:spPr>
+          <a:xfrm>
+            <a:off x="731520" y="3112770"/>
+            <a:ext cx="10728655" cy="3333750"/>
+          </a:xfrm>
+          <a:prstGeom prst="rect">
+            <a:avLst/>
+          </a:prstGeom>
+          <a:noFill/>
+          <a:ln/>
+        </p:spPr>
+        <p:txBody>
+          <a:bodyPr wrap="square" rtlCol="0" anchor="t"/>
+          <a:lstStyle/>
+          <a:p>
+            <a:pPr indent="0" marL="0">
+              <a:lnSpc>
+                <a:spcPct val="112000"/>
+              </a:lnSpc>
+              <a:buNone/>
+            </a:pPr>
+            <a:r>
+              <a:rPr lang="en-US" sz="1300" b="1" dirty="0">
+                <a:solidFill>
+                  <a:srgbClr val="1B3A5C"/>
+                </a:solidFill>
+                <a:latin typeface="Consolas" pitchFamily="34" charset="0"/>
+                <a:ea typeface="Consolas" pitchFamily="34" charset="-122"/>
+                <a:cs typeface="Consolas" pitchFamily="34" charset="-120"/>
+              </a:rPr>
+              <a:t>media([8, 6, 7])</a:t>
+            </a:r>
+            <a:pPr indent="0" marL="0">
+              <a:lnSpc>
+                <a:spcPct val="112000"/>
+              </a:lnSpc>
+              <a:buNone/>
+            </a:pPr>
+            <a:r>
+              <a:rPr lang="en-US" sz="1300" dirty="0">
+                <a:solidFill>
+                  <a:srgbClr val="5B6B7A"/>
+                </a:solidFill>
+                <a:latin typeface="Consolas" pitchFamily="34" charset="0"/>
+                <a:ea typeface="Consolas" pitchFamily="34" charset="-122"/>
+                <a:cs typeface="Consolas" pitchFamily="34" charset="-120"/>
+              </a:rPr>
+              <a:t>  →  </a:t>
+            </a:r>
+            <a:pPr indent="0" marL="0">
+              <a:lnSpc>
+                <a:spcPct val="112000"/>
+              </a:lnSpc>
+              <a:buNone/>
+            </a:pPr>
+            <a:r>
+              <a:rPr lang="en-US" sz="1300" dirty="0">
+                <a:solidFill>
+                  <a:srgbClr val="1A1A1A"/>
+                </a:solidFill>
+                <a:latin typeface="Consolas" pitchFamily="34" charset="0"/>
+                <a:ea typeface="Consolas" pitchFamily="34" charset="-122"/>
+                <a:cs typeface="Consolas" pitchFamily="34" charset="-120"/>
+              </a:rPr>
+              <a:t>sum = 21, length = 3 → 21/3 = 7.0</a:t>
+            </a:r>
+            <a:pPr indent="0" marL="0">
+              <a:lnSpc>
+                <a:spcPct val="112000"/>
+              </a:lnSpc>
+              <a:buNone/>
+            </a:pPr>
+            <a:r>
+              <a:rPr lang="en-US" sz="1300" dirty="0">
+                <a:solidFill>
+                  <a:srgbClr val="000000"/>
+                </a:solidFill>
+              </a:rPr>
+              <a:t>
+</a:t>
+            </a:r>
+            <a:pPr indent="0" marL="0">
+              <a:lnSpc>
+                <a:spcPct val="112000"/>
+              </a:lnSpc>
+              <a:buNone/>
+            </a:pPr>
+            <a:r>
+              <a:rPr lang="en-US" sz="1300" b="1" dirty="0">
+                <a:solidFill>
+                  <a:srgbClr val="1B3A5C"/>
+                </a:solidFill>
+                <a:latin typeface="Consolas" pitchFamily="34" charset="0"/>
+                <a:ea typeface="Consolas" pitchFamily="34" charset="-122"/>
+                <a:cs typeface="Consolas" pitchFamily="34" charset="-120"/>
+              </a:rPr>
+              <a:t>media([10, 9, 8])</a:t>
+            </a:r>
+            <a:pPr indent="0" marL="0">
+              <a:lnSpc>
+                <a:spcPct val="112000"/>
+              </a:lnSpc>
+              <a:buNone/>
+            </a:pPr>
+            <a:r>
+              <a:rPr lang="en-US" sz="1300" dirty="0">
+                <a:solidFill>
+                  <a:srgbClr val="5B6B7A"/>
+                </a:solidFill>
+                <a:latin typeface="Consolas" pitchFamily="34" charset="0"/>
+                <a:ea typeface="Consolas" pitchFamily="34" charset="-122"/>
+                <a:cs typeface="Consolas" pitchFamily="34" charset="-120"/>
+              </a:rPr>
+              <a:t>  →  </a:t>
+            </a:r>
+            <a:pPr indent="0" marL="0">
+              <a:lnSpc>
+                <a:spcPct val="112000"/>
+              </a:lnSpc>
+              <a:buNone/>
+            </a:pPr>
+            <a:r>
+              <a:rPr lang="en-US" sz="1300" dirty="0">
+                <a:solidFill>
+                  <a:srgbClr val="1A1A1A"/>
+                </a:solidFill>
+                <a:latin typeface="Consolas" pitchFamily="34" charset="0"/>
+                <a:ea typeface="Consolas" pitchFamily="34" charset="-122"/>
+                <a:cs typeface="Consolas" pitchFamily="34" charset="-120"/>
+              </a:rPr>
+              <a:t>sum = 27, length = 3 → 27/3 = 9.0</a:t>
+            </a:r>
+            <a:endParaRPr lang="en-US" sz="1300" dirty="0"/>
+          </a:p>
+        </p:txBody>
+      </p:sp>
+    </p:spTree>
+  </p:cSld>
+  <p:clrMapOvr>
+    <a:masterClrMapping/>
+  </p:clrMapOvr>
+</p:sld>
+</file>
+
+<file path=ppt/slides/slide12.xml><?xml version="1.0" encoding="utf-8"?>
+<p:sld xmlns:a="http://schemas.openxmlformats.org/drawingml/2006/main" xmlns:r="http://schemas.openxmlformats.org/officeDocument/2006/relationships" xmlns:p="http://schemas.openxmlformats.org/presentationml/2006/main">
+  <p:cSld name="Slide 9">
+    <p:bg>
+      <p:bgPr>
+        <a:solidFill>
+          <a:srgbClr val="F8FAFC"/>
+        </a:solidFill>
+      </p:bgPr>
+    </p:bg>
+    <p:spTree>
+      <p:nvGrpSpPr>
+        <p:cNvPr id="1" name=""/>
+        <p:cNvGrpSpPr/>
+        <p:nvPr/>
+      </p:nvGrpSpPr>
+      <p:grpSpPr>
+        <a:xfrm>
+          <a:off x="0" y="0"/>
+          <a:ext cx="0" cy="0"/>
+          <a:chOff x="0" y="0"/>
+          <a:chExt cx="0" cy="0"/>
+        </a:xfrm>
+      </p:grpSpPr>
+      <p:sp>
+        <p:nvSpPr>
+          <p:cNvPr id="2" name="Shape 0"/>
+          <p:cNvSpPr/>
+          <p:nvPr/>
+        </p:nvSpPr>
+        <p:spPr>
+          <a:xfrm>
+            <a:off x="0" y="0"/>
+            <a:ext cx="12191695" cy="6858000"/>
+          </a:xfrm>
+          <a:prstGeom prst="rect">
+            <a:avLst/>
+          </a:prstGeom>
+          <a:solidFill>
+            <a:srgbClr val="F8FAFC"/>
+          </a:solidFill>
+          <a:ln w="12700">
+            <a:solidFill>
+              <a:srgbClr val="F8FAFC">
+                <a:alpha val="0"/>
+              </a:srgbClr>
+            </a:solidFill>
+            <a:prstDash val="solid"/>
+          </a:ln>
+        </p:spPr>
+      </p:sp>
+      <p:sp>
+        <p:nvSpPr>
+          <p:cNvPr id="3" name="Shape 1"/>
+          <p:cNvSpPr/>
+          <p:nvPr/>
+        </p:nvSpPr>
+        <p:spPr>
+          <a:xfrm>
+            <a:off x="0" y="0"/>
+            <a:ext cx="12191695" cy="91440"/>
+          </a:xfrm>
+          <a:prstGeom prst="rect">
+            <a:avLst/>
+          </a:prstGeom>
+          <a:solidFill>
+            <a:srgbClr val="2AA7C9"/>
+          </a:solidFill>
+          <a:ln w="12700">
+            <a:solidFill>
+              <a:srgbClr val="2AA7C9">
+                <a:alpha val="0"/>
+              </a:srgbClr>
+            </a:solidFill>
+            <a:prstDash val="solid"/>
+          </a:ln>
+        </p:spPr>
+      </p:sp>
+      <p:sp>
+        <p:nvSpPr>
+          <p:cNvPr id="4" name="Text 2"/>
+          <p:cNvSpPr/>
+          <p:nvPr/>
+        </p:nvSpPr>
+        <p:spPr>
+          <a:xfrm>
+            <a:off x="594360" y="411480"/>
+            <a:ext cx="9875520" cy="502920"/>
+          </a:xfrm>
+          <a:prstGeom prst="rect">
+            <a:avLst/>
+          </a:prstGeom>
+          <a:noFill/>
+          <a:ln/>
+        </p:spPr>
+        <p:txBody>
+          <a:bodyPr wrap="square" lIns="254" tIns="254" rIns="254" bIns="254" rtlCol="0" anchor="ctr">
+            <a:normAutofit/>
+          </a:bodyPr>
+          <a:lstStyle/>
+          <a:p>
+            <a:pPr indent="0" marL="0">
+              <a:buNone/>
+            </a:pPr>
+            <a:r>
+              <a:rPr lang="en-US" sz="2500" b="1" dirty="0">
+                <a:solidFill>
+                  <a:srgbClr val="0E1B2A"/>
+                </a:solidFill>
+              </a:rPr>
+              <a:t>7. Onde apareceu transformação de dados?</a:t>
+            </a:r>
+            <a:endParaRPr lang="en-US" sz="2500" dirty="0"/>
+          </a:p>
+        </p:txBody>
+      </p:sp>
+      <p:sp>
+        <p:nvSpPr>
+          <p:cNvPr id="5" name="Text 3"/>
+          <p:cNvSpPr/>
+          <p:nvPr/>
+        </p:nvSpPr>
+        <p:spPr>
+          <a:xfrm>
+            <a:off x="621792" y="960120"/>
+            <a:ext cx="10698480" cy="292608"/>
+          </a:xfrm>
+          <a:prstGeom prst="rect">
+            <a:avLst/>
+          </a:prstGeom>
+          <a:noFill/>
+          <a:ln/>
+        </p:spPr>
+        <p:txBody>
+          <a:bodyPr wrap="square" lIns="0" tIns="0" rIns="0" bIns="0" rtlCol="0" anchor="ctr"/>
+          <a:lstStyle/>
+          <a:p>
+            <a:pPr indent="0" marL="0">
+              <a:buNone/>
+            </a:pPr>
+            <a:r>
+              <a:rPr lang="en-US" sz="1250" dirty="0">
+                <a:solidFill>
+                  <a:srgbClr val="52616B"/>
+                </a:solidFill>
+              </a:rPr>
+              <a:t>Foco: transformar representações sem perder o sentido do dado.</a:t>
+            </a:r>
+            <a:endParaRPr lang="en-US" sz="1250" dirty="0"/>
+          </a:p>
+        </p:txBody>
+      </p:sp>
+      <p:sp>
+        <p:nvSpPr>
+          <p:cNvPr id="6" name="Shape 4"/>
+          <p:cNvSpPr/>
+          <p:nvPr/>
+        </p:nvSpPr>
+        <p:spPr>
+          <a:xfrm>
+            <a:off x="594360" y="1316736"/>
+            <a:ext cx="10972800" cy="0"/>
+          </a:xfrm>
+          <a:prstGeom prst="line">
+            <a:avLst/>
+          </a:prstGeom>
+          <a:noFill/>
+          <a:ln w="15240">
+            <a:solidFill>
+              <a:srgbClr val="E9EEF3"/>
+            </a:solidFill>
+            <a:prstDash val="solid"/>
+          </a:ln>
+        </p:spPr>
+      </p:sp>
+      <p:sp>
+        <p:nvSpPr>
+          <p:cNvPr id="7" name="Shape 5"/>
+          <p:cNvSpPr/>
+          <p:nvPr/>
+        </p:nvSpPr>
+        <p:spPr>
+          <a:xfrm>
+            <a:off x="640080" y="1554480"/>
+            <a:ext cx="4892040" cy="3611880"/>
+          </a:xfrm>
+          <a:prstGeom prst="roundRect">
+            <a:avLst>
+              <a:gd name="adj" fmla="val 2025"/>
+            </a:avLst>
+          </a:prstGeom>
+          <a:solidFill>
+            <a:srgbClr val="111827"/>
+          </a:solidFill>
+          <a:ln w="12700">
+            <a:solidFill>
+              <a:srgbClr val="111827"/>
+            </a:solidFill>
+            <a:prstDash val="solid"/>
+          </a:ln>
+          <a:effectLst>
+            <a:outerShdw sx="100000" sy="100000" kx="0" ky="0" algn="bl" rotWithShape="0" blurRad="25400" dist="12700" dir="2700000">
+              <a:srgbClr val="000000">
+                <a:alpha val="12000"/>
+              </a:srgbClr>
+            </a:outerShdw>
+          </a:effectLst>
+        </p:spPr>
+      </p:sp>
+      <p:sp>
+        <p:nvSpPr>
+          <p:cNvPr id="8" name="Text 6"/>
+          <p:cNvSpPr/>
+          <p:nvPr/>
+        </p:nvSpPr>
+        <p:spPr>
+          <a:xfrm>
+            <a:off x="804672" y="1700784"/>
+            <a:ext cx="4562856" cy="3355848"/>
+          </a:xfrm>
+          <a:prstGeom prst="rect">
+            <a:avLst/>
+          </a:prstGeom>
+          <a:noFill/>
+          <a:ln/>
+        </p:spPr>
+        <p:txBody>
+          <a:bodyPr wrap="square" lIns="254" tIns="254" rIns="254" bIns="254" rtlCol="0" anchor="ctr">
+            <a:normAutofit/>
+          </a:bodyPr>
+          <a:lstStyle/>
+          <a:p>
+            <a:pPr indent="0" marL="0">
+              <a:buNone/>
+            </a:pPr>
+            <a:r>
+              <a:rPr lang="en-US" sz="1220" dirty="0">
+                <a:solidFill>
+                  <a:srgbClr val="E5E7EB"/>
+                </a:solidFill>
+                <a:latin typeface="Aptos Mono" pitchFamily="34" charset="0"/>
+                <a:ea typeface="Aptos Mono" pitchFamily="34" charset="-122"/>
+                <a:cs typeface="Aptos Mono" pitchFamily="34" charset="-120"/>
+              </a:rPr>
+              <a:t>celsius = [25, 28, 30]</a:t>
+            </a:r>
+            <a:endParaRPr lang="en-US" sz="1220" dirty="0"/>
+          </a:p>
+          <a:p>
+            <a:pPr indent="0" marL="0">
+              <a:buNone/>
+            </a:pPr>
+            <a:r>
+              <a:rPr lang="en-US" sz="1220" dirty="0">
+                <a:solidFill>
+                  <a:srgbClr val="E5E7EB"/>
+                </a:solidFill>
+                <a:latin typeface="Aptos Mono" pitchFamily="34" charset="0"/>
+                <a:ea typeface="Aptos Mono" pitchFamily="34" charset="-122"/>
+                <a:cs typeface="Aptos Mono" pitchFamily="34" charset="-120"/>
+              </a:rPr>
+              <a:t>fahrenheit = celsius .* 9/5 .+ 32</a:t>
+            </a:r>
+            <a:endParaRPr lang="en-US" sz="1220" dirty="0"/>
+          </a:p>
+          <a:p>
+            <a:pPr indent="0" marL="0">
+              <a:buNone/>
+            </a:pPr>
+            <a:r>
+              <a:rPr lang="en-US" sz="1220" dirty="0">
+                <a:solidFill>
+                  <a:srgbClr val="E5E7EB"/>
+                </a:solidFill>
+                <a:latin typeface="Aptos Mono" pitchFamily="34" charset="0"/>
+                <a:ea typeface="Aptos Mono" pitchFamily="34" charset="-122"/>
+                <a:cs typeface="Aptos Mono" pitchFamily="34" charset="-120"/>
+              </a:rPr>
+              <a:t>pares = [celsius fahrenheit]</a:t>
+            </a:r>
+            <a:endParaRPr lang="en-US" sz="1220" dirty="0"/>
+          </a:p>
+        </p:txBody>
+      </p:sp>
+      <p:sp>
+        <p:nvSpPr>
+          <p:cNvPr id="9" name="Text 7"/>
+          <p:cNvSpPr/>
+          <p:nvPr/>
+        </p:nvSpPr>
+        <p:spPr>
+          <a:xfrm>
+            <a:off x="5897880" y="1536192"/>
+            <a:ext cx="5349240" cy="274320"/>
+          </a:xfrm>
+          <a:prstGeom prst="rect">
+            <a:avLst/>
+          </a:prstGeom>
+          <a:noFill/>
+          <a:ln/>
+        </p:spPr>
+        <p:txBody>
+          <a:bodyPr wrap="square" lIns="0" tIns="0" rIns="0" bIns="0" rtlCol="0" anchor="ctr"/>
+          <a:lstStyle/>
+          <a:p>
+            <a:pPr indent="0" marL="0">
+              <a:buNone/>
+            </a:pPr>
+            <a:r>
+              <a:rPr lang="en-US" sz="1550" b="1" dirty="0">
+                <a:solidFill>
+                  <a:srgbClr val="0E1B2A"/>
+                </a:solidFill>
+              </a:rPr>
+              <a:t>Pequena tarefa no Pluto</a:t>
+            </a:r>
+            <a:endParaRPr lang="en-US" sz="1550" dirty="0"/>
+          </a:p>
+        </p:txBody>
+      </p:sp>
+      <p:sp>
+        <p:nvSpPr>
+          <p:cNvPr id="10" name="Shape 8"/>
+          <p:cNvSpPr/>
+          <p:nvPr/>
+        </p:nvSpPr>
+        <p:spPr>
+          <a:xfrm>
+            <a:off x="5897880" y="1901952"/>
+            <a:ext cx="512064" cy="512064"/>
+          </a:xfrm>
+          <a:prstGeom prst="ellipse">
+            <a:avLst/>
+          </a:prstGeom>
+          <a:solidFill>
+            <a:srgbClr val="A23E48"/>
+          </a:solidFill>
+          <a:ln w="12700">
+            <a:solidFill>
+              <a:srgbClr val="A23E48"/>
+            </a:solidFill>
+            <a:prstDash val="solid"/>
+          </a:ln>
+        </p:spPr>
+      </p:sp>
+      <p:sp>
+        <p:nvSpPr>
+          <p:cNvPr id="11" name="Text 9"/>
+          <p:cNvSpPr/>
+          <p:nvPr/>
+        </p:nvSpPr>
+        <p:spPr>
+          <a:xfrm>
+            <a:off x="5897880" y="1984248"/>
+            <a:ext cx="512064" cy="182880"/>
+          </a:xfrm>
+          <a:prstGeom prst="rect">
+            <a:avLst/>
+          </a:prstGeom>
+          <a:noFill/>
+          <a:ln/>
+        </p:spPr>
+        <p:txBody>
+          <a:bodyPr wrap="square" lIns="0" tIns="0" rIns="0" bIns="0" rtlCol="0" anchor="ctr"/>
+          <a:lstStyle/>
+          <a:p>
+            <a:pPr algn="ctr" indent="0" marL="0">
+              <a:buNone/>
+            </a:pPr>
+            <a:r>
+              <a:rPr lang="en-US" sz="1500" b="1" dirty="0">
+                <a:solidFill>
+                  <a:srgbClr val="FFFFFF"/>
+                </a:solidFill>
+              </a:rPr>
+              <a:t>1</a:t>
+            </a:r>
+            <a:endParaRPr lang="en-US" sz="1500" dirty="0"/>
+          </a:p>
+        </p:txBody>
+      </p:sp>
+      <p:sp>
+        <p:nvSpPr>
+          <p:cNvPr id="12" name="Text 10"/>
+          <p:cNvSpPr/>
+          <p:nvPr/>
+        </p:nvSpPr>
+        <p:spPr>
+          <a:xfrm>
+            <a:off x="6510528" y="1901952"/>
+            <a:ext cx="4892040" cy="384048"/>
+          </a:xfrm>
+          <a:prstGeom prst="rect">
+            <a:avLst/>
+          </a:prstGeom>
+          <a:noFill/>
+          <a:ln/>
+        </p:spPr>
+        <p:txBody>
+          <a:bodyPr wrap="square" lIns="254" tIns="254" rIns="254" bIns="254" rtlCol="0" anchor="ctr">
+            <a:normAutofit/>
+          </a:bodyPr>
+          <a:lstStyle/>
+          <a:p>
+            <a:pPr indent="0" marL="0">
+              <a:buNone/>
+            </a:pPr>
+            <a:r>
+              <a:rPr lang="en-US" sz="1220" dirty="0">
+                <a:solidFill>
+                  <a:srgbClr val="0E1B2A"/>
+                </a:solidFill>
+              </a:rPr>
+              <a:t>Explicar o significado dos dados originais.</a:t>
+            </a:r>
+            <a:endParaRPr lang="en-US" sz="1220" dirty="0"/>
+          </a:p>
+        </p:txBody>
+      </p:sp>
+      <p:sp>
+        <p:nvSpPr>
+          <p:cNvPr id="13" name="Shape 11"/>
+          <p:cNvSpPr/>
+          <p:nvPr/>
+        </p:nvSpPr>
+        <p:spPr>
+          <a:xfrm>
+            <a:off x="5897880" y="2505456"/>
+            <a:ext cx="512064" cy="512064"/>
+          </a:xfrm>
+          <a:prstGeom prst="ellipse">
+            <a:avLst/>
+          </a:prstGeom>
+          <a:solidFill>
+            <a:srgbClr val="A23E48"/>
+          </a:solidFill>
+          <a:ln w="12700">
+            <a:solidFill>
+              <a:srgbClr val="A23E48"/>
+            </a:solidFill>
+            <a:prstDash val="solid"/>
+          </a:ln>
+        </p:spPr>
+      </p:sp>
+      <p:sp>
+        <p:nvSpPr>
+          <p:cNvPr id="14" name="Text 12"/>
+          <p:cNvSpPr/>
+          <p:nvPr/>
+        </p:nvSpPr>
+        <p:spPr>
+          <a:xfrm>
+            <a:off x="5897880" y="2587752"/>
+            <a:ext cx="512064" cy="182880"/>
+          </a:xfrm>
+          <a:prstGeom prst="rect">
+            <a:avLst/>
+          </a:prstGeom>
+          <a:noFill/>
+          <a:ln/>
+        </p:spPr>
+        <p:txBody>
+          <a:bodyPr wrap="square" lIns="0" tIns="0" rIns="0" bIns="0" rtlCol="0" anchor="ctr"/>
+          <a:lstStyle/>
+          <a:p>
+            <a:pPr algn="ctr" indent="0" marL="0">
+              <a:buNone/>
+            </a:pPr>
+            <a:r>
+              <a:rPr lang="en-US" sz="1500" b="1" dirty="0">
+                <a:solidFill>
+                  <a:srgbClr val="FFFFFF"/>
+                </a:solidFill>
+              </a:rPr>
+              <a:t>2</a:t>
+            </a:r>
+            <a:endParaRPr lang="en-US" sz="1500" dirty="0"/>
+          </a:p>
+        </p:txBody>
+      </p:sp>
+      <p:sp>
+        <p:nvSpPr>
+          <p:cNvPr id="15" name="Text 13"/>
+          <p:cNvSpPr/>
+          <p:nvPr/>
+        </p:nvSpPr>
+        <p:spPr>
+          <a:xfrm>
+            <a:off x="6510528" y="2523744"/>
+            <a:ext cx="4892040" cy="384048"/>
+          </a:xfrm>
+          <a:prstGeom prst="rect">
+            <a:avLst/>
+          </a:prstGeom>
+          <a:noFill/>
+          <a:ln/>
+        </p:spPr>
+        <p:txBody>
+          <a:bodyPr wrap="square" lIns="254" tIns="254" rIns="254" bIns="254" rtlCol="0" anchor="ctr">
+            <a:normAutofit/>
+          </a:bodyPr>
+          <a:lstStyle/>
+          <a:p>
+            <a:pPr indent="0" marL="0">
+              <a:buNone/>
+            </a:pPr>
+            <a:r>
+              <a:rPr lang="en-US" sz="1220" dirty="0">
+                <a:solidFill>
+                  <a:srgbClr val="0E1B2A"/>
+                </a:solidFill>
+              </a:rPr>
+              <a:t>Aplicar uma regra de transformação.</a:t>
+            </a:r>
+            <a:endParaRPr lang="en-US" sz="1220" dirty="0"/>
+          </a:p>
+        </p:txBody>
+      </p:sp>
+      <p:sp>
+        <p:nvSpPr>
+          <p:cNvPr id="16" name="Shape 14"/>
+          <p:cNvSpPr/>
+          <p:nvPr/>
+        </p:nvSpPr>
+        <p:spPr>
+          <a:xfrm>
+            <a:off x="5897880" y="3108960"/>
+            <a:ext cx="512064" cy="512064"/>
+          </a:xfrm>
+          <a:prstGeom prst="ellipse">
+            <a:avLst/>
+          </a:prstGeom>
+          <a:solidFill>
+            <a:srgbClr val="A23E48"/>
+          </a:solidFill>
+          <a:ln w="12700">
+            <a:solidFill>
+              <a:srgbClr val="A23E48"/>
+            </a:solidFill>
+            <a:prstDash val="solid"/>
+          </a:ln>
+        </p:spPr>
+      </p:sp>
+      <p:sp>
+        <p:nvSpPr>
+          <p:cNvPr id="17" name="Text 15"/>
+          <p:cNvSpPr/>
+          <p:nvPr/>
+        </p:nvSpPr>
+        <p:spPr>
+          <a:xfrm>
+            <a:off x="5897880" y="3191256"/>
+            <a:ext cx="512064" cy="182880"/>
+          </a:xfrm>
+          <a:prstGeom prst="rect">
+            <a:avLst/>
+          </a:prstGeom>
+          <a:noFill/>
+          <a:ln/>
+        </p:spPr>
+        <p:txBody>
+          <a:bodyPr wrap="square" lIns="0" tIns="0" rIns="0" bIns="0" rtlCol="0" anchor="ctr"/>
+          <a:lstStyle/>
+          <a:p>
+            <a:pPr algn="ctr" indent="0" marL="0">
+              <a:buNone/>
+            </a:pPr>
+            <a:r>
+              <a:rPr lang="en-US" sz="1500" b="1" dirty="0">
+                <a:solidFill>
+                  <a:srgbClr val="FFFFFF"/>
+                </a:solidFill>
+              </a:rPr>
+              <a:t>3</a:t>
+            </a:r>
+            <a:endParaRPr lang="en-US" sz="1500" dirty="0"/>
+          </a:p>
+        </p:txBody>
+      </p:sp>
+      <p:sp>
+        <p:nvSpPr>
+          <p:cNvPr id="18" name="Text 16"/>
+          <p:cNvSpPr/>
+          <p:nvPr/>
+        </p:nvSpPr>
+        <p:spPr>
+          <a:xfrm>
+            <a:off x="6510528" y="3145536"/>
+            <a:ext cx="4892040" cy="384048"/>
+          </a:xfrm>
+          <a:prstGeom prst="rect">
+            <a:avLst/>
+          </a:prstGeom>
+          <a:noFill/>
+          <a:ln/>
+        </p:spPr>
+        <p:txBody>
+          <a:bodyPr wrap="square" lIns="254" tIns="254" rIns="254" bIns="254" rtlCol="0" anchor="ctr">
+            <a:normAutofit/>
+          </a:bodyPr>
+          <a:lstStyle/>
+          <a:p>
+            <a:pPr indent="0" marL="0">
+              <a:buNone/>
+            </a:pPr>
+            <a:r>
+              <a:rPr lang="en-US" sz="1220" dirty="0">
+                <a:solidFill>
+                  <a:srgbClr val="0E1B2A"/>
+                </a:solidFill>
+              </a:rPr>
+              <a:t>Comparar as duas representações e interpretar.</a:t>
+            </a:r>
+            <a:endParaRPr lang="en-US" sz="1220" dirty="0"/>
+          </a:p>
+        </p:txBody>
+      </p:sp>
+      <p:sp>
+        <p:nvSpPr>
+          <p:cNvPr id="19" name="Shape 17"/>
+          <p:cNvSpPr/>
+          <p:nvPr/>
+        </p:nvSpPr>
+        <p:spPr>
+          <a:xfrm>
+            <a:off x="5897880" y="4754880"/>
+            <a:ext cx="2240280" cy="914400"/>
+          </a:xfrm>
+          <a:prstGeom prst="roundRect">
+            <a:avLst>
+              <a:gd name="adj" fmla="val 8000"/>
+            </a:avLst>
+          </a:prstGeom>
+          <a:solidFill>
+            <a:srgbClr val="D8F1F6"/>
+          </a:solidFill>
+          <a:ln w="12700">
+            <a:solidFill>
+              <a:srgbClr val="D8F1F6"/>
+            </a:solidFill>
+            <a:prstDash val="solid"/>
+          </a:ln>
+        </p:spPr>
+      </p:sp>
+      <p:sp>
+        <p:nvSpPr>
+          <p:cNvPr id="20" name="Text 18"/>
+          <p:cNvSpPr/>
+          <p:nvPr/>
+        </p:nvSpPr>
+        <p:spPr>
+          <a:xfrm>
+            <a:off x="6062472" y="4892040"/>
+            <a:ext cx="1920240" cy="182880"/>
+          </a:xfrm>
+          <a:prstGeom prst="rect">
+            <a:avLst/>
+          </a:prstGeom>
+          <a:noFill/>
+          <a:ln/>
+        </p:spPr>
+        <p:txBody>
+          <a:bodyPr wrap="square" lIns="0" tIns="0" rIns="0" bIns="0" rtlCol="0" anchor="ctr"/>
+          <a:lstStyle/>
+          <a:p>
+            <a:pPr indent="0" marL="0">
+              <a:buNone/>
+            </a:pPr>
+            <a:r>
+              <a:rPr lang="en-US" sz="950" b="1" dirty="0">
+                <a:solidFill>
+                  <a:srgbClr val="1B4E7A"/>
+                </a:solidFill>
+              </a:rPr>
+              <a:t>Aspecto qualitativo</a:t>
+            </a:r>
+            <a:endParaRPr lang="en-US" sz="950" dirty="0"/>
+          </a:p>
+        </p:txBody>
+      </p:sp>
+      <p:sp>
+        <p:nvSpPr>
+          <p:cNvPr id="21" name="Text 19"/>
+          <p:cNvSpPr/>
+          <p:nvPr/>
+        </p:nvSpPr>
+        <p:spPr>
+          <a:xfrm>
+            <a:off x="6062472" y="5120640"/>
+            <a:ext cx="1920240" cy="292608"/>
+          </a:xfrm>
+          <a:prstGeom prst="rect">
+            <a:avLst/>
+          </a:prstGeom>
+          <a:noFill/>
+          <a:ln/>
+        </p:spPr>
+        <p:txBody>
+          <a:bodyPr wrap="square" lIns="0" tIns="0" rIns="0" bIns="0" rtlCol="0" anchor="ctr">
+            <a:normAutofit/>
+          </a:bodyPr>
+          <a:lstStyle/>
+          <a:p>
+            <a:pPr indent="0" marL="0">
+              <a:buNone/>
+            </a:pPr>
+            <a:r>
+              <a:rPr lang="en-US" sz="980" dirty="0">
+                <a:solidFill>
+                  <a:srgbClr val="0E1B2A"/>
+                </a:solidFill>
+              </a:rPr>
+              <a:t>Representação + transformação</a:t>
+            </a:r>
+            <a:endParaRPr lang="en-US" sz="980" dirty="0"/>
+          </a:p>
+        </p:txBody>
+      </p:sp>
+      <p:sp>
+        <p:nvSpPr>
+          <p:cNvPr id="22" name="Shape 20"/>
+          <p:cNvSpPr/>
+          <p:nvPr/>
+        </p:nvSpPr>
+        <p:spPr>
+          <a:xfrm>
+            <a:off x="8366760" y="4754880"/>
+            <a:ext cx="2926080" cy="914400"/>
+          </a:xfrm>
+          <a:prstGeom prst="roundRect">
+            <a:avLst>
+              <a:gd name="adj" fmla="val 8000"/>
+            </a:avLst>
+          </a:prstGeom>
+          <a:solidFill>
+            <a:srgbClr val="FEF3C7"/>
+          </a:solidFill>
+          <a:ln w="12700">
+            <a:solidFill>
+              <a:srgbClr val="FEF3C7"/>
+            </a:solidFill>
+            <a:prstDash val="solid"/>
+          </a:ln>
+        </p:spPr>
+      </p:sp>
+      <p:sp>
+        <p:nvSpPr>
+          <p:cNvPr id="23" name="Text 21"/>
+          <p:cNvSpPr/>
+          <p:nvPr/>
+        </p:nvSpPr>
+        <p:spPr>
+          <a:xfrm>
+            <a:off x="8549640" y="4892040"/>
+            <a:ext cx="2560320" cy="182880"/>
+          </a:xfrm>
+          <a:prstGeom prst="rect">
+            <a:avLst/>
+          </a:prstGeom>
+          <a:noFill/>
+          <a:ln/>
+        </p:spPr>
+        <p:txBody>
+          <a:bodyPr wrap="square" lIns="0" tIns="0" rIns="0" bIns="0" rtlCol="0" anchor="ctr"/>
+          <a:lstStyle/>
+          <a:p>
+            <a:pPr indent="0" marL="0">
+              <a:buNone/>
+            </a:pPr>
+            <a:r>
+              <a:rPr lang="en-US" sz="950" b="1" dirty="0">
+                <a:solidFill>
+                  <a:srgbClr val="92400E"/>
+                </a:solidFill>
+              </a:rPr>
+              <a:t>Registro esperado</a:t>
+            </a:r>
+            <a:endParaRPr lang="en-US" sz="950" dirty="0"/>
+          </a:p>
+        </p:txBody>
+      </p:sp>
+      <p:sp>
+        <p:nvSpPr>
+          <p:cNvPr id="24" name="Text 22"/>
+          <p:cNvSpPr/>
+          <p:nvPr/>
+        </p:nvSpPr>
+        <p:spPr>
+          <a:xfrm>
+            <a:off x="8549640" y="5120640"/>
+            <a:ext cx="2560320" cy="292608"/>
+          </a:xfrm>
+          <a:prstGeom prst="rect">
+            <a:avLst/>
+          </a:prstGeom>
+          <a:noFill/>
+          <a:ln/>
+        </p:spPr>
+        <p:txBody>
+          <a:bodyPr wrap="square" lIns="0" tIns="0" rIns="0" bIns="0" rtlCol="0" anchor="ctr">
+            <a:normAutofit/>
+          </a:bodyPr>
+          <a:lstStyle/>
+          <a:p>
+            <a:pPr indent="0" marL="0">
+              <a:buNone/>
+            </a:pPr>
+            <a:r>
+              <a:rPr lang="en-US" sz="980" dirty="0">
+                <a:solidFill>
+                  <a:srgbClr val="0E1B2A"/>
+                </a:solidFill>
+              </a:rPr>
+              <a:t>Antes/depois com explicação do que mudou.</a:t>
+            </a:r>
+            <a:endParaRPr lang="en-US" sz="980" dirty="0"/>
+          </a:p>
+        </p:txBody>
+      </p:sp>
+      <p:sp>
+        <p:nvSpPr>
+          <p:cNvPr id="25" name="Text 23"/>
+          <p:cNvSpPr/>
+          <p:nvPr/>
+        </p:nvSpPr>
+        <p:spPr>
+          <a:xfrm>
+            <a:off x="502920" y="6510528"/>
+            <a:ext cx="8686800" cy="201168"/>
+          </a:xfrm>
+          <a:prstGeom prst="rect">
+            <a:avLst/>
+          </a:prstGeom>
+          <a:noFill/>
+          <a:ln/>
+        </p:spPr>
+        <p:txBody>
+          <a:bodyPr wrap="square" lIns="0" tIns="0" rIns="0" bIns="0" rtlCol="0" anchor="ctr"/>
+          <a:lstStyle/>
+          <a:p>
+            <a:pPr indent="0" marL="0">
+              <a:buNone/>
+            </a:pPr>
+            <a:r>
+              <a:rPr lang="en-US" sz="850" dirty="0">
+                <a:solidFill>
+                  <a:srgbClr val="52616B"/>
+                </a:solidFill>
+              </a:rPr>
+              <a:t>PROFCOMP · Pensamento Computacional · Julia + Pluto</a:t>
+            </a:r>
+            <a:endParaRPr lang="en-US" sz="850" dirty="0"/>
+          </a:p>
+        </p:txBody>
+      </p:sp>
+      <p:sp>
+        <p:nvSpPr>
+          <p:cNvPr id="26" name="Text 24"/>
+          <p:cNvSpPr/>
+          <p:nvPr/>
+        </p:nvSpPr>
+        <p:spPr>
+          <a:xfrm>
+            <a:off x="11384280" y="6437376"/>
+            <a:ext cx="347472" cy="228600"/>
+          </a:xfrm>
+          <a:prstGeom prst="rect">
+            <a:avLst/>
+          </a:prstGeom>
+          <a:solidFill>
+            <a:srgbClr val="1B4E7A"/>
+          </a:solidFill>
+          <a:ln>
+            <a:solidFill>
+              <a:srgbClr val="1B4E7A"/>
+            </a:solidFill>
+          </a:ln>
+        </p:spPr>
+        <p:txBody>
+          <a:bodyPr wrap="square" lIns="0" tIns="0" rIns="0" bIns="0" rtlCol="0" anchor="ctr"/>
+          <a:lstStyle/>
+          <a:p>
+            <a:pPr algn="ctr" indent="0" marL="0">
+              <a:buNone/>
+            </a:pPr>
+            <a:r>
+              <a:rPr lang="en-US" sz="850" b="1" dirty="0">
+                <a:solidFill>
+                  <a:srgbClr val="FFFFFF"/>
+                </a:solidFill>
+              </a:rPr>
+              <a:t>09</a:t>
+            </a:r>
+            <a:endParaRPr lang="en-US" sz="850" dirty="0"/>
+          </a:p>
+        </p:txBody>
+      </p:sp>
+    </p:spTree>
+  </p:cSld>
+  <p:clrMapOvr>
+    <a:masterClrMapping/>
+  </p:clrMapOvr>
+</p:sld>
+</file>
+
+<file path=ppt/slides/slide13.xml><?xml version="1.0" encoding="utf-8"?>
 <p:sld xmlns:a="http://schemas.openxmlformats.org/drawingml/2006/main" xmlns:r="http://schemas.openxmlformats.org/officeDocument/2006/relationships" xmlns:p="http://schemas.openxmlformats.org/presentationml/2006/main">
   <p:cSld name="Slide 10">
     <p:bg>
@@ -3414,7 +5432,7 @@
 </p:sld>
 </file>
 
-<file path=ppt/slides/slide11.xml><?xml version="1.0" encoding="utf-8"?>
+<file path=ppt/slides/slide14.xml><?xml version="1.0" encoding="utf-8"?>
 <p:sld xmlns:a="http://schemas.openxmlformats.org/drawingml/2006/main" xmlns:r="http://schemas.openxmlformats.org/officeDocument/2006/relationships" xmlns:p="http://schemas.openxmlformats.org/presentationml/2006/main">
   <p:cSld name="Slide 11">
     <p:bg>
@@ -4152,7 +6170,7 @@
 </p:sld>
 </file>
 
-<file path=ppt/slides/slide12.xml><?xml version="1.0" encoding="utf-8"?>
+<file path=ppt/slides/slide15.xml><?xml version="1.0" encoding="utf-8"?>
 <p:sld xmlns:a="http://schemas.openxmlformats.org/drawingml/2006/main" xmlns:r="http://schemas.openxmlformats.org/officeDocument/2006/relationships" xmlns:p="http://schemas.openxmlformats.org/presentationml/2006/main">
   <p:cSld name="Slide 12">
     <p:bg>
@@ -5106,14 +7124,15 @@
 </p:sld>
 </file>
 
-<file path=ppt/slides/slide13.xml><?xml version="1.0" encoding="utf-8"?>
+<file path=ppt/slides/slide16.xml><?xml version="1.0" encoding="utf-8"?>
 <p:sld xmlns:a="http://schemas.openxmlformats.org/drawingml/2006/main" xmlns:r="http://schemas.openxmlformats.org/officeDocument/2006/relationships" xmlns:p="http://schemas.openxmlformats.org/presentationml/2006/main">
-  <p:cSld name="Slide 2">
+  <p:cSld name="Referencias">
     <p:bg>
       <p:bgPr>
         <a:solidFill>
-          <a:srgbClr val="FFFFFF"/>
+          <a:srgbClr val="12233B"/>
         </a:solidFill>
+        <a:effectLst/>
       </p:bgPr>
     </p:bg>
     <p:spTree>
@@ -5132,1539 +7151,141 @@
       </p:grpSpPr>
       <p:sp>
         <p:nvSpPr>
-          <p:cNvPr id="2" name="Text 0"/>
-          <p:cNvSpPr/>
-          <p:nvPr/>
-        </p:nvSpPr>
-        <p:spPr>
-          <a:xfrm>
-            <a:off x="502920" y="320040"/>
-            <a:ext cx="11185855" cy="365760"/>
-          </a:xfrm>
-          <a:prstGeom prst="rect">
-            <a:avLst/>
-          </a:prstGeom>
-          <a:noFill/>
-          <a:ln/>
-        </p:spPr>
-        <p:txBody>
-          <a:bodyPr wrap="square" rtlCol="0" anchor="ctr"/>
-          <a:lstStyle/>
-          <a:p>
-            <a:pPr indent="0" marL="0">
-              <a:buNone/>
-            </a:pPr>
-            <a:r>
-              <a:rPr lang="en-US" sz="1300" b="1" spc="200" kern="0" dirty="0">
-                <a:solidFill>
-                  <a:srgbClr val="B5651D"/>
-                </a:solidFill>
-                <a:latin typeface="Calibri" pitchFamily="34" charset="0"/>
-                <a:ea typeface="Calibri" pitchFamily="34" charset="-122"/>
-                <a:cs typeface="Calibri" pitchFamily="34" charset="-120"/>
-              </a:rPr>
-              <a:t>AULA 15  ·  1. O que o Pluto tornou visível?</a:t>
-            </a:r>
-            <a:endParaRPr lang="en-US" sz="1300" dirty="0"/>
-          </a:p>
-        </p:txBody>
-      </p:sp>
-      <p:sp>
-        <p:nvSpPr>
-          <p:cNvPr id="3" name="Text 1"/>
-          <p:cNvSpPr/>
-          <p:nvPr/>
-        </p:nvSpPr>
-        <p:spPr>
-          <a:xfrm>
-            <a:off x="502920" y="658368"/>
-            <a:ext cx="11185855" cy="502920"/>
-          </a:xfrm>
-          <a:prstGeom prst="rect">
-            <a:avLst/>
-          </a:prstGeom>
-          <a:noFill/>
-          <a:ln/>
-        </p:spPr>
-        <p:txBody>
-          <a:bodyPr wrap="square" rtlCol="0" anchor="ctr"/>
-          <a:lstStyle/>
-          <a:p>
-            <a:pPr indent="0" marL="0">
-              <a:buNone/>
-            </a:pPr>
-            <a:r>
-              <a:rPr lang="en-US" sz="1900" b="1" dirty="0">
-                <a:solidFill>
-                  <a:srgbClr val="1B3A5C"/>
-                </a:solidFill>
-                <a:latin typeface="Calibri" pitchFamily="34" charset="0"/>
-                <a:ea typeface="Calibri" pitchFamily="34" charset="-122"/>
-                <a:cs typeface="Calibri" pitchFamily="34" charset="-120"/>
-              </a:rPr>
-              <a:t>Pequena tarefa no Pluto</a:t>
-            </a:r>
-            <a:endParaRPr lang="en-US" sz="1900" dirty="0"/>
-          </a:p>
-        </p:txBody>
-      </p:sp>
-      <p:sp>
-        <p:nvSpPr>
-          <p:cNvPr id="4" name="Shape 2"/>
-          <p:cNvSpPr/>
-          <p:nvPr/>
-        </p:nvSpPr>
-        <p:spPr>
-          <a:xfrm>
-            <a:off x="502920" y="1298448"/>
-            <a:ext cx="11185855" cy="1691640"/>
-          </a:xfrm>
-          <a:prstGeom prst="rect">
-            <a:avLst/>
-          </a:prstGeom>
-          <a:solidFill>
-            <a:srgbClr val="F2F4F7"/>
-          </a:solidFill>
-          <a:ln w="9525">
-            <a:solidFill>
-              <a:srgbClr val="C7CFDA"/>
-            </a:solidFill>
-            <a:prstDash val="solid"/>
-          </a:ln>
-        </p:spPr>
-      </p:sp>
-      <p:sp>
-        <p:nvSpPr>
-          <p:cNvPr id="5" name="Shape 3"/>
-          <p:cNvSpPr/>
-          <p:nvPr/>
-        </p:nvSpPr>
-        <p:spPr>
-          <a:xfrm>
-            <a:off x="502920" y="1298448"/>
-            <a:ext cx="54864" cy="1691640"/>
-          </a:xfrm>
-          <a:prstGeom prst="rect">
-            <a:avLst/>
-          </a:prstGeom>
-          <a:solidFill>
-            <a:srgbClr val="2C7A8C"/>
-          </a:solidFill>
-          <a:ln/>
-        </p:spPr>
-      </p:sp>
-      <p:sp>
-        <p:nvSpPr>
-          <p:cNvPr id="6" name="Text 4"/>
-          <p:cNvSpPr/>
-          <p:nvPr/>
-        </p:nvSpPr>
-        <p:spPr>
-          <a:xfrm>
-            <a:off x="731520" y="1371600"/>
-            <a:ext cx="10728655" cy="1545336"/>
-          </a:xfrm>
-          <a:prstGeom prst="rect">
-            <a:avLst/>
-          </a:prstGeom>
-          <a:noFill/>
-          <a:ln/>
-        </p:spPr>
-        <p:txBody>
-          <a:bodyPr wrap="square" rtlCol="0" anchor="t"/>
-          <a:lstStyle/>
-          <a:p>
-            <a:pPr indent="0" marL="0">
-              <a:lnSpc>
-                <a:spcPct val="115000"/>
-              </a:lnSpc>
-              <a:buNone/>
-            </a:pPr>
-            <a:r>
-              <a:rPr lang="en-US" sz="1200" dirty="0">
-                <a:solidFill>
-                  <a:srgbClr val="1A1A1A"/>
-                </a:solidFill>
-                <a:latin typeface="Consolas" pitchFamily="34" charset="0"/>
-                <a:ea typeface="Consolas" pitchFamily="34" charset="-122"/>
-                <a:cs typeface="Consolas" pitchFamily="34" charset="-120"/>
-              </a:rPr>
-              <a:t>notas = [7, 8, 6, 9]</a:t>
-            </a:r>
-            <a:endParaRPr lang="en-US" sz="1200" dirty="0"/>
-          </a:p>
-          <a:p>
-            <a:pPr indent="0" marL="0">
-              <a:lnSpc>
-                <a:spcPct val="115000"/>
-              </a:lnSpc>
-              <a:buNone/>
-            </a:pPr>
-            <a:r>
-              <a:rPr lang="en-US" sz="1200" dirty="0">
-                <a:solidFill>
-                  <a:srgbClr val="1A1A1A"/>
-                </a:solidFill>
-                <a:latin typeface="Consolas" pitchFamily="34" charset="0"/>
-                <a:ea typeface="Consolas" pitchFamily="34" charset="-122"/>
-                <a:cs typeface="Consolas" pitchFamily="34" charset="-120"/>
-              </a:rPr>
-              <a:t>media = sum(notas) / length(notas)</a:t>
-            </a:r>
-            <a:endParaRPr lang="en-US" sz="1200" dirty="0"/>
-          </a:p>
-          <a:p>
-            <a:pPr indent="0" marL="0">
-              <a:lnSpc>
-                <a:spcPct val="115000"/>
-              </a:lnSpc>
-              <a:buNone/>
-            </a:pPr>
-            <a:r>
-              <a:rPr lang="en-US" sz="1200" dirty="0">
-                <a:solidFill>
-                  <a:srgbClr val="1A1A1A"/>
-                </a:solidFill>
-                <a:latin typeface="Consolas" pitchFamily="34" charset="0"/>
-                <a:ea typeface="Consolas" pitchFamily="34" charset="-122"/>
-                <a:cs typeface="Consolas" pitchFamily="34" charset="-120"/>
-              </a:rPr>
-              <a:t>md"""</a:t>
-            </a:r>
-            <a:endParaRPr lang="en-US" sz="1200" dirty="0"/>
-          </a:p>
-          <a:p>
-            <a:pPr indent="0" marL="0">
-              <a:lnSpc>
-                <a:spcPct val="115000"/>
-              </a:lnSpc>
-              <a:buNone/>
-            </a:pPr>
-            <a:r>
-              <a:rPr lang="en-US" sz="1200" dirty="0">
-                <a:solidFill>
-                  <a:srgbClr val="1A1A1A"/>
-                </a:solidFill>
-                <a:latin typeface="Consolas" pitchFamily="34" charset="0"/>
-                <a:ea typeface="Consolas" pitchFamily="34" charset="-122"/>
-                <a:cs typeface="Consolas" pitchFamily="34" charset="-120"/>
-              </a:rPr>
-              <a:t>Notas: $notas</a:t>
-            </a:r>
-            <a:endParaRPr lang="en-US" sz="1200" dirty="0"/>
-          </a:p>
-          <a:p>
-            <a:pPr indent="0" marL="0">
-              <a:lnSpc>
-                <a:spcPct val="115000"/>
-              </a:lnSpc>
-              <a:buNone/>
-            </a:pPr>
-            <a:r>
-              <a:rPr lang="en-US" sz="1200" dirty="0">
-                <a:solidFill>
-                  <a:srgbClr val="1A1A1A"/>
-                </a:solidFill>
-                <a:latin typeface="Consolas" pitchFamily="34" charset="0"/>
-                <a:ea typeface="Consolas" pitchFamily="34" charset="-122"/>
-                <a:cs typeface="Consolas" pitchFamily="34" charset="-120"/>
-              </a:rPr>
-              <a:t>Média: $media</a:t>
-            </a:r>
-            <a:endParaRPr lang="en-US" sz="1200" dirty="0"/>
-          </a:p>
-          <a:p>
-            <a:pPr indent="0" marL="0">
-              <a:lnSpc>
-                <a:spcPct val="115000"/>
-              </a:lnSpc>
-              <a:buNone/>
-            </a:pPr>
-            <a:r>
-              <a:rPr lang="en-US" sz="1200" dirty="0">
-                <a:solidFill>
-                  <a:srgbClr val="1A1A1A"/>
-                </a:solidFill>
-                <a:latin typeface="Consolas" pitchFamily="34" charset="0"/>
-                <a:ea typeface="Consolas" pitchFamily="34" charset="-122"/>
-                <a:cs typeface="Consolas" pitchFamily="34" charset="-120"/>
-              </a:rPr>
-              <a:t>"""</a:t>
-            </a:r>
-            <a:endParaRPr lang="en-US" sz="1200" dirty="0"/>
-          </a:p>
-        </p:txBody>
-      </p:sp>
-      <p:sp>
-        <p:nvSpPr>
-          <p:cNvPr id="7" name="Shape 5"/>
-          <p:cNvSpPr/>
-          <p:nvPr/>
-        </p:nvSpPr>
-        <p:spPr>
-          <a:xfrm>
-            <a:off x="502920" y="3154680"/>
-            <a:ext cx="11185855" cy="3383280"/>
-          </a:xfrm>
-          <a:prstGeom prst="rect">
-            <a:avLst/>
-          </a:prstGeom>
-          <a:solidFill>
-            <a:srgbClr val="EFF5F1"/>
-          </a:solidFill>
-          <a:ln w="9525">
-            <a:solidFill>
-              <a:srgbClr val="C7CFDA"/>
-            </a:solidFill>
-            <a:prstDash val="solid"/>
-          </a:ln>
-        </p:spPr>
-      </p:sp>
-      <p:sp>
-        <p:nvSpPr>
-          <p:cNvPr id="8" name="Shape 6"/>
-          <p:cNvSpPr/>
-          <p:nvPr/>
-        </p:nvSpPr>
-        <p:spPr>
-          <a:xfrm>
-            <a:off x="502920" y="3154680"/>
-            <a:ext cx="54864" cy="3383280"/>
-          </a:xfrm>
-          <a:prstGeom prst="rect">
-            <a:avLst/>
-          </a:prstGeom>
-          <a:solidFill>
-            <a:srgbClr val="2C7A8C"/>
-          </a:solidFill>
-          <a:ln/>
-        </p:spPr>
-      </p:sp>
-      <p:sp>
-        <p:nvSpPr>
-          <p:cNvPr id="9" name="Text 7"/>
-          <p:cNvSpPr/>
-          <p:nvPr/>
-        </p:nvSpPr>
-        <p:spPr>
-          <a:xfrm>
-            <a:off x="731520" y="3246120"/>
-            <a:ext cx="10728655" cy="3200400"/>
-          </a:xfrm>
-          <a:prstGeom prst="rect">
-            <a:avLst/>
-          </a:prstGeom>
-          <a:noFill/>
-          <a:ln/>
-        </p:spPr>
-        <p:txBody>
-          <a:bodyPr wrap="square" rtlCol="0" anchor="t"/>
-          <a:lstStyle/>
-          <a:p>
-            <a:pPr indent="0" marL="0">
-              <a:lnSpc>
-                <a:spcPct val="112000"/>
-              </a:lnSpc>
-              <a:buNone/>
-            </a:pPr>
-            <a:r>
-              <a:rPr lang="en-US" sz="1300" b="1" dirty="0">
-                <a:solidFill>
-                  <a:srgbClr val="1B3A5C"/>
-                </a:solidFill>
-                <a:latin typeface="Consolas" pitchFamily="34" charset="0"/>
-                <a:ea typeface="Consolas" pitchFamily="34" charset="-122"/>
-                <a:cs typeface="Consolas" pitchFamily="34" charset="-120"/>
-              </a:rPr>
-              <a:t>notas</a:t>
-            </a:r>
-            <a:pPr indent="0" marL="0">
-              <a:lnSpc>
-                <a:spcPct val="112000"/>
-              </a:lnSpc>
-              <a:buNone/>
-            </a:pPr>
-            <a:r>
-              <a:rPr lang="en-US" sz="1300" dirty="0">
-                <a:solidFill>
-                  <a:srgbClr val="5B6B7A"/>
-                </a:solidFill>
-                <a:latin typeface="Consolas" pitchFamily="34" charset="0"/>
-                <a:ea typeface="Consolas" pitchFamily="34" charset="-122"/>
-                <a:cs typeface="Consolas" pitchFamily="34" charset="-120"/>
-              </a:rPr>
-              <a:t>  →  </a:t>
-            </a:r>
-            <a:pPr indent="0" marL="0">
-              <a:lnSpc>
-                <a:spcPct val="112000"/>
-              </a:lnSpc>
-              <a:buNone/>
-            </a:pPr>
-            <a:r>
-              <a:rPr lang="en-US" sz="1300" dirty="0">
-                <a:solidFill>
-                  <a:srgbClr val="1A1A1A"/>
-                </a:solidFill>
-                <a:latin typeface="Consolas" pitchFamily="34" charset="0"/>
-                <a:ea typeface="Consolas" pitchFamily="34" charset="-122"/>
-                <a:cs typeface="Consolas" pitchFamily="34" charset="-120"/>
-              </a:rPr>
-              <a:t>[7, 8, 6, 9]</a:t>
-            </a:r>
-            <a:pPr indent="0" marL="0">
-              <a:lnSpc>
-                <a:spcPct val="112000"/>
-              </a:lnSpc>
-              <a:buNone/>
-            </a:pPr>
-            <a:r>
-              <a:rPr lang="en-US" sz="1300" dirty="0">
-                <a:solidFill>
-                  <a:srgbClr val="000000"/>
-                </a:solidFill>
-              </a:rPr>
-              <a:t>
-</a:t>
-            </a:r>
-            <a:pPr indent="0" marL="0">
-              <a:lnSpc>
-                <a:spcPct val="112000"/>
-              </a:lnSpc>
-              <a:buNone/>
-            </a:pPr>
-            <a:r>
-              <a:rPr lang="en-US" sz="1300" b="1" dirty="0">
-                <a:solidFill>
-                  <a:srgbClr val="1B3A5C"/>
-                </a:solidFill>
-                <a:latin typeface="Consolas" pitchFamily="34" charset="0"/>
-                <a:ea typeface="Consolas" pitchFamily="34" charset="-122"/>
-                <a:cs typeface="Consolas" pitchFamily="34" charset="-120"/>
-              </a:rPr>
-              <a:t>sum(notas)</a:t>
-            </a:r>
-            <a:pPr indent="0" marL="0">
-              <a:lnSpc>
-                <a:spcPct val="112000"/>
-              </a:lnSpc>
-              <a:buNone/>
-            </a:pPr>
-            <a:r>
-              <a:rPr lang="en-US" sz="1300" dirty="0">
-                <a:solidFill>
-                  <a:srgbClr val="5B6B7A"/>
-                </a:solidFill>
-                <a:latin typeface="Consolas" pitchFamily="34" charset="0"/>
-                <a:ea typeface="Consolas" pitchFamily="34" charset="-122"/>
-                <a:cs typeface="Consolas" pitchFamily="34" charset="-120"/>
-              </a:rPr>
-              <a:t>  →  </a:t>
-            </a:r>
-            <a:pPr indent="0" marL="0">
-              <a:lnSpc>
-                <a:spcPct val="112000"/>
-              </a:lnSpc>
-              <a:buNone/>
-            </a:pPr>
-            <a:r>
-              <a:rPr lang="en-US" sz="1300" dirty="0">
-                <a:solidFill>
-                  <a:srgbClr val="1A1A1A"/>
-                </a:solidFill>
-                <a:latin typeface="Consolas" pitchFamily="34" charset="0"/>
-                <a:ea typeface="Consolas" pitchFamily="34" charset="-122"/>
-                <a:cs typeface="Consolas" pitchFamily="34" charset="-120"/>
-              </a:rPr>
-              <a:t>30</a:t>
-            </a:r>
-            <a:pPr indent="0" marL="0">
-              <a:lnSpc>
-                <a:spcPct val="112000"/>
-              </a:lnSpc>
-              <a:buNone/>
-            </a:pPr>
-            <a:r>
-              <a:rPr lang="en-US" sz="1300" dirty="0">
-                <a:solidFill>
-                  <a:srgbClr val="000000"/>
-                </a:solidFill>
-              </a:rPr>
-              <a:t>
-</a:t>
-            </a:r>
-            <a:pPr indent="0" marL="0">
-              <a:lnSpc>
-                <a:spcPct val="112000"/>
-              </a:lnSpc>
-              <a:buNone/>
-            </a:pPr>
-            <a:r>
-              <a:rPr lang="en-US" sz="1300" b="1" dirty="0">
-                <a:solidFill>
-                  <a:srgbClr val="1B3A5C"/>
-                </a:solidFill>
-                <a:latin typeface="Consolas" pitchFamily="34" charset="0"/>
-                <a:ea typeface="Consolas" pitchFamily="34" charset="-122"/>
-                <a:cs typeface="Consolas" pitchFamily="34" charset="-120"/>
-              </a:rPr>
-              <a:t>length(notas)</a:t>
-            </a:r>
-            <a:pPr indent="0" marL="0">
-              <a:lnSpc>
-                <a:spcPct val="112000"/>
-              </a:lnSpc>
-              <a:buNone/>
-            </a:pPr>
-            <a:r>
-              <a:rPr lang="en-US" sz="1300" dirty="0">
-                <a:solidFill>
-                  <a:srgbClr val="5B6B7A"/>
-                </a:solidFill>
-                <a:latin typeface="Consolas" pitchFamily="34" charset="0"/>
-                <a:ea typeface="Consolas" pitchFamily="34" charset="-122"/>
-                <a:cs typeface="Consolas" pitchFamily="34" charset="-120"/>
-              </a:rPr>
-              <a:t>  →  </a:t>
-            </a:r>
-            <a:pPr indent="0" marL="0">
-              <a:lnSpc>
-                <a:spcPct val="112000"/>
-              </a:lnSpc>
-              <a:buNone/>
-            </a:pPr>
-            <a:r>
-              <a:rPr lang="en-US" sz="1300" dirty="0">
-                <a:solidFill>
-                  <a:srgbClr val="1A1A1A"/>
-                </a:solidFill>
-                <a:latin typeface="Consolas" pitchFamily="34" charset="0"/>
-                <a:ea typeface="Consolas" pitchFamily="34" charset="-122"/>
-                <a:cs typeface="Consolas" pitchFamily="34" charset="-120"/>
-              </a:rPr>
-              <a:t>4</a:t>
-            </a:r>
-            <a:pPr indent="0" marL="0">
-              <a:lnSpc>
-                <a:spcPct val="112000"/>
-              </a:lnSpc>
-              <a:buNone/>
-            </a:pPr>
-            <a:r>
-              <a:rPr lang="en-US" sz="1300" dirty="0">
-                <a:solidFill>
-                  <a:srgbClr val="000000"/>
-                </a:solidFill>
-              </a:rPr>
-              <a:t>
-</a:t>
-            </a:r>
-            <a:pPr indent="0" marL="0">
-              <a:lnSpc>
-                <a:spcPct val="112000"/>
-              </a:lnSpc>
-              <a:buNone/>
-            </a:pPr>
-            <a:r>
-              <a:rPr lang="en-US" sz="1300" b="1" dirty="0">
-                <a:solidFill>
-                  <a:srgbClr val="1B3A5C"/>
-                </a:solidFill>
-                <a:latin typeface="Consolas" pitchFamily="34" charset="0"/>
-                <a:ea typeface="Consolas" pitchFamily="34" charset="-122"/>
-                <a:cs typeface="Consolas" pitchFamily="34" charset="-120"/>
-              </a:rPr>
-              <a:t>media</a:t>
-            </a:r>
-            <a:pPr indent="0" marL="0">
-              <a:lnSpc>
-                <a:spcPct val="112000"/>
-              </a:lnSpc>
-              <a:buNone/>
-            </a:pPr>
-            <a:r>
-              <a:rPr lang="en-US" sz="1300" dirty="0">
-                <a:solidFill>
-                  <a:srgbClr val="5B6B7A"/>
-                </a:solidFill>
-                <a:latin typeface="Consolas" pitchFamily="34" charset="0"/>
-                <a:ea typeface="Consolas" pitchFamily="34" charset="-122"/>
-                <a:cs typeface="Consolas" pitchFamily="34" charset="-120"/>
-              </a:rPr>
-              <a:t>  →  </a:t>
-            </a:r>
-            <a:pPr indent="0" marL="0">
-              <a:lnSpc>
-                <a:spcPct val="112000"/>
-              </a:lnSpc>
-              <a:buNone/>
-            </a:pPr>
-            <a:r>
-              <a:rPr lang="en-US" sz="1300" dirty="0">
-                <a:solidFill>
-                  <a:srgbClr val="1A1A1A"/>
-                </a:solidFill>
-                <a:latin typeface="Consolas" pitchFamily="34" charset="0"/>
-                <a:ea typeface="Consolas" pitchFamily="34" charset="-122"/>
-                <a:cs typeface="Consolas" pitchFamily="34" charset="-120"/>
-              </a:rPr>
-              <a:t>30 / 4 = 7.5</a:t>
-            </a:r>
-            <a:endParaRPr lang="en-US" sz="1300" dirty="0"/>
-          </a:p>
-        </p:txBody>
-      </p:sp>
-    </p:spTree>
-  </p:cSld>
-  <p:clrMapOvr>
-    <a:masterClrMapping/>
-  </p:clrMapOvr>
-</p:sld>
-</file>
-
-<file path=ppt/slides/slide14.xml><?xml version="1.0" encoding="utf-8"?>
-<p:sld xmlns:a="http://schemas.openxmlformats.org/drawingml/2006/main" xmlns:r="http://schemas.openxmlformats.org/officeDocument/2006/relationships" xmlns:p="http://schemas.openxmlformats.org/presentationml/2006/main">
-  <p:cSld name="Slide 3">
-    <p:bg>
-      <p:bgPr>
-        <a:solidFill>
-          <a:srgbClr val="FFFFFF"/>
-        </a:solidFill>
-      </p:bgPr>
-    </p:bg>
-    <p:spTree>
-      <p:nvGrpSpPr>
-        <p:cNvPr id="1" name=""/>
-        <p:cNvGrpSpPr/>
-        <p:nvPr/>
-      </p:nvGrpSpPr>
-      <p:grpSpPr>
-        <a:xfrm>
-          <a:off x="0" y="0"/>
-          <a:ext cx="0" cy="0"/>
-          <a:chOff x="0" y="0"/>
-          <a:chExt cx="0" cy="0"/>
-        </a:xfrm>
-      </p:grpSpPr>
-      <p:sp>
-        <p:nvSpPr>
-          <p:cNvPr id="2" name="Text 0"/>
-          <p:cNvSpPr/>
-          <p:nvPr/>
-        </p:nvSpPr>
-        <p:spPr>
-          <a:xfrm>
-            <a:off x="502920" y="320040"/>
-            <a:ext cx="11185855" cy="365760"/>
-          </a:xfrm>
-          <a:prstGeom prst="rect">
-            <a:avLst/>
-          </a:prstGeom>
-          <a:noFill/>
-          <a:ln/>
-        </p:spPr>
-        <p:txBody>
-          <a:bodyPr wrap="square" rtlCol="0" anchor="ctr"/>
-          <a:lstStyle/>
-          <a:p>
-            <a:pPr indent="0" marL="0">
-              <a:buNone/>
-            </a:pPr>
-            <a:r>
-              <a:rPr lang="en-US" sz="1300" b="1" spc="200" kern="0" dirty="0">
-                <a:solidFill>
-                  <a:srgbClr val="B5651D"/>
-                </a:solidFill>
-                <a:latin typeface="Calibri" pitchFamily="34" charset="0"/>
-                <a:ea typeface="Calibri" pitchFamily="34" charset="-122"/>
-                <a:cs typeface="Calibri" pitchFamily="34" charset="-120"/>
-              </a:rPr>
-              <a:t>AULA 15  ·  3. Onde usamos pensamento indutivo?</a:t>
-            </a:r>
-            <a:endParaRPr lang="en-US" sz="1300" dirty="0"/>
-          </a:p>
-        </p:txBody>
-      </p:sp>
-      <p:sp>
-        <p:nvSpPr>
-          <p:cNvPr id="3" name="Text 1"/>
-          <p:cNvSpPr/>
-          <p:nvPr/>
-        </p:nvSpPr>
-        <p:spPr>
-          <a:xfrm>
-            <a:off x="502920" y="658368"/>
-            <a:ext cx="11185855" cy="502920"/>
-          </a:xfrm>
-          <a:prstGeom prst="rect">
-            <a:avLst/>
-          </a:prstGeom>
-          <a:noFill/>
-          <a:ln/>
-        </p:spPr>
-        <p:txBody>
-          <a:bodyPr wrap="square" rtlCol="0" anchor="ctr"/>
-          <a:lstStyle/>
-          <a:p>
-            <a:pPr indent="0" marL="0">
-              <a:buNone/>
-            </a:pPr>
-            <a:r>
-              <a:rPr lang="en-US" sz="1900" b="1" dirty="0">
-                <a:solidFill>
-                  <a:srgbClr val="1B3A5C"/>
-                </a:solidFill>
-                <a:latin typeface="Calibri" pitchFamily="34" charset="0"/>
-                <a:ea typeface="Calibri" pitchFamily="34" charset="-122"/>
-                <a:cs typeface="Calibri" pitchFamily="34" charset="-120"/>
-              </a:rPr>
-              <a:t>Pequena tarefa no Pluto</a:t>
-            </a:r>
-            <a:endParaRPr lang="en-US" sz="1900" dirty="0"/>
-          </a:p>
-        </p:txBody>
-      </p:sp>
-      <p:sp>
-        <p:nvSpPr>
-          <p:cNvPr id="4" name="Shape 2"/>
-          <p:cNvSpPr/>
-          <p:nvPr/>
-        </p:nvSpPr>
-        <p:spPr>
-          <a:xfrm>
-            <a:off x="502920" y="1298448"/>
-            <a:ext cx="11185855" cy="1062990"/>
-          </a:xfrm>
-          <a:prstGeom prst="rect">
-            <a:avLst/>
-          </a:prstGeom>
-          <a:solidFill>
-            <a:srgbClr val="F2F4F7"/>
-          </a:solidFill>
-          <a:ln w="9525">
-            <a:solidFill>
-              <a:srgbClr val="C7CFDA"/>
-            </a:solidFill>
-            <a:prstDash val="solid"/>
-          </a:ln>
-        </p:spPr>
-      </p:sp>
-      <p:sp>
-        <p:nvSpPr>
-          <p:cNvPr id="5" name="Shape 3"/>
-          <p:cNvSpPr/>
-          <p:nvPr/>
-        </p:nvSpPr>
-        <p:spPr>
-          <a:xfrm>
-            <a:off x="502920" y="1298448"/>
-            <a:ext cx="54864" cy="1062990"/>
-          </a:xfrm>
-          <a:prstGeom prst="rect">
-            <a:avLst/>
-          </a:prstGeom>
-          <a:solidFill>
-            <a:srgbClr val="2C7A8C"/>
-          </a:solidFill>
-          <a:ln/>
-        </p:spPr>
-      </p:sp>
-      <p:sp>
-        <p:nvSpPr>
-          <p:cNvPr id="6" name="Text 4"/>
-          <p:cNvSpPr/>
-          <p:nvPr/>
-        </p:nvSpPr>
-        <p:spPr>
-          <a:xfrm>
-            <a:off x="731520" y="1371600"/>
-            <a:ext cx="10728655" cy="916686"/>
-          </a:xfrm>
-          <a:prstGeom prst="rect">
-            <a:avLst/>
-          </a:prstGeom>
-          <a:noFill/>
-          <a:ln/>
-        </p:spPr>
-        <p:txBody>
-          <a:bodyPr wrap="square" rtlCol="0" anchor="t"/>
-          <a:lstStyle/>
-          <a:p>
-            <a:pPr indent="0" marL="0">
-              <a:lnSpc>
-                <a:spcPct val="115000"/>
-              </a:lnSpc>
-              <a:buNone/>
-            </a:pPr>
-            <a:r>
-              <a:rPr lang="en-US" sz="1300" dirty="0">
-                <a:solidFill>
-                  <a:srgbClr val="1A1A1A"/>
-                </a:solidFill>
-                <a:latin typeface="Consolas" pitchFamily="34" charset="0"/>
-                <a:ea typeface="Consolas" pitchFamily="34" charset="-122"/>
-                <a:cs typeface="Consolas" pitchFamily="34" charset="-120"/>
-              </a:rPr>
-              <a:t>seq = [2, 4, 6, 8, 10]</a:t>
-            </a:r>
-            <a:endParaRPr lang="en-US" sz="1300" dirty="0"/>
-          </a:p>
-          <a:p>
-            <a:pPr indent="0" marL="0">
-              <a:lnSpc>
-                <a:spcPct val="115000"/>
-              </a:lnSpc>
-              <a:buNone/>
-            </a:pPr>
-            <a:r>
-              <a:rPr lang="en-US" sz="1300" dirty="0">
-                <a:solidFill>
-                  <a:srgbClr val="1A1A1A"/>
-                </a:solidFill>
-                <a:latin typeface="Consolas" pitchFamily="34" charset="0"/>
-                <a:ea typeface="Consolas" pitchFamily="34" charset="-122"/>
-                <a:cs typeface="Consolas" pitchFamily="34" charset="-120"/>
-              </a:rPr>
-              <a:t>hipotese = "somar 2"</a:t>
-            </a:r>
-            <a:endParaRPr lang="en-US" sz="1300" dirty="0"/>
-          </a:p>
-          <a:p>
-            <a:pPr indent="0" marL="0">
-              <a:lnSpc>
-                <a:spcPct val="115000"/>
-              </a:lnSpc>
-              <a:buNone/>
-            </a:pPr>
-            <a:r>
-              <a:rPr lang="en-US" sz="1300" dirty="0">
-                <a:solidFill>
-                  <a:srgbClr val="1A1A1A"/>
-                </a:solidFill>
-                <a:latin typeface="Consolas" pitchFamily="34" charset="0"/>
-                <a:ea typeface="Consolas" pitchFamily="34" charset="-122"/>
-                <a:cs typeface="Consolas" pitchFamily="34" charset="-120"/>
-              </a:rPr>
-              <a:t>proximo = last(seq) + 2</a:t>
-            </a:r>
-            <a:endParaRPr lang="en-US" sz="1300" dirty="0"/>
-          </a:p>
-        </p:txBody>
-      </p:sp>
-      <p:sp>
-        <p:nvSpPr>
-          <p:cNvPr id="7" name="Shape 5"/>
-          <p:cNvSpPr/>
-          <p:nvPr/>
-        </p:nvSpPr>
-        <p:spPr>
-          <a:xfrm>
-            <a:off x="502920" y="2526030"/>
-            <a:ext cx="11185855" cy="4011930"/>
-          </a:xfrm>
-          <a:prstGeom prst="rect">
-            <a:avLst/>
-          </a:prstGeom>
-          <a:solidFill>
-            <a:srgbClr val="EFF5F1"/>
-          </a:solidFill>
-          <a:ln w="9525">
-            <a:solidFill>
-              <a:srgbClr val="C7CFDA"/>
-            </a:solidFill>
-            <a:prstDash val="solid"/>
-          </a:ln>
-        </p:spPr>
-      </p:sp>
-      <p:sp>
-        <p:nvSpPr>
-          <p:cNvPr id="8" name="Shape 6"/>
-          <p:cNvSpPr/>
-          <p:nvPr/>
-        </p:nvSpPr>
-        <p:spPr>
-          <a:xfrm>
-            <a:off x="502920" y="2526030"/>
-            <a:ext cx="54864" cy="4011930"/>
-          </a:xfrm>
-          <a:prstGeom prst="rect">
-            <a:avLst/>
-          </a:prstGeom>
-          <a:solidFill>
-            <a:srgbClr val="2C7A8C"/>
-          </a:solidFill>
-          <a:ln/>
-        </p:spPr>
-      </p:sp>
-      <p:sp>
-        <p:nvSpPr>
-          <p:cNvPr id="9" name="Text 7"/>
-          <p:cNvSpPr/>
-          <p:nvPr/>
-        </p:nvSpPr>
-        <p:spPr>
-          <a:xfrm>
-            <a:off x="731520" y="2617470"/>
-            <a:ext cx="10728655" cy="3829050"/>
-          </a:xfrm>
-          <a:prstGeom prst="rect">
-            <a:avLst/>
-          </a:prstGeom>
-          <a:noFill/>
-          <a:ln/>
-        </p:spPr>
-        <p:txBody>
-          <a:bodyPr wrap="square" rtlCol="0" anchor="t"/>
-          <a:lstStyle/>
-          <a:p>
-            <a:pPr indent="0" marL="0">
-              <a:lnSpc>
-                <a:spcPct val="112000"/>
-              </a:lnSpc>
-              <a:buNone/>
-            </a:pPr>
-            <a:r>
-              <a:rPr lang="en-US" sz="1300" b="1" dirty="0">
-                <a:solidFill>
-                  <a:srgbClr val="1B3A5C"/>
-                </a:solidFill>
-                <a:latin typeface="Consolas" pitchFamily="34" charset="0"/>
-                <a:ea typeface="Consolas" pitchFamily="34" charset="-122"/>
-                <a:cs typeface="Consolas" pitchFamily="34" charset="-120"/>
-              </a:rPr>
-              <a:t>seq</a:t>
-            </a:r>
-            <a:pPr indent="0" marL="0">
-              <a:lnSpc>
-                <a:spcPct val="112000"/>
-              </a:lnSpc>
-              <a:buNone/>
-            </a:pPr>
-            <a:r>
-              <a:rPr lang="en-US" sz="1300" dirty="0">
-                <a:solidFill>
-                  <a:srgbClr val="5B6B7A"/>
-                </a:solidFill>
-                <a:latin typeface="Consolas" pitchFamily="34" charset="0"/>
-                <a:ea typeface="Consolas" pitchFamily="34" charset="-122"/>
-                <a:cs typeface="Consolas" pitchFamily="34" charset="-120"/>
-              </a:rPr>
-              <a:t>  →  </a:t>
-            </a:r>
-            <a:pPr indent="0" marL="0">
-              <a:lnSpc>
-                <a:spcPct val="112000"/>
-              </a:lnSpc>
-              <a:buNone/>
-            </a:pPr>
-            <a:r>
-              <a:rPr lang="en-US" sz="1300" dirty="0">
-                <a:solidFill>
-                  <a:srgbClr val="1A1A1A"/>
-                </a:solidFill>
-                <a:latin typeface="Consolas" pitchFamily="34" charset="0"/>
-                <a:ea typeface="Consolas" pitchFamily="34" charset="-122"/>
-                <a:cs typeface="Consolas" pitchFamily="34" charset="-120"/>
-              </a:rPr>
-              <a:t>[2, 4, 6, 8, 10]</a:t>
-            </a:r>
-            <a:pPr indent="0" marL="0">
-              <a:lnSpc>
-                <a:spcPct val="112000"/>
-              </a:lnSpc>
-              <a:buNone/>
-            </a:pPr>
-            <a:r>
-              <a:rPr lang="en-US" sz="1300" dirty="0">
-                <a:solidFill>
-                  <a:srgbClr val="000000"/>
-                </a:solidFill>
-              </a:rPr>
-              <a:t>
-</a:t>
-            </a:r>
-            <a:pPr indent="0" marL="0">
-              <a:lnSpc>
-                <a:spcPct val="112000"/>
-              </a:lnSpc>
-              <a:buNone/>
-            </a:pPr>
-            <a:r>
-              <a:rPr lang="en-US" sz="1300" b="1" dirty="0">
-                <a:solidFill>
-                  <a:srgbClr val="1B3A5C"/>
-                </a:solidFill>
-                <a:latin typeface="Consolas" pitchFamily="34" charset="0"/>
-                <a:ea typeface="Consolas" pitchFamily="34" charset="-122"/>
-                <a:cs typeface="Consolas" pitchFamily="34" charset="-120"/>
-              </a:rPr>
-              <a:t>last(seq)</a:t>
-            </a:r>
-            <a:pPr indent="0" marL="0">
-              <a:lnSpc>
-                <a:spcPct val="112000"/>
-              </a:lnSpc>
-              <a:buNone/>
-            </a:pPr>
-            <a:r>
-              <a:rPr lang="en-US" sz="1300" dirty="0">
-                <a:solidFill>
-                  <a:srgbClr val="5B6B7A"/>
-                </a:solidFill>
-                <a:latin typeface="Consolas" pitchFamily="34" charset="0"/>
-                <a:ea typeface="Consolas" pitchFamily="34" charset="-122"/>
-                <a:cs typeface="Consolas" pitchFamily="34" charset="-120"/>
-              </a:rPr>
-              <a:t>  →  </a:t>
-            </a:r>
-            <a:pPr indent="0" marL="0">
-              <a:lnSpc>
-                <a:spcPct val="112000"/>
-              </a:lnSpc>
-              <a:buNone/>
-            </a:pPr>
-            <a:r>
-              <a:rPr lang="en-US" sz="1300" dirty="0">
-                <a:solidFill>
-                  <a:srgbClr val="1A1A1A"/>
-                </a:solidFill>
-                <a:latin typeface="Consolas" pitchFamily="34" charset="0"/>
-                <a:ea typeface="Consolas" pitchFamily="34" charset="-122"/>
-                <a:cs typeface="Consolas" pitchFamily="34" charset="-120"/>
-              </a:rPr>
-              <a:t>10  (último elemento de seq)</a:t>
-            </a:r>
-            <a:pPr indent="0" marL="0">
-              <a:lnSpc>
-                <a:spcPct val="112000"/>
-              </a:lnSpc>
-              <a:buNone/>
-            </a:pPr>
-            <a:r>
-              <a:rPr lang="en-US" sz="1300" dirty="0">
-                <a:solidFill>
-                  <a:srgbClr val="000000"/>
-                </a:solidFill>
-              </a:rPr>
-              <a:t>
-</a:t>
-            </a:r>
-            <a:pPr indent="0" marL="0">
-              <a:lnSpc>
-                <a:spcPct val="112000"/>
-              </a:lnSpc>
-              <a:buNone/>
-            </a:pPr>
-            <a:r>
-              <a:rPr lang="en-US" sz="1300" b="1" dirty="0">
-                <a:solidFill>
-                  <a:srgbClr val="1B3A5C"/>
-                </a:solidFill>
-                <a:latin typeface="Consolas" pitchFamily="34" charset="0"/>
-                <a:ea typeface="Consolas" pitchFamily="34" charset="-122"/>
-                <a:cs typeface="Consolas" pitchFamily="34" charset="-120"/>
-              </a:rPr>
-              <a:t>proximo</a:t>
-            </a:r>
-            <a:pPr indent="0" marL="0">
-              <a:lnSpc>
-                <a:spcPct val="112000"/>
-              </a:lnSpc>
-              <a:buNone/>
-            </a:pPr>
-            <a:r>
-              <a:rPr lang="en-US" sz="1300" dirty="0">
-                <a:solidFill>
-                  <a:srgbClr val="5B6B7A"/>
-                </a:solidFill>
-                <a:latin typeface="Consolas" pitchFamily="34" charset="0"/>
-                <a:ea typeface="Consolas" pitchFamily="34" charset="-122"/>
-                <a:cs typeface="Consolas" pitchFamily="34" charset="-120"/>
-              </a:rPr>
-              <a:t>  →  </a:t>
-            </a:r>
-            <a:pPr indent="0" marL="0">
-              <a:lnSpc>
-                <a:spcPct val="112000"/>
-              </a:lnSpc>
-              <a:buNone/>
-            </a:pPr>
-            <a:r>
-              <a:rPr lang="en-US" sz="1300" dirty="0">
-                <a:solidFill>
-                  <a:srgbClr val="1A1A1A"/>
-                </a:solidFill>
-                <a:latin typeface="Consolas" pitchFamily="34" charset="0"/>
-                <a:ea typeface="Consolas" pitchFamily="34" charset="-122"/>
-                <a:cs typeface="Consolas" pitchFamily="34" charset="-120"/>
-              </a:rPr>
-              <a:t>10 + 2 = 12</a:t>
-            </a:r>
-            <a:endParaRPr lang="en-US" sz="1300" dirty="0"/>
-          </a:p>
-        </p:txBody>
-      </p:sp>
-    </p:spTree>
-  </p:cSld>
-  <p:clrMapOvr>
-    <a:masterClrMapping/>
-  </p:clrMapOvr>
-</p:sld>
-</file>
-
-<file path=ppt/slides/slide15.xml><?xml version="1.0" encoding="utf-8"?>
-<p:sld xmlns:a="http://schemas.openxmlformats.org/drawingml/2006/main" xmlns:r="http://schemas.openxmlformats.org/officeDocument/2006/relationships" xmlns:p="http://schemas.openxmlformats.org/presentationml/2006/main">
-  <p:cSld name="Slide 4">
-    <p:bg>
-      <p:bgPr>
-        <a:solidFill>
-          <a:srgbClr val="FFFFFF"/>
-        </a:solidFill>
-      </p:bgPr>
-    </p:bg>
-    <p:spTree>
-      <p:nvGrpSpPr>
-        <p:cNvPr id="1" name=""/>
-        <p:cNvGrpSpPr/>
-        <p:nvPr/>
-      </p:nvGrpSpPr>
-      <p:grpSpPr>
-        <a:xfrm>
-          <a:off x="0" y="0"/>
-          <a:ext cx="0" cy="0"/>
-          <a:chOff x="0" y="0"/>
-          <a:chExt cx="0" cy="0"/>
-        </a:xfrm>
-      </p:grpSpPr>
-      <p:sp>
-        <p:nvSpPr>
-          <p:cNvPr id="2" name="Text 0"/>
-          <p:cNvSpPr/>
-          <p:nvPr/>
-        </p:nvSpPr>
-        <p:spPr>
-          <a:xfrm>
-            <a:off x="502920" y="320040"/>
-            <a:ext cx="11185855" cy="365760"/>
-          </a:xfrm>
-          <a:prstGeom prst="rect">
-            <a:avLst/>
-          </a:prstGeom>
-          <a:noFill/>
-          <a:ln/>
-        </p:spPr>
-        <p:txBody>
-          <a:bodyPr wrap="square" rtlCol="0" anchor="ctr"/>
-          <a:lstStyle/>
-          <a:p>
-            <a:pPr indent="0" marL="0">
-              <a:buNone/>
-            </a:pPr>
-            <a:r>
-              <a:rPr lang="en-US" sz="1300" b="1" spc="200" kern="0" dirty="0">
-                <a:solidFill>
-                  <a:srgbClr val="B5651D"/>
-                </a:solidFill>
-                <a:latin typeface="Calibri" pitchFamily="34" charset="0"/>
-                <a:ea typeface="Calibri" pitchFamily="34" charset="-122"/>
-                <a:cs typeface="Calibri" pitchFamily="34" charset="-120"/>
-              </a:rPr>
-              <a:t>AULA 15  ·  6. Onde apareceu generalização?</a:t>
-            </a:r>
-            <a:endParaRPr lang="en-US" sz="1300" dirty="0"/>
-          </a:p>
-        </p:txBody>
-      </p:sp>
-      <p:sp>
-        <p:nvSpPr>
-          <p:cNvPr id="3" name="Text 1"/>
-          <p:cNvSpPr/>
-          <p:nvPr/>
-        </p:nvSpPr>
-        <p:spPr>
-          <a:xfrm>
-            <a:off x="502920" y="658368"/>
-            <a:ext cx="11185855" cy="502920"/>
-          </a:xfrm>
-          <a:prstGeom prst="rect">
-            <a:avLst/>
-          </a:prstGeom>
-          <a:noFill/>
-          <a:ln/>
-        </p:spPr>
-        <p:txBody>
-          <a:bodyPr wrap="square" rtlCol="0" anchor="ctr"/>
-          <a:lstStyle/>
-          <a:p>
-            <a:pPr indent="0" marL="0">
-              <a:buNone/>
-            </a:pPr>
-            <a:r>
-              <a:rPr lang="en-US" sz="1900" b="1" dirty="0">
-                <a:solidFill>
-                  <a:srgbClr val="1B3A5C"/>
-                </a:solidFill>
-                <a:latin typeface="Calibri" pitchFamily="34" charset="0"/>
-                <a:ea typeface="Calibri" pitchFamily="34" charset="-122"/>
-                <a:cs typeface="Calibri" pitchFamily="34" charset="-120"/>
-              </a:rPr>
-              <a:t>Pequena tarefa no Pluto</a:t>
-            </a:r>
-            <a:endParaRPr lang="en-US" sz="1900" dirty="0"/>
-          </a:p>
-        </p:txBody>
-      </p:sp>
-      <p:sp>
-        <p:nvSpPr>
-          <p:cNvPr id="4" name="Shape 2"/>
-          <p:cNvSpPr/>
-          <p:nvPr/>
-        </p:nvSpPr>
-        <p:spPr>
-          <a:xfrm>
-            <a:off x="502920" y="1298448"/>
-            <a:ext cx="11185855" cy="1558290"/>
-          </a:xfrm>
-          <a:prstGeom prst="rect">
-            <a:avLst/>
-          </a:prstGeom>
-          <a:solidFill>
-            <a:srgbClr val="F2F4F7"/>
-          </a:solidFill>
-          <a:ln w="9525">
-            <a:solidFill>
-              <a:srgbClr val="C7CFDA"/>
-            </a:solidFill>
-            <a:prstDash val="solid"/>
-          </a:ln>
-        </p:spPr>
-      </p:sp>
-      <p:sp>
-        <p:nvSpPr>
-          <p:cNvPr id="5" name="Shape 3"/>
-          <p:cNvSpPr/>
-          <p:nvPr/>
-        </p:nvSpPr>
-        <p:spPr>
-          <a:xfrm>
-            <a:off x="502920" y="1298448"/>
-            <a:ext cx="54864" cy="1558290"/>
-          </a:xfrm>
-          <a:prstGeom prst="rect">
-            <a:avLst/>
-          </a:prstGeom>
-          <a:solidFill>
-            <a:srgbClr val="2C7A8C"/>
-          </a:solidFill>
-          <a:ln/>
-        </p:spPr>
-      </p:sp>
-      <p:sp>
-        <p:nvSpPr>
-          <p:cNvPr id="6" name="Text 4"/>
-          <p:cNvSpPr/>
-          <p:nvPr/>
-        </p:nvSpPr>
-        <p:spPr>
-          <a:xfrm>
-            <a:off x="731520" y="1371600"/>
-            <a:ext cx="10728655" cy="1411986"/>
-          </a:xfrm>
-          <a:prstGeom prst="rect">
-            <a:avLst/>
-          </a:prstGeom>
-          <a:noFill/>
-          <a:ln/>
-        </p:spPr>
-        <p:txBody>
-          <a:bodyPr wrap="square" rtlCol="0" anchor="t"/>
-          <a:lstStyle/>
-          <a:p>
-            <a:pPr indent="0" marL="0">
-              <a:lnSpc>
-                <a:spcPct val="115000"/>
-              </a:lnSpc>
-              <a:buNone/>
-            </a:pPr>
-            <a:r>
-              <a:rPr lang="en-US" sz="1300" dirty="0">
-                <a:solidFill>
-                  <a:srgbClr val="1A1A1A"/>
-                </a:solidFill>
-                <a:latin typeface="Consolas" pitchFamily="34" charset="0"/>
-                <a:ea typeface="Consolas" pitchFamily="34" charset="-122"/>
-                <a:cs typeface="Consolas" pitchFamily="34" charset="-120"/>
-              </a:rPr>
-              <a:t>function media(notas)</a:t>
-            </a:r>
-            <a:endParaRPr lang="en-US" sz="1300" dirty="0"/>
-          </a:p>
-          <a:p>
-            <a:pPr indent="0" marL="0">
-              <a:lnSpc>
-                <a:spcPct val="115000"/>
-              </a:lnSpc>
-              <a:buNone/>
-            </a:pPr>
-            <a:r>
-              <a:rPr lang="en-US" sz="1300" dirty="0">
-                <a:solidFill>
-                  <a:srgbClr val="1A1A1A"/>
-                </a:solidFill>
-                <a:latin typeface="Consolas" pitchFamily="34" charset="0"/>
-                <a:ea typeface="Consolas" pitchFamily="34" charset="-122"/>
-                <a:cs typeface="Consolas" pitchFamily="34" charset="-120"/>
-              </a:rPr>
-              <a:t>    sum(notas) / length(notas)</a:t>
-            </a:r>
-            <a:endParaRPr lang="en-US" sz="1300" dirty="0"/>
-          </a:p>
-          <a:p>
-            <a:pPr indent="0" marL="0">
-              <a:lnSpc>
-                <a:spcPct val="115000"/>
-              </a:lnSpc>
-              <a:buNone/>
-            </a:pPr>
-            <a:r>
-              <a:rPr lang="en-US" sz="1300" dirty="0">
-                <a:solidFill>
-                  <a:srgbClr val="1A1A1A"/>
-                </a:solidFill>
-                <a:latin typeface="Consolas" pitchFamily="34" charset="0"/>
-                <a:ea typeface="Consolas" pitchFamily="34" charset="-122"/>
-                <a:cs typeface="Consolas" pitchFamily="34" charset="-120"/>
-              </a:rPr>
-              <a:t>end</a:t>
-            </a:r>
-            <a:endParaRPr lang="en-US" sz="1300" dirty="0"/>
-          </a:p>
-          <a:p>
-            <a:pPr indent="0" marL="0">
-              <a:lnSpc>
-                <a:spcPct val="115000"/>
-              </a:lnSpc>
-              <a:buNone/>
-            </a:pPr>
-            <a:r>
-              <a:rPr lang="en-US" sz="1300" dirty="0">
-                <a:solidFill>
-                  <a:srgbClr val="1A1A1A"/>
-                </a:solidFill>
-                <a:latin typeface="Consolas" pitchFamily="34" charset="0"/>
-                <a:ea typeface="Consolas" pitchFamily="34" charset="-122"/>
-                <a:cs typeface="Consolas" pitchFamily="34" charset="-120"/>
-              </a:rPr>
-              <a:t>media([8, 6, 7])</a:t>
-            </a:r>
-            <a:endParaRPr lang="en-US" sz="1300" dirty="0"/>
-          </a:p>
-          <a:p>
-            <a:pPr indent="0" marL="0">
-              <a:lnSpc>
-                <a:spcPct val="115000"/>
-              </a:lnSpc>
-              <a:buNone/>
-            </a:pPr>
-            <a:r>
-              <a:rPr lang="en-US" sz="1300" dirty="0">
-                <a:solidFill>
-                  <a:srgbClr val="1A1A1A"/>
-                </a:solidFill>
-                <a:latin typeface="Consolas" pitchFamily="34" charset="0"/>
-                <a:ea typeface="Consolas" pitchFamily="34" charset="-122"/>
-                <a:cs typeface="Consolas" pitchFamily="34" charset="-120"/>
-              </a:rPr>
-              <a:t>media([10, 9, 8])</a:t>
-            </a:r>
-            <a:endParaRPr lang="en-US" sz="1300" dirty="0"/>
-          </a:p>
-        </p:txBody>
-      </p:sp>
-      <p:sp>
-        <p:nvSpPr>
-          <p:cNvPr id="7" name="Shape 5"/>
-          <p:cNvSpPr/>
-          <p:nvPr/>
-        </p:nvSpPr>
-        <p:spPr>
-          <a:xfrm>
-            <a:off x="502920" y="3021330"/>
-            <a:ext cx="11185855" cy="3516630"/>
-          </a:xfrm>
-          <a:prstGeom prst="rect">
-            <a:avLst/>
-          </a:prstGeom>
-          <a:solidFill>
-            <a:srgbClr val="EFF5F1"/>
-          </a:solidFill>
-          <a:ln w="9525">
-            <a:solidFill>
-              <a:srgbClr val="C7CFDA"/>
-            </a:solidFill>
-            <a:prstDash val="solid"/>
-          </a:ln>
-        </p:spPr>
-      </p:sp>
-      <p:sp>
-        <p:nvSpPr>
-          <p:cNvPr id="8" name="Shape 6"/>
-          <p:cNvSpPr/>
-          <p:nvPr/>
-        </p:nvSpPr>
-        <p:spPr>
-          <a:xfrm>
-            <a:off x="502920" y="3021330"/>
-            <a:ext cx="54864" cy="3516630"/>
-          </a:xfrm>
-          <a:prstGeom prst="rect">
-            <a:avLst/>
-          </a:prstGeom>
-          <a:solidFill>
-            <a:srgbClr val="2C7A8C"/>
-          </a:solidFill>
-          <a:ln/>
-        </p:spPr>
-      </p:sp>
-      <p:sp>
-        <p:nvSpPr>
-          <p:cNvPr id="9" name="Text 7"/>
-          <p:cNvSpPr/>
-          <p:nvPr/>
-        </p:nvSpPr>
-        <p:spPr>
-          <a:xfrm>
-            <a:off x="731520" y="3112770"/>
-            <a:ext cx="10728655" cy="3333750"/>
-          </a:xfrm>
-          <a:prstGeom prst="rect">
-            <a:avLst/>
-          </a:prstGeom>
-          <a:noFill/>
-          <a:ln/>
-        </p:spPr>
-        <p:txBody>
-          <a:bodyPr wrap="square" rtlCol="0" anchor="t"/>
-          <a:lstStyle/>
-          <a:p>
-            <a:pPr indent="0" marL="0">
-              <a:lnSpc>
-                <a:spcPct val="112000"/>
-              </a:lnSpc>
-              <a:buNone/>
-            </a:pPr>
-            <a:r>
-              <a:rPr lang="en-US" sz="1300" b="1" dirty="0">
-                <a:solidFill>
-                  <a:srgbClr val="1B3A5C"/>
-                </a:solidFill>
-                <a:latin typeface="Consolas" pitchFamily="34" charset="0"/>
-                <a:ea typeface="Consolas" pitchFamily="34" charset="-122"/>
-                <a:cs typeface="Consolas" pitchFamily="34" charset="-120"/>
-              </a:rPr>
-              <a:t>media([8, 6, 7])</a:t>
-            </a:r>
-            <a:pPr indent="0" marL="0">
-              <a:lnSpc>
-                <a:spcPct val="112000"/>
-              </a:lnSpc>
-              <a:buNone/>
-            </a:pPr>
-            <a:r>
-              <a:rPr lang="en-US" sz="1300" dirty="0">
-                <a:solidFill>
-                  <a:srgbClr val="5B6B7A"/>
-                </a:solidFill>
-                <a:latin typeface="Consolas" pitchFamily="34" charset="0"/>
-                <a:ea typeface="Consolas" pitchFamily="34" charset="-122"/>
-                <a:cs typeface="Consolas" pitchFamily="34" charset="-120"/>
-              </a:rPr>
-              <a:t>  →  </a:t>
-            </a:r>
-            <a:pPr indent="0" marL="0">
-              <a:lnSpc>
-                <a:spcPct val="112000"/>
-              </a:lnSpc>
-              <a:buNone/>
-            </a:pPr>
-            <a:r>
-              <a:rPr lang="en-US" sz="1300" dirty="0">
-                <a:solidFill>
-                  <a:srgbClr val="1A1A1A"/>
-                </a:solidFill>
-                <a:latin typeface="Consolas" pitchFamily="34" charset="0"/>
-                <a:ea typeface="Consolas" pitchFamily="34" charset="-122"/>
-                <a:cs typeface="Consolas" pitchFamily="34" charset="-120"/>
-              </a:rPr>
-              <a:t>sum = 21, length = 3 → 21/3 = 7.0</a:t>
-            </a:r>
-            <a:pPr indent="0" marL="0">
-              <a:lnSpc>
-                <a:spcPct val="112000"/>
-              </a:lnSpc>
-              <a:buNone/>
-            </a:pPr>
-            <a:r>
-              <a:rPr lang="en-US" sz="1300" dirty="0">
-                <a:solidFill>
-                  <a:srgbClr val="000000"/>
-                </a:solidFill>
-              </a:rPr>
-              <a:t>
-</a:t>
-            </a:r>
-            <a:pPr indent="0" marL="0">
-              <a:lnSpc>
-                <a:spcPct val="112000"/>
-              </a:lnSpc>
-              <a:buNone/>
-            </a:pPr>
-            <a:r>
-              <a:rPr lang="en-US" sz="1300" b="1" dirty="0">
-                <a:solidFill>
-                  <a:srgbClr val="1B3A5C"/>
-                </a:solidFill>
-                <a:latin typeface="Consolas" pitchFamily="34" charset="0"/>
-                <a:ea typeface="Consolas" pitchFamily="34" charset="-122"/>
-                <a:cs typeface="Consolas" pitchFamily="34" charset="-120"/>
-              </a:rPr>
-              <a:t>media([10, 9, 8])</a:t>
-            </a:r>
-            <a:pPr indent="0" marL="0">
-              <a:lnSpc>
-                <a:spcPct val="112000"/>
-              </a:lnSpc>
-              <a:buNone/>
-            </a:pPr>
-            <a:r>
-              <a:rPr lang="en-US" sz="1300" dirty="0">
-                <a:solidFill>
-                  <a:srgbClr val="5B6B7A"/>
-                </a:solidFill>
-                <a:latin typeface="Consolas" pitchFamily="34" charset="0"/>
-                <a:ea typeface="Consolas" pitchFamily="34" charset="-122"/>
-                <a:cs typeface="Consolas" pitchFamily="34" charset="-120"/>
-              </a:rPr>
-              <a:t>  →  </a:t>
-            </a:r>
-            <a:pPr indent="0" marL="0">
-              <a:lnSpc>
-                <a:spcPct val="112000"/>
-              </a:lnSpc>
-              <a:buNone/>
-            </a:pPr>
-            <a:r>
-              <a:rPr lang="en-US" sz="1300" dirty="0">
-                <a:solidFill>
-                  <a:srgbClr val="1A1A1A"/>
-                </a:solidFill>
-                <a:latin typeface="Consolas" pitchFamily="34" charset="0"/>
-                <a:ea typeface="Consolas" pitchFamily="34" charset="-122"/>
-                <a:cs typeface="Consolas" pitchFamily="34" charset="-120"/>
-              </a:rPr>
-              <a:t>sum = 27, length = 3 → 27/3 = 9.0</a:t>
-            </a:r>
-            <a:endParaRPr lang="en-US" sz="1300" dirty="0"/>
+          <p:cNvPr id="2" name="TextBox 1"/>
+          <p:cNvSpPr txBox="1"/>
+          <p:nvPr/>
+        </p:nvSpPr>
+        <p:spPr>
+          <a:xfrm>
+            <a:off x="548626" y="548640"/>
+            <a:ext cx="10484857" cy="411480"/>
+          </a:xfrm>
+          <a:prstGeom prst="rect">
+            <a:avLst/>
+          </a:prstGeom>
+          <a:noFill/>
+        </p:spPr>
+        <p:txBody>
+          <a:bodyPr wrap="square">
+            <a:spAutoFit/>
+          </a:bodyPr>
+          <a:lstStyle/>
+          <a:p>
+            <a:pPr algn="l"/>
+            <a:r>
+              <a:rPr sz="1200" b="1" i="0">
+                <a:solidFill>
+                  <a:srgbClr val="E8963C"/>
+                </a:solidFill>
+                <a:latin typeface="Calibri"/>
+              </a:rPr>
+              <a:t>REFERÊNCIAS</a:t>
+            </a:r>
+          </a:p>
+        </p:txBody>
+      </p:sp>
+      <p:sp>
+        <p:nvSpPr>
+          <p:cNvPr id="3" name="TextBox 2"/>
+          <p:cNvSpPr txBox="1"/>
+          <p:nvPr/>
+        </p:nvSpPr>
+        <p:spPr>
+          <a:xfrm>
+            <a:off x="548626" y="1097280"/>
+            <a:ext cx="10484857" cy="754380"/>
+          </a:xfrm>
+          <a:prstGeom prst="rect">
+            <a:avLst/>
+          </a:prstGeom>
+          <a:noFill/>
+        </p:spPr>
+        <p:txBody>
+          <a:bodyPr wrap="square">
+            <a:spAutoFit/>
+          </a:bodyPr>
+          <a:lstStyle/>
+          <a:p>
+            <a:pPr algn="l"/>
+            <a:r>
+              <a:rPr sz="3000" b="1" i="0">
+                <a:solidFill>
+                  <a:srgbClr val="FFFFFF"/>
+                </a:solidFill>
+                <a:latin typeface="Cambria"/>
+              </a:rPr>
+              <a:t>Referências</a:t>
+            </a:r>
+          </a:p>
+        </p:txBody>
+      </p:sp>
+      <p:sp>
+        <p:nvSpPr>
+          <p:cNvPr id="4" name="TextBox 3"/>
+          <p:cNvSpPr txBox="1"/>
+          <p:nvPr/>
+        </p:nvSpPr>
+        <p:spPr>
+          <a:xfrm>
+            <a:off x="548626" y="2057400"/>
+            <a:ext cx="10484857" cy="4114800"/>
+          </a:xfrm>
+          <a:prstGeom prst="rect">
+            <a:avLst/>
+          </a:prstGeom>
+          <a:noFill/>
+        </p:spPr>
+        <p:txBody>
+          <a:bodyPr wrap="square">
+            <a:spAutoFit/>
+          </a:bodyPr>
+          <a:lstStyle/>
+          <a:p>
+            <a:pPr algn="l"/>
+            <a:r>
+              <a:rPr sz="1400" b="0">
+                <a:solidFill>
+                  <a:srgbClr val="E4ECF3"/>
+                </a:solidFill>
+                <a:latin typeface="Calibri"/>
+              </a:rPr>
+              <a:t>RAABE, André; ZORZO, Avelino F.; BLIKSTEIN, Paulo. Computação na Educação Básica: Fundamentos e Experiências. Porto Alegre: Penso, 2020. Ebook. ISBN 9786581334048.</a:t>
+            </a:r>
+          </a:p>
+        </p:txBody>
+      </p:sp>
+      <p:sp>
+        <p:nvSpPr>
+          <p:cNvPr id="5" name="TextBox 4"/>
+          <p:cNvSpPr txBox="1"/>
+          <p:nvPr/>
+        </p:nvSpPr>
+        <p:spPr>
+          <a:xfrm>
+            <a:off x="548626" y="6343650"/>
+            <a:ext cx="10484857" cy="342900"/>
+          </a:xfrm>
+          <a:prstGeom prst="rect">
+            <a:avLst/>
+          </a:prstGeom>
+          <a:noFill/>
+        </p:spPr>
+        <p:txBody>
+          <a:bodyPr wrap="square">
+            <a:spAutoFit/>
+          </a:bodyPr>
+          <a:lstStyle/>
+          <a:p>
+            <a:pPr algn="l"/>
+            <a:r>
+              <a:rPr sz="900" b="0" i="0">
+                <a:solidFill>
+                  <a:srgbClr val="9AA5B1"/>
+                </a:solidFill>
+                <a:latin typeface="Calibri"/>
+              </a:rPr>
+              <a:t>Aula 15 · Fechamento e Discussão</a:t>
+            </a:r>
           </a:p>
         </p:txBody>
       </p:sp>
@@ -8766,6 +9387,622 @@
 
 <file path=ppt/slides/slide4.xml><?xml version="1.0" encoding="utf-8"?>
 <p:sld xmlns:a="http://schemas.openxmlformats.org/drawingml/2006/main" xmlns:r="http://schemas.openxmlformats.org/officeDocument/2006/relationships" xmlns:p="http://schemas.openxmlformats.org/presentationml/2006/main">
+  <p:cSld name="Slide 2">
+    <p:bg>
+      <p:bgPr>
+        <a:solidFill>
+          <a:srgbClr val="FFFFFF"/>
+        </a:solidFill>
+      </p:bgPr>
+    </p:bg>
+    <p:spTree>
+      <p:nvGrpSpPr>
+        <p:cNvPr id="1" name=""/>
+        <p:cNvGrpSpPr/>
+        <p:nvPr/>
+      </p:nvGrpSpPr>
+      <p:grpSpPr>
+        <a:xfrm>
+          <a:off x="0" y="0"/>
+          <a:ext cx="0" cy="0"/>
+          <a:chOff x="0" y="0"/>
+          <a:chExt cx="0" cy="0"/>
+        </a:xfrm>
+      </p:grpSpPr>
+      <p:sp>
+        <p:nvSpPr>
+          <p:cNvPr id="2" name="Text 0"/>
+          <p:cNvSpPr/>
+          <p:nvPr/>
+        </p:nvSpPr>
+        <p:spPr>
+          <a:xfrm>
+            <a:off x="502920" y="320040"/>
+            <a:ext cx="11185855" cy="365760"/>
+          </a:xfrm>
+          <a:prstGeom prst="rect">
+            <a:avLst/>
+          </a:prstGeom>
+          <a:noFill/>
+          <a:ln/>
+        </p:spPr>
+        <p:txBody>
+          <a:bodyPr wrap="square" rtlCol="0" anchor="ctr"/>
+          <a:lstStyle/>
+          <a:p>
+            <a:pPr indent="0" marL="0">
+              <a:buNone/>
+            </a:pPr>
+            <a:r>
+              <a:rPr lang="en-US" sz="1300" b="1" spc="200" kern="0" dirty="0">
+                <a:solidFill>
+                  <a:srgbClr val="B5651D"/>
+                </a:solidFill>
+                <a:latin typeface="Calibri" pitchFamily="34" charset="0"/>
+                <a:ea typeface="Calibri" pitchFamily="34" charset="-122"/>
+                <a:cs typeface="Calibri" pitchFamily="34" charset="-120"/>
+              </a:rPr>
+              <a:t>AULA 15  ·  1. O que o Pluto tornou visível?</a:t>
+            </a:r>
+            <a:endParaRPr lang="en-US" sz="1300" dirty="0"/>
+          </a:p>
+        </p:txBody>
+      </p:sp>
+      <p:sp>
+        <p:nvSpPr>
+          <p:cNvPr id="3" name="Text 1"/>
+          <p:cNvSpPr/>
+          <p:nvPr/>
+        </p:nvSpPr>
+        <p:spPr>
+          <a:xfrm>
+            <a:off x="502920" y="658368"/>
+            <a:ext cx="11185855" cy="502920"/>
+          </a:xfrm>
+          <a:prstGeom prst="rect">
+            <a:avLst/>
+          </a:prstGeom>
+          <a:noFill/>
+          <a:ln/>
+        </p:spPr>
+        <p:txBody>
+          <a:bodyPr wrap="square" rtlCol="0" anchor="ctr"/>
+          <a:lstStyle/>
+          <a:p>
+            <a:pPr indent="0" marL="0">
+              <a:buNone/>
+            </a:pPr>
+            <a:r>
+              <a:rPr lang="en-US" sz="1900" b="1" dirty="0">
+                <a:solidFill>
+                  <a:srgbClr val="1B3A5C"/>
+                </a:solidFill>
+                <a:latin typeface="Calibri" pitchFamily="34" charset="0"/>
+                <a:ea typeface="Calibri" pitchFamily="34" charset="-122"/>
+                <a:cs typeface="Calibri" pitchFamily="34" charset="-120"/>
+              </a:rPr>
+              <a:t>Pequena tarefa no Pluto</a:t>
+            </a:r>
+            <a:endParaRPr lang="en-US" sz="1900" dirty="0"/>
+          </a:p>
+        </p:txBody>
+      </p:sp>
+      <p:sp>
+        <p:nvSpPr>
+          <p:cNvPr id="4" name="Shape 2"/>
+          <p:cNvSpPr/>
+          <p:nvPr/>
+        </p:nvSpPr>
+        <p:spPr>
+          <a:xfrm>
+            <a:off x="502920" y="1298448"/>
+            <a:ext cx="11185855" cy="1691640"/>
+          </a:xfrm>
+          <a:prstGeom prst="rect">
+            <a:avLst/>
+          </a:prstGeom>
+          <a:solidFill>
+            <a:srgbClr val="F2F4F7"/>
+          </a:solidFill>
+          <a:ln w="9525">
+            <a:solidFill>
+              <a:srgbClr val="C7CFDA"/>
+            </a:solidFill>
+            <a:prstDash val="solid"/>
+          </a:ln>
+        </p:spPr>
+      </p:sp>
+      <p:sp>
+        <p:nvSpPr>
+          <p:cNvPr id="5" name="Shape 3"/>
+          <p:cNvSpPr/>
+          <p:nvPr/>
+        </p:nvSpPr>
+        <p:spPr>
+          <a:xfrm>
+            <a:off x="502920" y="1298448"/>
+            <a:ext cx="54864" cy="1691640"/>
+          </a:xfrm>
+          <a:prstGeom prst="rect">
+            <a:avLst/>
+          </a:prstGeom>
+          <a:solidFill>
+            <a:srgbClr val="2C7A8C"/>
+          </a:solidFill>
+          <a:ln/>
+        </p:spPr>
+      </p:sp>
+      <p:sp>
+        <p:nvSpPr>
+          <p:cNvPr id="6" name="Text 4"/>
+          <p:cNvSpPr/>
+          <p:nvPr/>
+        </p:nvSpPr>
+        <p:spPr>
+          <a:xfrm>
+            <a:off x="731520" y="1371600"/>
+            <a:ext cx="10728655" cy="1545336"/>
+          </a:xfrm>
+          <a:prstGeom prst="rect">
+            <a:avLst/>
+          </a:prstGeom>
+          <a:noFill/>
+          <a:ln/>
+        </p:spPr>
+        <p:txBody>
+          <a:bodyPr wrap="square" rtlCol="0" anchor="t"/>
+          <a:lstStyle/>
+          <a:p>
+            <a:pPr indent="0" marL="0">
+              <a:lnSpc>
+                <a:spcPct val="115000"/>
+              </a:lnSpc>
+              <a:buNone/>
+            </a:pPr>
+            <a:r>
+              <a:rPr lang="en-US" sz="1200" dirty="0">
+                <a:solidFill>
+                  <a:srgbClr val="1A1A1A"/>
+                </a:solidFill>
+                <a:latin typeface="Consolas" pitchFamily="34" charset="0"/>
+                <a:ea typeface="Consolas" pitchFamily="34" charset="-122"/>
+                <a:cs typeface="Consolas" pitchFamily="34" charset="-120"/>
+              </a:rPr>
+              <a:t>notas = [7, 8, 6, 9]</a:t>
+            </a:r>
+            <a:endParaRPr lang="en-US" sz="1200" dirty="0"/>
+          </a:p>
+          <a:p>
+            <a:pPr indent="0" marL="0">
+              <a:lnSpc>
+                <a:spcPct val="115000"/>
+              </a:lnSpc>
+              <a:buNone/>
+            </a:pPr>
+            <a:r>
+              <a:rPr lang="en-US" sz="1200" dirty="0">
+                <a:solidFill>
+                  <a:srgbClr val="1A1A1A"/>
+                </a:solidFill>
+                <a:latin typeface="Consolas" pitchFamily="34" charset="0"/>
+                <a:ea typeface="Consolas" pitchFamily="34" charset="-122"/>
+                <a:cs typeface="Consolas" pitchFamily="34" charset="-120"/>
+              </a:rPr>
+              <a:t>media = sum(notas) / length(notas)</a:t>
+            </a:r>
+            <a:endParaRPr lang="en-US" sz="1200" dirty="0"/>
+          </a:p>
+          <a:p>
+            <a:pPr indent="0" marL="0">
+              <a:lnSpc>
+                <a:spcPct val="115000"/>
+              </a:lnSpc>
+              <a:buNone/>
+            </a:pPr>
+            <a:r>
+              <a:rPr lang="en-US" sz="1200" dirty="0">
+                <a:solidFill>
+                  <a:srgbClr val="1A1A1A"/>
+                </a:solidFill>
+                <a:latin typeface="Consolas" pitchFamily="34" charset="0"/>
+                <a:ea typeface="Consolas" pitchFamily="34" charset="-122"/>
+                <a:cs typeface="Consolas" pitchFamily="34" charset="-120"/>
+              </a:rPr>
+              <a:t>md"""</a:t>
+            </a:r>
+            <a:endParaRPr lang="en-US" sz="1200" dirty="0"/>
+          </a:p>
+          <a:p>
+            <a:pPr indent="0" marL="0">
+              <a:lnSpc>
+                <a:spcPct val="115000"/>
+              </a:lnSpc>
+              <a:buNone/>
+            </a:pPr>
+            <a:r>
+              <a:rPr lang="en-US" sz="1200" dirty="0">
+                <a:solidFill>
+                  <a:srgbClr val="1A1A1A"/>
+                </a:solidFill>
+                <a:latin typeface="Consolas" pitchFamily="34" charset="0"/>
+                <a:ea typeface="Consolas" pitchFamily="34" charset="-122"/>
+                <a:cs typeface="Consolas" pitchFamily="34" charset="-120"/>
+              </a:rPr>
+              <a:t>Notas: $notas</a:t>
+            </a:r>
+            <a:endParaRPr lang="en-US" sz="1200" dirty="0"/>
+          </a:p>
+          <a:p>
+            <a:pPr indent="0" marL="0">
+              <a:lnSpc>
+                <a:spcPct val="115000"/>
+              </a:lnSpc>
+              <a:buNone/>
+            </a:pPr>
+            <a:r>
+              <a:rPr lang="en-US" sz="1200" dirty="0">
+                <a:solidFill>
+                  <a:srgbClr val="1A1A1A"/>
+                </a:solidFill>
+                <a:latin typeface="Consolas" pitchFamily="34" charset="0"/>
+                <a:ea typeface="Consolas" pitchFamily="34" charset="-122"/>
+                <a:cs typeface="Consolas" pitchFamily="34" charset="-120"/>
+              </a:rPr>
+              <a:t>Média: $media</a:t>
+            </a:r>
+            <a:endParaRPr lang="en-US" sz="1200" dirty="0"/>
+          </a:p>
+          <a:p>
+            <a:pPr indent="0" marL="0">
+              <a:lnSpc>
+                <a:spcPct val="115000"/>
+              </a:lnSpc>
+              <a:buNone/>
+            </a:pPr>
+            <a:r>
+              <a:rPr lang="en-US" sz="1200" dirty="0">
+                <a:solidFill>
+                  <a:srgbClr val="1A1A1A"/>
+                </a:solidFill>
+                <a:latin typeface="Consolas" pitchFamily="34" charset="0"/>
+                <a:ea typeface="Consolas" pitchFamily="34" charset="-122"/>
+                <a:cs typeface="Consolas" pitchFamily="34" charset="-120"/>
+              </a:rPr>
+              <a:t>"""</a:t>
+            </a:r>
+            <a:endParaRPr lang="en-US" sz="1200" dirty="0"/>
+          </a:p>
+        </p:txBody>
+      </p:sp>
+      <p:sp>
+        <p:nvSpPr>
+          <p:cNvPr id="7" name="Shape 5"/>
+          <p:cNvSpPr/>
+          <p:nvPr/>
+        </p:nvSpPr>
+        <p:spPr>
+          <a:xfrm>
+            <a:off x="502920" y="3154680"/>
+            <a:ext cx="11185855" cy="3383280"/>
+          </a:xfrm>
+          <a:prstGeom prst="rect">
+            <a:avLst/>
+          </a:prstGeom>
+          <a:solidFill>
+            <a:srgbClr val="EFF5F1"/>
+          </a:solidFill>
+          <a:ln w="9525">
+            <a:solidFill>
+              <a:srgbClr val="C7CFDA"/>
+            </a:solidFill>
+            <a:prstDash val="solid"/>
+          </a:ln>
+        </p:spPr>
+      </p:sp>
+      <p:sp>
+        <p:nvSpPr>
+          <p:cNvPr id="8" name="Shape 6"/>
+          <p:cNvSpPr/>
+          <p:nvPr/>
+        </p:nvSpPr>
+        <p:spPr>
+          <a:xfrm>
+            <a:off x="502920" y="3154680"/>
+            <a:ext cx="54864" cy="3383280"/>
+          </a:xfrm>
+          <a:prstGeom prst="rect">
+            <a:avLst/>
+          </a:prstGeom>
+          <a:solidFill>
+            <a:srgbClr val="2C7A8C"/>
+          </a:solidFill>
+          <a:ln/>
+        </p:spPr>
+      </p:sp>
+      <p:sp>
+        <p:nvSpPr>
+          <p:cNvPr id="9" name="Text 7"/>
+          <p:cNvSpPr/>
+          <p:nvPr/>
+        </p:nvSpPr>
+        <p:spPr>
+          <a:xfrm>
+            <a:off x="731520" y="3246120"/>
+            <a:ext cx="10728655" cy="3200400"/>
+          </a:xfrm>
+          <a:prstGeom prst="rect">
+            <a:avLst/>
+          </a:prstGeom>
+          <a:noFill/>
+          <a:ln/>
+        </p:spPr>
+        <p:txBody>
+          <a:bodyPr wrap="square" rtlCol="0" anchor="t"/>
+          <a:lstStyle/>
+          <a:p>
+            <a:pPr indent="0" marL="0">
+              <a:lnSpc>
+                <a:spcPct val="112000"/>
+              </a:lnSpc>
+              <a:buNone/>
+            </a:pPr>
+            <a:r>
+              <a:rPr lang="en-US" sz="1300" b="1" dirty="0">
+                <a:solidFill>
+                  <a:srgbClr val="1B3A5C"/>
+                </a:solidFill>
+                <a:latin typeface="Consolas" pitchFamily="34" charset="0"/>
+                <a:ea typeface="Consolas" pitchFamily="34" charset="-122"/>
+                <a:cs typeface="Consolas" pitchFamily="34" charset="-120"/>
+              </a:rPr>
+              <a:t>notas</a:t>
+            </a:r>
+            <a:pPr indent="0" marL="0">
+              <a:lnSpc>
+                <a:spcPct val="112000"/>
+              </a:lnSpc>
+              <a:buNone/>
+            </a:pPr>
+            <a:r>
+              <a:rPr lang="en-US" sz="1300" dirty="0">
+                <a:solidFill>
+                  <a:srgbClr val="5B6B7A"/>
+                </a:solidFill>
+                <a:latin typeface="Consolas" pitchFamily="34" charset="0"/>
+                <a:ea typeface="Consolas" pitchFamily="34" charset="-122"/>
+                <a:cs typeface="Consolas" pitchFamily="34" charset="-120"/>
+              </a:rPr>
+              <a:t>  →  </a:t>
+            </a:r>
+            <a:pPr indent="0" marL="0">
+              <a:lnSpc>
+                <a:spcPct val="112000"/>
+              </a:lnSpc>
+              <a:buNone/>
+            </a:pPr>
+            <a:r>
+              <a:rPr lang="en-US" sz="1300" dirty="0">
+                <a:solidFill>
+                  <a:srgbClr val="1A1A1A"/>
+                </a:solidFill>
+                <a:latin typeface="Consolas" pitchFamily="34" charset="0"/>
+                <a:ea typeface="Consolas" pitchFamily="34" charset="-122"/>
+                <a:cs typeface="Consolas" pitchFamily="34" charset="-120"/>
+              </a:rPr>
+              <a:t>[7, 8, 6, 9]</a:t>
+            </a:r>
+            <a:pPr indent="0" marL="0">
+              <a:lnSpc>
+                <a:spcPct val="112000"/>
+              </a:lnSpc>
+              <a:buNone/>
+            </a:pPr>
+            <a:r>
+              <a:rPr lang="en-US" sz="1300" dirty="0">
+                <a:solidFill>
+                  <a:srgbClr val="000000"/>
+                </a:solidFill>
+              </a:rPr>
+              <a:t>
+</a:t>
+            </a:r>
+            <a:pPr indent="0" marL="0">
+              <a:lnSpc>
+                <a:spcPct val="112000"/>
+              </a:lnSpc>
+              <a:buNone/>
+            </a:pPr>
+            <a:r>
+              <a:rPr lang="en-US" sz="1300" b="1" dirty="0">
+                <a:solidFill>
+                  <a:srgbClr val="1B3A5C"/>
+                </a:solidFill>
+                <a:latin typeface="Consolas" pitchFamily="34" charset="0"/>
+                <a:ea typeface="Consolas" pitchFamily="34" charset="-122"/>
+                <a:cs typeface="Consolas" pitchFamily="34" charset="-120"/>
+              </a:rPr>
+              <a:t>sum(notas)</a:t>
+            </a:r>
+            <a:pPr indent="0" marL="0">
+              <a:lnSpc>
+                <a:spcPct val="112000"/>
+              </a:lnSpc>
+              <a:buNone/>
+            </a:pPr>
+            <a:r>
+              <a:rPr lang="en-US" sz="1300" dirty="0">
+                <a:solidFill>
+                  <a:srgbClr val="5B6B7A"/>
+                </a:solidFill>
+                <a:latin typeface="Consolas" pitchFamily="34" charset="0"/>
+                <a:ea typeface="Consolas" pitchFamily="34" charset="-122"/>
+                <a:cs typeface="Consolas" pitchFamily="34" charset="-120"/>
+              </a:rPr>
+              <a:t>  →  </a:t>
+            </a:r>
+            <a:pPr indent="0" marL="0">
+              <a:lnSpc>
+                <a:spcPct val="112000"/>
+              </a:lnSpc>
+              <a:buNone/>
+            </a:pPr>
+            <a:r>
+              <a:rPr lang="en-US" sz="1300" dirty="0">
+                <a:solidFill>
+                  <a:srgbClr val="1A1A1A"/>
+                </a:solidFill>
+                <a:latin typeface="Consolas" pitchFamily="34" charset="0"/>
+                <a:ea typeface="Consolas" pitchFamily="34" charset="-122"/>
+                <a:cs typeface="Consolas" pitchFamily="34" charset="-120"/>
+              </a:rPr>
+              <a:t>30</a:t>
+            </a:r>
+            <a:pPr indent="0" marL="0">
+              <a:lnSpc>
+                <a:spcPct val="112000"/>
+              </a:lnSpc>
+              <a:buNone/>
+            </a:pPr>
+            <a:r>
+              <a:rPr lang="en-US" sz="1300" dirty="0">
+                <a:solidFill>
+                  <a:srgbClr val="000000"/>
+                </a:solidFill>
+              </a:rPr>
+              <a:t>
+</a:t>
+            </a:r>
+            <a:pPr indent="0" marL="0">
+              <a:lnSpc>
+                <a:spcPct val="112000"/>
+              </a:lnSpc>
+              <a:buNone/>
+            </a:pPr>
+            <a:r>
+              <a:rPr lang="en-US" sz="1300" b="1" dirty="0">
+                <a:solidFill>
+                  <a:srgbClr val="1B3A5C"/>
+                </a:solidFill>
+                <a:latin typeface="Consolas" pitchFamily="34" charset="0"/>
+                <a:ea typeface="Consolas" pitchFamily="34" charset="-122"/>
+                <a:cs typeface="Consolas" pitchFamily="34" charset="-120"/>
+              </a:rPr>
+              <a:t>length(notas)</a:t>
+            </a:r>
+            <a:pPr indent="0" marL="0">
+              <a:lnSpc>
+                <a:spcPct val="112000"/>
+              </a:lnSpc>
+              <a:buNone/>
+            </a:pPr>
+            <a:r>
+              <a:rPr lang="en-US" sz="1300" dirty="0">
+                <a:solidFill>
+                  <a:srgbClr val="5B6B7A"/>
+                </a:solidFill>
+                <a:latin typeface="Consolas" pitchFamily="34" charset="0"/>
+                <a:ea typeface="Consolas" pitchFamily="34" charset="-122"/>
+                <a:cs typeface="Consolas" pitchFamily="34" charset="-120"/>
+              </a:rPr>
+              <a:t>  →  </a:t>
+            </a:r>
+            <a:pPr indent="0" marL="0">
+              <a:lnSpc>
+                <a:spcPct val="112000"/>
+              </a:lnSpc>
+              <a:buNone/>
+            </a:pPr>
+            <a:r>
+              <a:rPr lang="en-US" sz="1300" dirty="0">
+                <a:solidFill>
+                  <a:srgbClr val="1A1A1A"/>
+                </a:solidFill>
+                <a:latin typeface="Consolas" pitchFamily="34" charset="0"/>
+                <a:ea typeface="Consolas" pitchFamily="34" charset="-122"/>
+                <a:cs typeface="Consolas" pitchFamily="34" charset="-120"/>
+              </a:rPr>
+              <a:t>4</a:t>
+            </a:r>
+            <a:pPr indent="0" marL="0">
+              <a:lnSpc>
+                <a:spcPct val="112000"/>
+              </a:lnSpc>
+              <a:buNone/>
+            </a:pPr>
+            <a:r>
+              <a:rPr lang="en-US" sz="1300" dirty="0">
+                <a:solidFill>
+                  <a:srgbClr val="000000"/>
+                </a:solidFill>
+              </a:rPr>
+              <a:t>
+</a:t>
+            </a:r>
+            <a:pPr indent="0" marL="0">
+              <a:lnSpc>
+                <a:spcPct val="112000"/>
+              </a:lnSpc>
+              <a:buNone/>
+            </a:pPr>
+            <a:r>
+              <a:rPr lang="en-US" sz="1300" b="1" dirty="0">
+                <a:solidFill>
+                  <a:srgbClr val="1B3A5C"/>
+                </a:solidFill>
+                <a:latin typeface="Consolas" pitchFamily="34" charset="0"/>
+                <a:ea typeface="Consolas" pitchFamily="34" charset="-122"/>
+                <a:cs typeface="Consolas" pitchFamily="34" charset="-120"/>
+              </a:rPr>
+              <a:t>media</a:t>
+            </a:r>
+            <a:pPr indent="0" marL="0">
+              <a:lnSpc>
+                <a:spcPct val="112000"/>
+              </a:lnSpc>
+              <a:buNone/>
+            </a:pPr>
+            <a:r>
+              <a:rPr lang="en-US" sz="1300" dirty="0">
+                <a:solidFill>
+                  <a:srgbClr val="5B6B7A"/>
+                </a:solidFill>
+                <a:latin typeface="Consolas" pitchFamily="34" charset="0"/>
+                <a:ea typeface="Consolas" pitchFamily="34" charset="-122"/>
+                <a:cs typeface="Consolas" pitchFamily="34" charset="-120"/>
+              </a:rPr>
+              <a:t>  →  </a:t>
+            </a:r>
+            <a:pPr indent="0" marL="0">
+              <a:lnSpc>
+                <a:spcPct val="112000"/>
+              </a:lnSpc>
+              <a:buNone/>
+            </a:pPr>
+            <a:r>
+              <a:rPr lang="en-US" sz="1300" dirty="0">
+                <a:solidFill>
+                  <a:srgbClr val="1A1A1A"/>
+                </a:solidFill>
+                <a:latin typeface="Consolas" pitchFamily="34" charset="0"/>
+                <a:ea typeface="Consolas" pitchFamily="34" charset="-122"/>
+                <a:cs typeface="Consolas" pitchFamily="34" charset="-120"/>
+              </a:rPr>
+              <a:t>30 / 4 = 7.5</a:t>
+            </a:r>
+            <a:endParaRPr lang="en-US" sz="1300" dirty="0"/>
+          </a:p>
+        </p:txBody>
+      </p:sp>
+    </p:spTree>
+  </p:cSld>
+  <p:clrMapOvr>
+    <a:masterClrMapping/>
+  </p:clrMapOvr>
+</p:sld>
+</file>
+
+<file path=ppt/slides/slide5.xml><?xml version="1.0" encoding="utf-8"?>
+<p:sld xmlns:a="http://schemas.openxmlformats.org/drawingml/2006/main" xmlns:r="http://schemas.openxmlformats.org/officeDocument/2006/relationships" xmlns:p="http://schemas.openxmlformats.org/presentationml/2006/main">
   <p:cSld name="Slide 4">
     <p:bg>
       <p:bgPr>
@@ -9686,7 +10923,7 @@
 </p:sld>
 </file>
 
-<file path=ppt/slides/slide5.xml><?xml version="1.0" encoding="utf-8"?>
+<file path=ppt/slides/slide6.xml><?xml version="1.0" encoding="utf-8"?>
 <p:sld xmlns:a="http://schemas.openxmlformats.org/drawingml/2006/main" xmlns:r="http://schemas.openxmlformats.org/officeDocument/2006/relationships" xmlns:p="http://schemas.openxmlformats.org/presentationml/2006/main">
   <p:cSld name="Slide 5">
     <p:bg>
@@ -10591,7 +11828,497 @@
 </p:sld>
 </file>
 
-<file path=ppt/slides/slide6.xml><?xml version="1.0" encoding="utf-8"?>
+<file path=ppt/slides/slide7.xml><?xml version="1.0" encoding="utf-8"?>
+<p:sld xmlns:a="http://schemas.openxmlformats.org/drawingml/2006/main" xmlns:r="http://schemas.openxmlformats.org/officeDocument/2006/relationships" xmlns:p="http://schemas.openxmlformats.org/presentationml/2006/main">
+  <p:cSld name="Slide 3">
+    <p:bg>
+      <p:bgPr>
+        <a:solidFill>
+          <a:srgbClr val="FFFFFF"/>
+        </a:solidFill>
+      </p:bgPr>
+    </p:bg>
+    <p:spTree>
+      <p:nvGrpSpPr>
+        <p:cNvPr id="1" name=""/>
+        <p:cNvGrpSpPr/>
+        <p:nvPr/>
+      </p:nvGrpSpPr>
+      <p:grpSpPr>
+        <a:xfrm>
+          <a:off x="0" y="0"/>
+          <a:ext cx="0" cy="0"/>
+          <a:chOff x="0" y="0"/>
+          <a:chExt cx="0" cy="0"/>
+        </a:xfrm>
+      </p:grpSpPr>
+      <p:sp>
+        <p:nvSpPr>
+          <p:cNvPr id="2" name="Text 0"/>
+          <p:cNvSpPr/>
+          <p:nvPr/>
+        </p:nvSpPr>
+        <p:spPr>
+          <a:xfrm>
+            <a:off x="502920" y="320040"/>
+            <a:ext cx="11185855" cy="365760"/>
+          </a:xfrm>
+          <a:prstGeom prst="rect">
+            <a:avLst/>
+          </a:prstGeom>
+          <a:noFill/>
+          <a:ln/>
+        </p:spPr>
+        <p:txBody>
+          <a:bodyPr wrap="square" rtlCol="0" anchor="ctr"/>
+          <a:lstStyle/>
+          <a:p>
+            <a:pPr indent="0" marL="0">
+              <a:buNone/>
+            </a:pPr>
+            <a:r>
+              <a:rPr lang="en-US" sz="1300" b="1" spc="200" kern="0" dirty="0">
+                <a:solidFill>
+                  <a:srgbClr val="B5651D"/>
+                </a:solidFill>
+                <a:latin typeface="Calibri" pitchFamily="34" charset="0"/>
+                <a:ea typeface="Calibri" pitchFamily="34" charset="-122"/>
+                <a:cs typeface="Calibri" pitchFamily="34" charset="-120"/>
+              </a:rPr>
+              <a:t>AULA 15  ·  3. Onde usamos pensamento indutivo?</a:t>
+            </a:r>
+            <a:endParaRPr lang="en-US" sz="1300" dirty="0"/>
+          </a:p>
+        </p:txBody>
+      </p:sp>
+      <p:sp>
+        <p:nvSpPr>
+          <p:cNvPr id="3" name="Text 1"/>
+          <p:cNvSpPr/>
+          <p:nvPr/>
+        </p:nvSpPr>
+        <p:spPr>
+          <a:xfrm>
+            <a:off x="502920" y="658368"/>
+            <a:ext cx="11185855" cy="502920"/>
+          </a:xfrm>
+          <a:prstGeom prst="rect">
+            <a:avLst/>
+          </a:prstGeom>
+          <a:noFill/>
+          <a:ln/>
+        </p:spPr>
+        <p:txBody>
+          <a:bodyPr wrap="square" rtlCol="0" anchor="ctr"/>
+          <a:lstStyle/>
+          <a:p>
+            <a:pPr indent="0" marL="0">
+              <a:buNone/>
+            </a:pPr>
+            <a:r>
+              <a:rPr lang="en-US" sz="1900" b="1" dirty="0">
+                <a:solidFill>
+                  <a:srgbClr val="1B3A5C"/>
+                </a:solidFill>
+                <a:latin typeface="Calibri" pitchFamily="34" charset="0"/>
+                <a:ea typeface="Calibri" pitchFamily="34" charset="-122"/>
+                <a:cs typeface="Calibri" pitchFamily="34" charset="-120"/>
+              </a:rPr>
+              <a:t>Pequena tarefa no Pluto</a:t>
+            </a:r>
+            <a:endParaRPr lang="en-US" sz="1900" dirty="0"/>
+          </a:p>
+        </p:txBody>
+      </p:sp>
+      <p:sp>
+        <p:nvSpPr>
+          <p:cNvPr id="4" name="Shape 2"/>
+          <p:cNvSpPr/>
+          <p:nvPr/>
+        </p:nvSpPr>
+        <p:spPr>
+          <a:xfrm>
+            <a:off x="502920" y="1298448"/>
+            <a:ext cx="11185855" cy="1062990"/>
+          </a:xfrm>
+          <a:prstGeom prst="rect">
+            <a:avLst/>
+          </a:prstGeom>
+          <a:solidFill>
+            <a:srgbClr val="F2F4F7"/>
+          </a:solidFill>
+          <a:ln w="9525">
+            <a:solidFill>
+              <a:srgbClr val="C7CFDA"/>
+            </a:solidFill>
+            <a:prstDash val="solid"/>
+          </a:ln>
+        </p:spPr>
+      </p:sp>
+      <p:sp>
+        <p:nvSpPr>
+          <p:cNvPr id="5" name="Shape 3"/>
+          <p:cNvSpPr/>
+          <p:nvPr/>
+        </p:nvSpPr>
+        <p:spPr>
+          <a:xfrm>
+            <a:off x="502920" y="1298448"/>
+            <a:ext cx="54864" cy="1062990"/>
+          </a:xfrm>
+          <a:prstGeom prst="rect">
+            <a:avLst/>
+          </a:prstGeom>
+          <a:solidFill>
+            <a:srgbClr val="2C7A8C"/>
+          </a:solidFill>
+          <a:ln/>
+        </p:spPr>
+      </p:sp>
+      <p:sp>
+        <p:nvSpPr>
+          <p:cNvPr id="6" name="Text 4"/>
+          <p:cNvSpPr/>
+          <p:nvPr/>
+        </p:nvSpPr>
+        <p:spPr>
+          <a:xfrm>
+            <a:off x="731520" y="1371600"/>
+            <a:ext cx="10728655" cy="916686"/>
+          </a:xfrm>
+          <a:prstGeom prst="rect">
+            <a:avLst/>
+          </a:prstGeom>
+          <a:noFill/>
+          <a:ln/>
+        </p:spPr>
+        <p:txBody>
+          <a:bodyPr wrap="square" rtlCol="0" anchor="t"/>
+          <a:lstStyle/>
+          <a:p>
+            <a:pPr indent="0" marL="0">
+              <a:lnSpc>
+                <a:spcPct val="115000"/>
+              </a:lnSpc>
+              <a:buNone/>
+            </a:pPr>
+            <a:r>
+              <a:rPr lang="en-US" sz="1300" dirty="0">
+                <a:solidFill>
+                  <a:srgbClr val="1A1A1A"/>
+                </a:solidFill>
+                <a:latin typeface="Consolas" pitchFamily="34" charset="0"/>
+                <a:ea typeface="Consolas" pitchFamily="34" charset="-122"/>
+                <a:cs typeface="Consolas" pitchFamily="34" charset="-120"/>
+              </a:rPr>
+              <a:t>seq = [2, 4, 6, 8, 10]</a:t>
+            </a:r>
+            <a:endParaRPr lang="en-US" sz="1300" dirty="0"/>
+          </a:p>
+          <a:p>
+            <a:pPr indent="0" marL="0">
+              <a:lnSpc>
+                <a:spcPct val="115000"/>
+              </a:lnSpc>
+              <a:buNone/>
+            </a:pPr>
+            <a:r>
+              <a:rPr lang="en-US" sz="1300" dirty="0">
+                <a:solidFill>
+                  <a:srgbClr val="1A1A1A"/>
+                </a:solidFill>
+                <a:latin typeface="Consolas" pitchFamily="34" charset="0"/>
+                <a:ea typeface="Consolas" pitchFamily="34" charset="-122"/>
+                <a:cs typeface="Consolas" pitchFamily="34" charset="-120"/>
+              </a:rPr>
+              <a:t>hipotese = "somar 2"</a:t>
+            </a:r>
+            <a:endParaRPr lang="en-US" sz="1300" dirty="0"/>
+          </a:p>
+          <a:p>
+            <a:pPr indent="0" marL="0">
+              <a:lnSpc>
+                <a:spcPct val="115000"/>
+              </a:lnSpc>
+              <a:buNone/>
+            </a:pPr>
+            <a:r>
+              <a:rPr lang="en-US" sz="1300" dirty="0">
+                <a:solidFill>
+                  <a:srgbClr val="1A1A1A"/>
+                </a:solidFill>
+                <a:latin typeface="Consolas" pitchFamily="34" charset="0"/>
+                <a:ea typeface="Consolas" pitchFamily="34" charset="-122"/>
+                <a:cs typeface="Consolas" pitchFamily="34" charset="-120"/>
+              </a:rPr>
+              <a:t>proximo = last(seq) + 2</a:t>
+            </a:r>
+            <a:endParaRPr lang="en-US" sz="1300" dirty="0"/>
+          </a:p>
+        </p:txBody>
+      </p:sp>
+      <p:sp>
+        <p:nvSpPr>
+          <p:cNvPr id="7" name="Shape 5"/>
+          <p:cNvSpPr/>
+          <p:nvPr/>
+        </p:nvSpPr>
+        <p:spPr>
+          <a:xfrm>
+            <a:off x="502920" y="2526030"/>
+            <a:ext cx="11185855" cy="4011930"/>
+          </a:xfrm>
+          <a:prstGeom prst="rect">
+            <a:avLst/>
+          </a:prstGeom>
+          <a:solidFill>
+            <a:srgbClr val="EFF5F1"/>
+          </a:solidFill>
+          <a:ln w="9525">
+            <a:solidFill>
+              <a:srgbClr val="C7CFDA"/>
+            </a:solidFill>
+            <a:prstDash val="solid"/>
+          </a:ln>
+        </p:spPr>
+      </p:sp>
+      <p:sp>
+        <p:nvSpPr>
+          <p:cNvPr id="8" name="Shape 6"/>
+          <p:cNvSpPr/>
+          <p:nvPr/>
+        </p:nvSpPr>
+        <p:spPr>
+          <a:xfrm>
+            <a:off x="502920" y="2526030"/>
+            <a:ext cx="54864" cy="4011930"/>
+          </a:xfrm>
+          <a:prstGeom prst="rect">
+            <a:avLst/>
+          </a:prstGeom>
+          <a:solidFill>
+            <a:srgbClr val="2C7A8C"/>
+          </a:solidFill>
+          <a:ln/>
+        </p:spPr>
+      </p:sp>
+      <p:sp>
+        <p:nvSpPr>
+          <p:cNvPr id="9" name="Text 7"/>
+          <p:cNvSpPr/>
+          <p:nvPr/>
+        </p:nvSpPr>
+        <p:spPr>
+          <a:xfrm>
+            <a:off x="731520" y="2617470"/>
+            <a:ext cx="10728655" cy="3829050"/>
+          </a:xfrm>
+          <a:prstGeom prst="rect">
+            <a:avLst/>
+          </a:prstGeom>
+          <a:noFill/>
+          <a:ln/>
+        </p:spPr>
+        <p:txBody>
+          <a:bodyPr wrap="square" rtlCol="0" anchor="t"/>
+          <a:lstStyle/>
+          <a:p>
+            <a:pPr indent="0" marL="0">
+              <a:lnSpc>
+                <a:spcPct val="112000"/>
+              </a:lnSpc>
+              <a:buNone/>
+            </a:pPr>
+            <a:r>
+              <a:rPr lang="en-US" sz="1300" b="1" dirty="0">
+                <a:solidFill>
+                  <a:srgbClr val="1B3A5C"/>
+                </a:solidFill>
+                <a:latin typeface="Consolas" pitchFamily="34" charset="0"/>
+                <a:ea typeface="Consolas" pitchFamily="34" charset="-122"/>
+                <a:cs typeface="Consolas" pitchFamily="34" charset="-120"/>
+              </a:rPr>
+              <a:t>seq</a:t>
+            </a:r>
+            <a:pPr indent="0" marL="0">
+              <a:lnSpc>
+                <a:spcPct val="112000"/>
+              </a:lnSpc>
+              <a:buNone/>
+            </a:pPr>
+            <a:r>
+              <a:rPr lang="en-US" sz="1300" dirty="0">
+                <a:solidFill>
+                  <a:srgbClr val="5B6B7A"/>
+                </a:solidFill>
+                <a:latin typeface="Consolas" pitchFamily="34" charset="0"/>
+                <a:ea typeface="Consolas" pitchFamily="34" charset="-122"/>
+                <a:cs typeface="Consolas" pitchFamily="34" charset="-120"/>
+              </a:rPr>
+              <a:t>  →  </a:t>
+            </a:r>
+            <a:pPr indent="0" marL="0">
+              <a:lnSpc>
+                <a:spcPct val="112000"/>
+              </a:lnSpc>
+              <a:buNone/>
+            </a:pPr>
+            <a:r>
+              <a:rPr lang="en-US" sz="1300" dirty="0">
+                <a:solidFill>
+                  <a:srgbClr val="1A1A1A"/>
+                </a:solidFill>
+                <a:latin typeface="Consolas" pitchFamily="34" charset="0"/>
+                <a:ea typeface="Consolas" pitchFamily="34" charset="-122"/>
+                <a:cs typeface="Consolas" pitchFamily="34" charset="-120"/>
+              </a:rPr>
+              <a:t>[2, 4, 6, 8, 10]</a:t>
+            </a:r>
+            <a:pPr indent="0" marL="0">
+              <a:lnSpc>
+                <a:spcPct val="112000"/>
+              </a:lnSpc>
+              <a:buNone/>
+            </a:pPr>
+            <a:r>
+              <a:rPr lang="en-US" sz="1300" dirty="0">
+                <a:solidFill>
+                  <a:srgbClr val="000000"/>
+                </a:solidFill>
+              </a:rPr>
+              <a:t>
+</a:t>
+            </a:r>
+            <a:pPr indent="0" marL="0">
+              <a:lnSpc>
+                <a:spcPct val="112000"/>
+              </a:lnSpc>
+              <a:buNone/>
+            </a:pPr>
+            <a:r>
+              <a:rPr lang="en-US" sz="1300" b="1" dirty="0">
+                <a:solidFill>
+                  <a:srgbClr val="1B3A5C"/>
+                </a:solidFill>
+                <a:latin typeface="Consolas" pitchFamily="34" charset="0"/>
+                <a:ea typeface="Consolas" pitchFamily="34" charset="-122"/>
+                <a:cs typeface="Consolas" pitchFamily="34" charset="-120"/>
+              </a:rPr>
+              <a:t>last(seq)</a:t>
+            </a:r>
+            <a:pPr indent="0" marL="0">
+              <a:lnSpc>
+                <a:spcPct val="112000"/>
+              </a:lnSpc>
+              <a:buNone/>
+            </a:pPr>
+            <a:r>
+              <a:rPr lang="en-US" sz="1300" dirty="0">
+                <a:solidFill>
+                  <a:srgbClr val="5B6B7A"/>
+                </a:solidFill>
+                <a:latin typeface="Consolas" pitchFamily="34" charset="0"/>
+                <a:ea typeface="Consolas" pitchFamily="34" charset="-122"/>
+                <a:cs typeface="Consolas" pitchFamily="34" charset="-120"/>
+              </a:rPr>
+              <a:t>  →  </a:t>
+            </a:r>
+            <a:pPr indent="0" marL="0">
+              <a:lnSpc>
+                <a:spcPct val="112000"/>
+              </a:lnSpc>
+              <a:buNone/>
+            </a:pPr>
+            <a:r>
+              <a:rPr lang="en-US" sz="1300" dirty="0">
+                <a:solidFill>
+                  <a:srgbClr val="1A1A1A"/>
+                </a:solidFill>
+                <a:latin typeface="Consolas" pitchFamily="34" charset="0"/>
+                <a:ea typeface="Consolas" pitchFamily="34" charset="-122"/>
+                <a:cs typeface="Consolas" pitchFamily="34" charset="-120"/>
+              </a:rPr>
+              <a:t>10  (último elemento de seq)</a:t>
+            </a:r>
+            <a:pPr indent="0" marL="0">
+              <a:lnSpc>
+                <a:spcPct val="112000"/>
+              </a:lnSpc>
+              <a:buNone/>
+            </a:pPr>
+            <a:r>
+              <a:rPr lang="en-US" sz="1300" dirty="0">
+                <a:solidFill>
+                  <a:srgbClr val="000000"/>
+                </a:solidFill>
+              </a:rPr>
+              <a:t>
+</a:t>
+            </a:r>
+            <a:pPr indent="0" marL="0">
+              <a:lnSpc>
+                <a:spcPct val="112000"/>
+              </a:lnSpc>
+              <a:buNone/>
+            </a:pPr>
+            <a:r>
+              <a:rPr lang="en-US" sz="1300" b="1" dirty="0">
+                <a:solidFill>
+                  <a:srgbClr val="1B3A5C"/>
+                </a:solidFill>
+                <a:latin typeface="Consolas" pitchFamily="34" charset="0"/>
+                <a:ea typeface="Consolas" pitchFamily="34" charset="-122"/>
+                <a:cs typeface="Consolas" pitchFamily="34" charset="-120"/>
+              </a:rPr>
+              <a:t>proximo</a:t>
+            </a:r>
+            <a:pPr indent="0" marL="0">
+              <a:lnSpc>
+                <a:spcPct val="112000"/>
+              </a:lnSpc>
+              <a:buNone/>
+            </a:pPr>
+            <a:r>
+              <a:rPr lang="en-US" sz="1300" dirty="0">
+                <a:solidFill>
+                  <a:srgbClr val="5B6B7A"/>
+                </a:solidFill>
+                <a:latin typeface="Consolas" pitchFamily="34" charset="0"/>
+                <a:ea typeface="Consolas" pitchFamily="34" charset="-122"/>
+                <a:cs typeface="Consolas" pitchFamily="34" charset="-120"/>
+              </a:rPr>
+              <a:t>  →  </a:t>
+            </a:r>
+            <a:pPr indent="0" marL="0">
+              <a:lnSpc>
+                <a:spcPct val="112000"/>
+              </a:lnSpc>
+              <a:buNone/>
+            </a:pPr>
+            <a:r>
+              <a:rPr lang="en-US" sz="1300" dirty="0">
+                <a:solidFill>
+                  <a:srgbClr val="1A1A1A"/>
+                </a:solidFill>
+                <a:latin typeface="Consolas" pitchFamily="34" charset="0"/>
+                <a:ea typeface="Consolas" pitchFamily="34" charset="-122"/>
+                <a:cs typeface="Consolas" pitchFamily="34" charset="-120"/>
+              </a:rPr>
+              <a:t>10 + 2 = 12</a:t>
+            </a:r>
+            <a:endParaRPr lang="en-US" sz="1300" dirty="0"/>
+          </a:p>
+        </p:txBody>
+      </p:sp>
+    </p:spTree>
+  </p:cSld>
+  <p:clrMapOvr>
+    <a:masterClrMapping/>
+  </p:clrMapOvr>
+</p:sld>
+</file>
+
+<file path=ppt/slides/slide8.xml><?xml version="1.0" encoding="utf-8"?>
 <p:sld xmlns:a="http://schemas.openxmlformats.org/drawingml/2006/main" xmlns:r="http://schemas.openxmlformats.org/officeDocument/2006/relationships" xmlns:p="http://schemas.openxmlformats.org/presentationml/2006/main">
   <p:cSld name="Slide 6">
     <p:bg>
@@ -11496,7 +13223,7 @@
 </p:sld>
 </file>
 
-<file path=ppt/slides/slide7.xml><?xml version="1.0" encoding="utf-8"?>
+<file path=ppt/slides/slide9.xml><?xml version="1.0" encoding="utf-8"?>
 <p:sld xmlns:a="http://schemas.openxmlformats.org/drawingml/2006/main" xmlns:r="http://schemas.openxmlformats.org/officeDocument/2006/relationships" xmlns:p="http://schemas.openxmlformats.org/presentationml/2006/main">
   <p:cSld name="Slide 7">
     <p:bg>
@@ -12388,1850 +14115,6 @@
                 </a:solidFill>
               </a:rPr>
               <a:t>07</a:t>
-            </a:r>
-            <a:endParaRPr lang="en-US" sz="850" dirty="0"/>
-          </a:p>
-        </p:txBody>
-      </p:sp>
-    </p:spTree>
-  </p:cSld>
-  <p:clrMapOvr>
-    <a:masterClrMapping/>
-  </p:clrMapOvr>
-</p:sld>
-</file>
-
-<file path=ppt/slides/slide8.xml><?xml version="1.0" encoding="utf-8"?>
-<p:sld xmlns:a="http://schemas.openxmlformats.org/drawingml/2006/main" xmlns:r="http://schemas.openxmlformats.org/officeDocument/2006/relationships" xmlns:p="http://schemas.openxmlformats.org/presentationml/2006/main">
-  <p:cSld name="Slide 8">
-    <p:bg>
-      <p:bgPr>
-        <a:solidFill>
-          <a:srgbClr val="F8FAFC"/>
-        </a:solidFill>
-      </p:bgPr>
-    </p:bg>
-    <p:spTree>
-      <p:nvGrpSpPr>
-        <p:cNvPr id="1" name=""/>
-        <p:cNvGrpSpPr/>
-        <p:nvPr/>
-      </p:nvGrpSpPr>
-      <p:grpSpPr>
-        <a:xfrm>
-          <a:off x="0" y="0"/>
-          <a:ext cx="0" cy="0"/>
-          <a:chOff x="0" y="0"/>
-          <a:chExt cx="0" cy="0"/>
-        </a:xfrm>
-      </p:grpSpPr>
-      <p:sp>
-        <p:nvSpPr>
-          <p:cNvPr id="2" name="Shape 0"/>
-          <p:cNvSpPr/>
-          <p:nvPr/>
-        </p:nvSpPr>
-        <p:spPr>
-          <a:xfrm>
-            <a:off x="0" y="0"/>
-            <a:ext cx="12191695" cy="6858000"/>
-          </a:xfrm>
-          <a:prstGeom prst="rect">
-            <a:avLst/>
-          </a:prstGeom>
-          <a:solidFill>
-            <a:srgbClr val="F8FAFC"/>
-          </a:solidFill>
-          <a:ln w="12700">
-            <a:solidFill>
-              <a:srgbClr val="F8FAFC">
-                <a:alpha val="0"/>
-              </a:srgbClr>
-            </a:solidFill>
-            <a:prstDash val="solid"/>
-          </a:ln>
-        </p:spPr>
-      </p:sp>
-      <p:sp>
-        <p:nvSpPr>
-          <p:cNvPr id="3" name="Shape 1"/>
-          <p:cNvSpPr/>
-          <p:nvPr/>
-        </p:nvSpPr>
-        <p:spPr>
-          <a:xfrm>
-            <a:off x="0" y="0"/>
-            <a:ext cx="12191695" cy="91440"/>
-          </a:xfrm>
-          <a:prstGeom prst="rect">
-            <a:avLst/>
-          </a:prstGeom>
-          <a:solidFill>
-            <a:srgbClr val="2AA7C9"/>
-          </a:solidFill>
-          <a:ln w="12700">
-            <a:solidFill>
-              <a:srgbClr val="2AA7C9">
-                <a:alpha val="0"/>
-              </a:srgbClr>
-            </a:solidFill>
-            <a:prstDash val="solid"/>
-          </a:ln>
-        </p:spPr>
-      </p:sp>
-      <p:sp>
-        <p:nvSpPr>
-          <p:cNvPr id="4" name="Text 2"/>
-          <p:cNvSpPr/>
-          <p:nvPr/>
-        </p:nvSpPr>
-        <p:spPr>
-          <a:xfrm>
-            <a:off x="594360" y="411480"/>
-            <a:ext cx="9875520" cy="502920"/>
-          </a:xfrm>
-          <a:prstGeom prst="rect">
-            <a:avLst/>
-          </a:prstGeom>
-          <a:noFill/>
-          <a:ln/>
-        </p:spPr>
-        <p:txBody>
-          <a:bodyPr wrap="square" lIns="254" tIns="254" rIns="254" bIns="254" rtlCol="0" anchor="ctr">
-            <a:normAutofit/>
-          </a:bodyPr>
-          <a:lstStyle/>
-          <a:p>
-            <a:pPr indent="0" marL="0">
-              <a:buNone/>
-            </a:pPr>
-            <a:r>
-              <a:rPr lang="en-US" sz="2500" b="1" dirty="0">
-                <a:solidFill>
-                  <a:srgbClr val="0E1B2A"/>
-                </a:solidFill>
-              </a:rPr>
-              <a:t>6. Onde apareceu generalização?</a:t>
-            </a:r>
-            <a:endParaRPr lang="en-US" sz="2500" dirty="0"/>
-          </a:p>
-        </p:txBody>
-      </p:sp>
-      <p:sp>
-        <p:nvSpPr>
-          <p:cNvPr id="5" name="Text 3"/>
-          <p:cNvSpPr/>
-          <p:nvPr/>
-        </p:nvSpPr>
-        <p:spPr>
-          <a:xfrm>
-            <a:off x="621792" y="960120"/>
-            <a:ext cx="10698480" cy="292608"/>
-          </a:xfrm>
-          <a:prstGeom prst="rect">
-            <a:avLst/>
-          </a:prstGeom>
-          <a:noFill/>
-          <a:ln/>
-        </p:spPr>
-        <p:txBody>
-          <a:bodyPr wrap="square" lIns="0" tIns="0" rIns="0" bIns="0" rtlCol="0" anchor="ctr"/>
-          <a:lstStyle/>
-          <a:p>
-            <a:pPr indent="0" marL="0">
-              <a:buNone/>
-            </a:pPr>
-            <a:r>
-              <a:rPr lang="en-US" sz="1250" dirty="0">
-                <a:solidFill>
-                  <a:srgbClr val="52616B"/>
-                </a:solidFill>
-              </a:rPr>
-              <a:t>Foco: reconstrução de estratégia e passagem do caso particular para função.</a:t>
-            </a:r>
-            <a:endParaRPr lang="en-US" sz="1250" dirty="0"/>
-          </a:p>
-        </p:txBody>
-      </p:sp>
-      <p:sp>
-        <p:nvSpPr>
-          <p:cNvPr id="6" name="Shape 4"/>
-          <p:cNvSpPr/>
-          <p:nvPr/>
-        </p:nvSpPr>
-        <p:spPr>
-          <a:xfrm>
-            <a:off x="594360" y="1316736"/>
-            <a:ext cx="10972800" cy="0"/>
-          </a:xfrm>
-          <a:prstGeom prst="line">
-            <a:avLst/>
-          </a:prstGeom>
-          <a:noFill/>
-          <a:ln w="15240">
-            <a:solidFill>
-              <a:srgbClr val="E9EEF3"/>
-            </a:solidFill>
-            <a:prstDash val="solid"/>
-          </a:ln>
-        </p:spPr>
-      </p:sp>
-      <p:sp>
-        <p:nvSpPr>
-          <p:cNvPr id="7" name="Shape 5"/>
-          <p:cNvSpPr/>
-          <p:nvPr/>
-        </p:nvSpPr>
-        <p:spPr>
-          <a:xfrm>
-            <a:off x="640080" y="1554480"/>
-            <a:ext cx="4892040" cy="3611880"/>
-          </a:xfrm>
-          <a:prstGeom prst="roundRect">
-            <a:avLst>
-              <a:gd name="adj" fmla="val 2025"/>
-            </a:avLst>
-          </a:prstGeom>
-          <a:solidFill>
-            <a:srgbClr val="111827"/>
-          </a:solidFill>
-          <a:ln w="12700">
-            <a:solidFill>
-              <a:srgbClr val="111827"/>
-            </a:solidFill>
-            <a:prstDash val="solid"/>
-          </a:ln>
-          <a:effectLst>
-            <a:outerShdw sx="100000" sy="100000" kx="0" ky="0" algn="bl" rotWithShape="0" blurRad="25400" dist="12700" dir="2700000">
-              <a:srgbClr val="000000">
-                <a:alpha val="12000"/>
-              </a:srgbClr>
-            </a:outerShdw>
-          </a:effectLst>
-        </p:spPr>
-      </p:sp>
-      <p:sp>
-        <p:nvSpPr>
-          <p:cNvPr id="8" name="Text 6"/>
-          <p:cNvSpPr/>
-          <p:nvPr/>
-        </p:nvSpPr>
-        <p:spPr>
-          <a:xfrm>
-            <a:off x="804672" y="1700784"/>
-            <a:ext cx="4562856" cy="3355848"/>
-          </a:xfrm>
-          <a:prstGeom prst="rect">
-            <a:avLst/>
-          </a:prstGeom>
-          <a:noFill/>
-          <a:ln/>
-        </p:spPr>
-        <p:txBody>
-          <a:bodyPr wrap="square" lIns="254" tIns="254" rIns="254" bIns="254" rtlCol="0" anchor="ctr">
-            <a:normAutofit/>
-          </a:bodyPr>
-          <a:lstStyle/>
-          <a:p>
-            <a:pPr indent="0" marL="0">
-              <a:buNone/>
-            </a:pPr>
-            <a:r>
-              <a:rPr lang="en-US" sz="1220" dirty="0">
-                <a:solidFill>
-                  <a:srgbClr val="E5E7EB"/>
-                </a:solidFill>
-                <a:latin typeface="Aptos Mono" pitchFamily="34" charset="0"/>
-                <a:ea typeface="Aptos Mono" pitchFamily="34" charset="-122"/>
-                <a:cs typeface="Aptos Mono" pitchFamily="34" charset="-120"/>
-              </a:rPr>
-              <a:t>function media(notas)</a:t>
-            </a:r>
-            <a:endParaRPr lang="en-US" sz="1220" dirty="0"/>
-          </a:p>
-          <a:p>
-            <a:pPr indent="0" marL="0">
-              <a:buNone/>
-            </a:pPr>
-            <a:r>
-              <a:rPr lang="en-US" sz="1220" dirty="0">
-                <a:solidFill>
-                  <a:srgbClr val="E5E7EB"/>
-                </a:solidFill>
-                <a:latin typeface="Aptos Mono" pitchFamily="34" charset="0"/>
-                <a:ea typeface="Aptos Mono" pitchFamily="34" charset="-122"/>
-                <a:cs typeface="Aptos Mono" pitchFamily="34" charset="-120"/>
-              </a:rPr>
-              <a:t>    sum(notas) / length(notas)</a:t>
-            </a:r>
-            <a:endParaRPr lang="en-US" sz="1220" dirty="0"/>
-          </a:p>
-          <a:p>
-            <a:pPr indent="0" marL="0">
-              <a:buNone/>
-            </a:pPr>
-            <a:r>
-              <a:rPr lang="en-US" sz="1220" dirty="0">
-                <a:solidFill>
-                  <a:srgbClr val="E5E7EB"/>
-                </a:solidFill>
-                <a:latin typeface="Aptos Mono" pitchFamily="34" charset="0"/>
-                <a:ea typeface="Aptos Mono" pitchFamily="34" charset="-122"/>
-                <a:cs typeface="Aptos Mono" pitchFamily="34" charset="-120"/>
-              </a:rPr>
-              <a:t>end</a:t>
-            </a:r>
-            <a:endParaRPr lang="en-US" sz="1220" dirty="0"/>
-          </a:p>
-          <a:p>
-            <a:pPr indent="0" marL="0">
-              <a:buNone/>
-            </a:pPr>
-            <a:r>
-              <a:rPr lang="en-US" sz="1220" dirty="0">
-                <a:solidFill>
-                  <a:srgbClr val="E5E7EB"/>
-                </a:solidFill>
-                <a:latin typeface="Aptos Mono" pitchFamily="34" charset="0"/>
-                <a:ea typeface="Aptos Mono" pitchFamily="34" charset="-122"/>
-                <a:cs typeface="Aptos Mono" pitchFamily="34" charset="-120"/>
-              </a:rPr>
-              <a:t>media([8, 6, 7])</a:t>
-            </a:r>
-            <a:endParaRPr lang="en-US" sz="1220" dirty="0"/>
-          </a:p>
-          <a:p>
-            <a:pPr indent="0" marL="0">
-              <a:buNone/>
-            </a:pPr>
-            <a:r>
-              <a:rPr lang="en-US" sz="1220" dirty="0">
-                <a:solidFill>
-                  <a:srgbClr val="E5E7EB"/>
-                </a:solidFill>
-                <a:latin typeface="Aptos Mono" pitchFamily="34" charset="0"/>
-                <a:ea typeface="Aptos Mono" pitchFamily="34" charset="-122"/>
-                <a:cs typeface="Aptos Mono" pitchFamily="34" charset="-120"/>
-              </a:rPr>
-              <a:t>media([10, 9, 8])</a:t>
-            </a:r>
-            <a:endParaRPr lang="en-US" sz="1220" dirty="0"/>
-          </a:p>
-        </p:txBody>
-      </p:sp>
-      <p:sp>
-        <p:nvSpPr>
-          <p:cNvPr id="9" name="Text 7"/>
-          <p:cNvSpPr/>
-          <p:nvPr/>
-        </p:nvSpPr>
-        <p:spPr>
-          <a:xfrm>
-            <a:off x="5897880" y="1536192"/>
-            <a:ext cx="5349240" cy="274320"/>
-          </a:xfrm>
-          <a:prstGeom prst="rect">
-            <a:avLst/>
-          </a:prstGeom>
-          <a:noFill/>
-          <a:ln/>
-        </p:spPr>
-        <p:txBody>
-          <a:bodyPr wrap="square" lIns="0" tIns="0" rIns="0" bIns="0" rtlCol="0" anchor="ctr"/>
-          <a:lstStyle/>
-          <a:p>
-            <a:pPr indent="0" marL="0">
-              <a:buNone/>
-            </a:pPr>
-            <a:r>
-              <a:rPr lang="en-US" sz="1550" b="1" dirty="0">
-                <a:solidFill>
-                  <a:srgbClr val="0E1B2A"/>
-                </a:solidFill>
-              </a:rPr>
-              <a:t>Pequena tarefa no Pluto</a:t>
-            </a:r>
-            <a:endParaRPr lang="en-US" sz="1550" dirty="0"/>
-          </a:p>
-        </p:txBody>
-      </p:sp>
-      <p:sp>
-        <p:nvSpPr>
-          <p:cNvPr id="10" name="Shape 8"/>
-          <p:cNvSpPr/>
-          <p:nvPr/>
-        </p:nvSpPr>
-        <p:spPr>
-          <a:xfrm>
-            <a:off x="5897880" y="1901952"/>
-            <a:ext cx="512064" cy="512064"/>
-          </a:xfrm>
-          <a:prstGeom prst="ellipse">
-            <a:avLst/>
-          </a:prstGeom>
-          <a:solidFill>
-            <a:srgbClr val="2C7A7B"/>
-          </a:solidFill>
-          <a:ln w="12700">
-            <a:solidFill>
-              <a:srgbClr val="2C7A7B"/>
-            </a:solidFill>
-            <a:prstDash val="solid"/>
-          </a:ln>
-        </p:spPr>
-      </p:sp>
-      <p:sp>
-        <p:nvSpPr>
-          <p:cNvPr id="11" name="Text 9"/>
-          <p:cNvSpPr/>
-          <p:nvPr/>
-        </p:nvSpPr>
-        <p:spPr>
-          <a:xfrm>
-            <a:off x="5897880" y="1984248"/>
-            <a:ext cx="512064" cy="182880"/>
-          </a:xfrm>
-          <a:prstGeom prst="rect">
-            <a:avLst/>
-          </a:prstGeom>
-          <a:noFill/>
-          <a:ln/>
-        </p:spPr>
-        <p:txBody>
-          <a:bodyPr wrap="square" lIns="0" tIns="0" rIns="0" bIns="0" rtlCol="0" anchor="ctr"/>
-          <a:lstStyle/>
-          <a:p>
-            <a:pPr algn="ctr" indent="0" marL="0">
-              <a:buNone/>
-            </a:pPr>
-            <a:r>
-              <a:rPr lang="en-US" sz="1500" b="1" dirty="0">
-                <a:solidFill>
-                  <a:srgbClr val="FFFFFF"/>
-                </a:solidFill>
-              </a:rPr>
-              <a:t>1</a:t>
-            </a:r>
-            <a:endParaRPr lang="en-US" sz="1500" dirty="0"/>
-          </a:p>
-        </p:txBody>
-      </p:sp>
-      <p:sp>
-        <p:nvSpPr>
-          <p:cNvPr id="12" name="Text 10"/>
-          <p:cNvSpPr/>
-          <p:nvPr/>
-        </p:nvSpPr>
-        <p:spPr>
-          <a:xfrm>
-            <a:off x="6510528" y="1901952"/>
-            <a:ext cx="4892040" cy="384048"/>
-          </a:xfrm>
-          <a:prstGeom prst="rect">
-            <a:avLst/>
-          </a:prstGeom>
-          <a:noFill/>
-          <a:ln/>
-        </p:spPr>
-        <p:txBody>
-          <a:bodyPr wrap="square" lIns="254" tIns="254" rIns="254" bIns="254" rtlCol="0" anchor="ctr">
-            <a:normAutofit/>
-          </a:bodyPr>
-          <a:lstStyle/>
-          <a:p>
-            <a:pPr indent="0" marL="0">
-              <a:buNone/>
-            </a:pPr>
-            <a:r>
-              <a:rPr lang="en-US" sz="1220" dirty="0">
-                <a:solidFill>
-                  <a:srgbClr val="0E1B2A"/>
-                </a:solidFill>
-              </a:rPr>
-              <a:t>Resolver primeiro um caso manualmente.</a:t>
-            </a:r>
-            <a:endParaRPr lang="en-US" sz="1220" dirty="0"/>
-          </a:p>
-        </p:txBody>
-      </p:sp>
-      <p:sp>
-        <p:nvSpPr>
-          <p:cNvPr id="13" name="Shape 11"/>
-          <p:cNvSpPr/>
-          <p:nvPr/>
-        </p:nvSpPr>
-        <p:spPr>
-          <a:xfrm>
-            <a:off x="5897880" y="2505456"/>
-            <a:ext cx="512064" cy="512064"/>
-          </a:xfrm>
-          <a:prstGeom prst="ellipse">
-            <a:avLst/>
-          </a:prstGeom>
-          <a:solidFill>
-            <a:srgbClr val="2C7A7B"/>
-          </a:solidFill>
-          <a:ln w="12700">
-            <a:solidFill>
-              <a:srgbClr val="2C7A7B"/>
-            </a:solidFill>
-            <a:prstDash val="solid"/>
-          </a:ln>
-        </p:spPr>
-      </p:sp>
-      <p:sp>
-        <p:nvSpPr>
-          <p:cNvPr id="14" name="Text 12"/>
-          <p:cNvSpPr/>
-          <p:nvPr/>
-        </p:nvSpPr>
-        <p:spPr>
-          <a:xfrm>
-            <a:off x="5897880" y="2587752"/>
-            <a:ext cx="512064" cy="182880"/>
-          </a:xfrm>
-          <a:prstGeom prst="rect">
-            <a:avLst/>
-          </a:prstGeom>
-          <a:noFill/>
-          <a:ln/>
-        </p:spPr>
-        <p:txBody>
-          <a:bodyPr wrap="square" lIns="0" tIns="0" rIns="0" bIns="0" rtlCol="0" anchor="ctr"/>
-          <a:lstStyle/>
-          <a:p>
-            <a:pPr algn="ctr" indent="0" marL="0">
-              <a:buNone/>
-            </a:pPr>
-            <a:r>
-              <a:rPr lang="en-US" sz="1500" b="1" dirty="0">
-                <a:solidFill>
-                  <a:srgbClr val="FFFFFF"/>
-                </a:solidFill>
-              </a:rPr>
-              <a:t>2</a:t>
-            </a:r>
-            <a:endParaRPr lang="en-US" sz="1500" dirty="0"/>
-          </a:p>
-        </p:txBody>
-      </p:sp>
-      <p:sp>
-        <p:nvSpPr>
-          <p:cNvPr id="15" name="Text 13"/>
-          <p:cNvSpPr/>
-          <p:nvPr/>
-        </p:nvSpPr>
-        <p:spPr>
-          <a:xfrm>
-            <a:off x="6510528" y="2523744"/>
-            <a:ext cx="4892040" cy="384048"/>
-          </a:xfrm>
-          <a:prstGeom prst="rect">
-            <a:avLst/>
-          </a:prstGeom>
-          <a:noFill/>
-          <a:ln/>
-        </p:spPr>
-        <p:txBody>
-          <a:bodyPr wrap="square" lIns="254" tIns="254" rIns="254" bIns="254" rtlCol="0" anchor="ctr">
-            <a:normAutofit/>
-          </a:bodyPr>
-          <a:lstStyle/>
-          <a:p>
-            <a:pPr indent="0" marL="0">
-              <a:buNone/>
-            </a:pPr>
-            <a:r>
-              <a:rPr lang="en-US" sz="1220" dirty="0">
-                <a:solidFill>
-                  <a:srgbClr val="0E1B2A"/>
-                </a:solidFill>
-              </a:rPr>
-              <a:t>Transformar o cálculo repetido em função.</a:t>
-            </a:r>
-            <a:endParaRPr lang="en-US" sz="1220" dirty="0"/>
-          </a:p>
-        </p:txBody>
-      </p:sp>
-      <p:sp>
-        <p:nvSpPr>
-          <p:cNvPr id="16" name="Shape 14"/>
-          <p:cNvSpPr/>
-          <p:nvPr/>
-        </p:nvSpPr>
-        <p:spPr>
-          <a:xfrm>
-            <a:off x="5897880" y="3108960"/>
-            <a:ext cx="512064" cy="512064"/>
-          </a:xfrm>
-          <a:prstGeom prst="ellipse">
-            <a:avLst/>
-          </a:prstGeom>
-          <a:solidFill>
-            <a:srgbClr val="2C7A7B"/>
-          </a:solidFill>
-          <a:ln w="12700">
-            <a:solidFill>
-              <a:srgbClr val="2C7A7B"/>
-            </a:solidFill>
-            <a:prstDash val="solid"/>
-          </a:ln>
-        </p:spPr>
-      </p:sp>
-      <p:sp>
-        <p:nvSpPr>
-          <p:cNvPr id="17" name="Text 15"/>
-          <p:cNvSpPr/>
-          <p:nvPr/>
-        </p:nvSpPr>
-        <p:spPr>
-          <a:xfrm>
-            <a:off x="5897880" y="3191256"/>
-            <a:ext cx="512064" cy="182880"/>
-          </a:xfrm>
-          <a:prstGeom prst="rect">
-            <a:avLst/>
-          </a:prstGeom>
-          <a:noFill/>
-          <a:ln/>
-        </p:spPr>
-        <p:txBody>
-          <a:bodyPr wrap="square" lIns="0" tIns="0" rIns="0" bIns="0" rtlCol="0" anchor="ctr"/>
-          <a:lstStyle/>
-          <a:p>
-            <a:pPr algn="ctr" indent="0" marL="0">
-              <a:buNone/>
-            </a:pPr>
-            <a:r>
-              <a:rPr lang="en-US" sz="1500" b="1" dirty="0">
-                <a:solidFill>
-                  <a:srgbClr val="FFFFFF"/>
-                </a:solidFill>
-              </a:rPr>
-              <a:t>3</a:t>
-            </a:r>
-            <a:endParaRPr lang="en-US" sz="1500" dirty="0"/>
-          </a:p>
-        </p:txBody>
-      </p:sp>
-      <p:sp>
-        <p:nvSpPr>
-          <p:cNvPr id="18" name="Text 16"/>
-          <p:cNvSpPr/>
-          <p:nvPr/>
-        </p:nvSpPr>
-        <p:spPr>
-          <a:xfrm>
-            <a:off x="6510528" y="3145536"/>
-            <a:ext cx="4892040" cy="384048"/>
-          </a:xfrm>
-          <a:prstGeom prst="rect">
-            <a:avLst/>
-          </a:prstGeom>
-          <a:noFill/>
-          <a:ln/>
-        </p:spPr>
-        <p:txBody>
-          <a:bodyPr wrap="square" lIns="254" tIns="254" rIns="254" bIns="254" rtlCol="0" anchor="ctr">
-            <a:normAutofit/>
-          </a:bodyPr>
-          <a:lstStyle/>
-          <a:p>
-            <a:pPr indent="0" marL="0">
-              <a:buNone/>
-            </a:pPr>
-            <a:r>
-              <a:rPr lang="en-US" sz="1220" dirty="0">
-                <a:solidFill>
-                  <a:srgbClr val="0E1B2A"/>
-                </a:solidFill>
-              </a:rPr>
-              <a:t>Aplicar a função a casos novos e comparar.</a:t>
-            </a:r>
-            <a:endParaRPr lang="en-US" sz="1220" dirty="0"/>
-          </a:p>
-        </p:txBody>
-      </p:sp>
-      <p:sp>
-        <p:nvSpPr>
-          <p:cNvPr id="19" name="Shape 17"/>
-          <p:cNvSpPr/>
-          <p:nvPr/>
-        </p:nvSpPr>
-        <p:spPr>
-          <a:xfrm>
-            <a:off x="5897880" y="4754880"/>
-            <a:ext cx="2240280" cy="914400"/>
-          </a:xfrm>
-          <a:prstGeom prst="roundRect">
-            <a:avLst>
-              <a:gd name="adj" fmla="val 8000"/>
-            </a:avLst>
-          </a:prstGeom>
-          <a:solidFill>
-            <a:srgbClr val="D8F1F6"/>
-          </a:solidFill>
-          <a:ln w="12700">
-            <a:solidFill>
-              <a:srgbClr val="D8F1F6"/>
-            </a:solidFill>
-            <a:prstDash val="solid"/>
-          </a:ln>
-        </p:spPr>
-      </p:sp>
-      <p:sp>
-        <p:nvSpPr>
-          <p:cNvPr id="20" name="Text 18"/>
-          <p:cNvSpPr/>
-          <p:nvPr/>
-        </p:nvSpPr>
-        <p:spPr>
-          <a:xfrm>
-            <a:off x="6062472" y="4892040"/>
-            <a:ext cx="1920240" cy="182880"/>
-          </a:xfrm>
-          <a:prstGeom prst="rect">
-            <a:avLst/>
-          </a:prstGeom>
-          <a:noFill/>
-          <a:ln/>
-        </p:spPr>
-        <p:txBody>
-          <a:bodyPr wrap="square" lIns="0" tIns="0" rIns="0" bIns="0" rtlCol="0" anchor="ctr"/>
-          <a:lstStyle/>
-          <a:p>
-            <a:pPr indent="0" marL="0">
-              <a:buNone/>
-            </a:pPr>
-            <a:r>
-              <a:rPr lang="en-US" sz="950" b="1" dirty="0">
-                <a:solidFill>
-                  <a:srgbClr val="1B4E7A"/>
-                </a:solidFill>
-              </a:rPr>
-              <a:t>Aspecto qualitativo</a:t>
-            </a:r>
-            <a:endParaRPr lang="en-US" sz="950" dirty="0"/>
-          </a:p>
-        </p:txBody>
-      </p:sp>
-      <p:sp>
-        <p:nvSpPr>
-          <p:cNvPr id="21" name="Text 19"/>
-          <p:cNvSpPr/>
-          <p:nvPr/>
-        </p:nvSpPr>
-        <p:spPr>
-          <a:xfrm>
-            <a:off x="6062472" y="5120640"/>
-            <a:ext cx="1920240" cy="292608"/>
-          </a:xfrm>
-          <a:prstGeom prst="rect">
-            <a:avLst/>
-          </a:prstGeom>
-          <a:noFill/>
-          <a:ln/>
-        </p:spPr>
-        <p:txBody>
-          <a:bodyPr wrap="square" lIns="0" tIns="0" rIns="0" bIns="0" rtlCol="0" anchor="ctr">
-            <a:normAutofit/>
-          </a:bodyPr>
-          <a:lstStyle/>
-          <a:p>
-            <a:pPr indent="0" marL="0">
-              <a:buNone/>
-            </a:pPr>
-            <a:r>
-              <a:rPr lang="en-US" sz="980" dirty="0">
-                <a:solidFill>
-                  <a:srgbClr val="0E1B2A"/>
-                </a:solidFill>
-              </a:rPr>
-              <a:t>Flexibilidade notacional</a:t>
-            </a:r>
-            <a:endParaRPr lang="en-US" sz="980" dirty="0"/>
-          </a:p>
-        </p:txBody>
-      </p:sp>
-      <p:sp>
-        <p:nvSpPr>
-          <p:cNvPr id="22" name="Shape 20"/>
-          <p:cNvSpPr/>
-          <p:nvPr/>
-        </p:nvSpPr>
-        <p:spPr>
-          <a:xfrm>
-            <a:off x="8366760" y="4754880"/>
-            <a:ext cx="2926080" cy="914400"/>
-          </a:xfrm>
-          <a:prstGeom prst="roundRect">
-            <a:avLst>
-              <a:gd name="adj" fmla="val 8000"/>
-            </a:avLst>
-          </a:prstGeom>
-          <a:solidFill>
-            <a:srgbClr val="FEF3C7"/>
-          </a:solidFill>
-          <a:ln w="12700">
-            <a:solidFill>
-              <a:srgbClr val="FEF3C7"/>
-            </a:solidFill>
-            <a:prstDash val="solid"/>
-          </a:ln>
-        </p:spPr>
-      </p:sp>
-      <p:sp>
-        <p:nvSpPr>
-          <p:cNvPr id="23" name="Text 21"/>
-          <p:cNvSpPr/>
-          <p:nvPr/>
-        </p:nvSpPr>
-        <p:spPr>
-          <a:xfrm>
-            <a:off x="8549640" y="4892040"/>
-            <a:ext cx="2560320" cy="182880"/>
-          </a:xfrm>
-          <a:prstGeom prst="rect">
-            <a:avLst/>
-          </a:prstGeom>
-          <a:noFill/>
-          <a:ln/>
-        </p:spPr>
-        <p:txBody>
-          <a:bodyPr wrap="square" lIns="0" tIns="0" rIns="0" bIns="0" rtlCol="0" anchor="ctr"/>
-          <a:lstStyle/>
-          <a:p>
-            <a:pPr indent="0" marL="0">
-              <a:buNone/>
-            </a:pPr>
-            <a:r>
-              <a:rPr lang="en-US" sz="950" b="1" dirty="0">
-                <a:solidFill>
-                  <a:srgbClr val="92400E"/>
-                </a:solidFill>
-              </a:rPr>
-              <a:t>Registro esperado</a:t>
-            </a:r>
-            <a:endParaRPr lang="en-US" sz="950" dirty="0"/>
-          </a:p>
-        </p:txBody>
-      </p:sp>
-      <p:sp>
-        <p:nvSpPr>
-          <p:cNvPr id="24" name="Text 22"/>
-          <p:cNvSpPr/>
-          <p:nvPr/>
-        </p:nvSpPr>
-        <p:spPr>
-          <a:xfrm>
-            <a:off x="8549640" y="5120640"/>
-            <a:ext cx="2560320" cy="292608"/>
-          </a:xfrm>
-          <a:prstGeom prst="rect">
-            <a:avLst/>
-          </a:prstGeom>
-          <a:noFill/>
-          <a:ln/>
-        </p:spPr>
-        <p:txBody>
-          <a:bodyPr wrap="square" lIns="0" tIns="0" rIns="0" bIns="0" rtlCol="0" anchor="ctr">
-            <a:normAutofit/>
-          </a:bodyPr>
-          <a:lstStyle/>
-          <a:p>
-            <a:pPr indent="0" marL="0">
-              <a:buNone/>
-            </a:pPr>
-            <a:r>
-              <a:rPr lang="en-US" sz="980" dirty="0">
-                <a:solidFill>
-                  <a:srgbClr val="0E1B2A"/>
-                </a:solidFill>
-              </a:rPr>
-              <a:t>Descrição do que a função generalizou.</a:t>
-            </a:r>
-            <a:endParaRPr lang="en-US" sz="980" dirty="0"/>
-          </a:p>
-        </p:txBody>
-      </p:sp>
-      <p:sp>
-        <p:nvSpPr>
-          <p:cNvPr id="25" name="Text 23"/>
-          <p:cNvSpPr/>
-          <p:nvPr/>
-        </p:nvSpPr>
-        <p:spPr>
-          <a:xfrm>
-            <a:off x="502920" y="6510528"/>
-            <a:ext cx="8686800" cy="201168"/>
-          </a:xfrm>
-          <a:prstGeom prst="rect">
-            <a:avLst/>
-          </a:prstGeom>
-          <a:noFill/>
-          <a:ln/>
-        </p:spPr>
-        <p:txBody>
-          <a:bodyPr wrap="square" lIns="0" tIns="0" rIns="0" bIns="0" rtlCol="0" anchor="ctr"/>
-          <a:lstStyle/>
-          <a:p>
-            <a:pPr indent="0" marL="0">
-              <a:buNone/>
-            </a:pPr>
-            <a:r>
-              <a:rPr lang="en-US" sz="850" dirty="0">
-                <a:solidFill>
-                  <a:srgbClr val="52616B"/>
-                </a:solidFill>
-              </a:rPr>
-              <a:t>PROFCOMP · Pensamento Computacional · Julia + Pluto</a:t>
-            </a:r>
-            <a:endParaRPr lang="en-US" sz="850" dirty="0"/>
-          </a:p>
-        </p:txBody>
-      </p:sp>
-      <p:sp>
-        <p:nvSpPr>
-          <p:cNvPr id="26" name="Text 24"/>
-          <p:cNvSpPr/>
-          <p:nvPr/>
-        </p:nvSpPr>
-        <p:spPr>
-          <a:xfrm>
-            <a:off x="11384280" y="6437376"/>
-            <a:ext cx="347472" cy="228600"/>
-          </a:xfrm>
-          <a:prstGeom prst="rect">
-            <a:avLst/>
-          </a:prstGeom>
-          <a:solidFill>
-            <a:srgbClr val="1B4E7A"/>
-          </a:solidFill>
-          <a:ln>
-            <a:solidFill>
-              <a:srgbClr val="1B4E7A"/>
-            </a:solidFill>
-          </a:ln>
-        </p:spPr>
-        <p:txBody>
-          <a:bodyPr wrap="square" lIns="0" tIns="0" rIns="0" bIns="0" rtlCol="0" anchor="ctr"/>
-          <a:lstStyle/>
-          <a:p>
-            <a:pPr algn="ctr" indent="0" marL="0">
-              <a:buNone/>
-            </a:pPr>
-            <a:r>
-              <a:rPr lang="en-US" sz="850" b="1" dirty="0">
-                <a:solidFill>
-                  <a:srgbClr val="FFFFFF"/>
-                </a:solidFill>
-              </a:rPr>
-              <a:t>08</a:t>
-            </a:r>
-            <a:endParaRPr lang="en-US" sz="850" dirty="0"/>
-          </a:p>
-        </p:txBody>
-      </p:sp>
-    </p:spTree>
-  </p:cSld>
-  <p:clrMapOvr>
-    <a:masterClrMapping/>
-  </p:clrMapOvr>
-</p:sld>
-</file>
-
-<file path=ppt/slides/slide9.xml><?xml version="1.0" encoding="utf-8"?>
-<p:sld xmlns:a="http://schemas.openxmlformats.org/drawingml/2006/main" xmlns:r="http://schemas.openxmlformats.org/officeDocument/2006/relationships" xmlns:p="http://schemas.openxmlformats.org/presentationml/2006/main">
-  <p:cSld name="Slide 9">
-    <p:bg>
-      <p:bgPr>
-        <a:solidFill>
-          <a:srgbClr val="F8FAFC"/>
-        </a:solidFill>
-      </p:bgPr>
-    </p:bg>
-    <p:spTree>
-      <p:nvGrpSpPr>
-        <p:cNvPr id="1" name=""/>
-        <p:cNvGrpSpPr/>
-        <p:nvPr/>
-      </p:nvGrpSpPr>
-      <p:grpSpPr>
-        <a:xfrm>
-          <a:off x="0" y="0"/>
-          <a:ext cx="0" cy="0"/>
-          <a:chOff x="0" y="0"/>
-          <a:chExt cx="0" cy="0"/>
-        </a:xfrm>
-      </p:grpSpPr>
-      <p:sp>
-        <p:nvSpPr>
-          <p:cNvPr id="2" name="Shape 0"/>
-          <p:cNvSpPr/>
-          <p:nvPr/>
-        </p:nvSpPr>
-        <p:spPr>
-          <a:xfrm>
-            <a:off x="0" y="0"/>
-            <a:ext cx="12191695" cy="6858000"/>
-          </a:xfrm>
-          <a:prstGeom prst="rect">
-            <a:avLst/>
-          </a:prstGeom>
-          <a:solidFill>
-            <a:srgbClr val="F8FAFC"/>
-          </a:solidFill>
-          <a:ln w="12700">
-            <a:solidFill>
-              <a:srgbClr val="F8FAFC">
-                <a:alpha val="0"/>
-              </a:srgbClr>
-            </a:solidFill>
-            <a:prstDash val="solid"/>
-          </a:ln>
-        </p:spPr>
-      </p:sp>
-      <p:sp>
-        <p:nvSpPr>
-          <p:cNvPr id="3" name="Shape 1"/>
-          <p:cNvSpPr/>
-          <p:nvPr/>
-        </p:nvSpPr>
-        <p:spPr>
-          <a:xfrm>
-            <a:off x="0" y="0"/>
-            <a:ext cx="12191695" cy="91440"/>
-          </a:xfrm>
-          <a:prstGeom prst="rect">
-            <a:avLst/>
-          </a:prstGeom>
-          <a:solidFill>
-            <a:srgbClr val="2AA7C9"/>
-          </a:solidFill>
-          <a:ln w="12700">
-            <a:solidFill>
-              <a:srgbClr val="2AA7C9">
-                <a:alpha val="0"/>
-              </a:srgbClr>
-            </a:solidFill>
-            <a:prstDash val="solid"/>
-          </a:ln>
-        </p:spPr>
-      </p:sp>
-      <p:sp>
-        <p:nvSpPr>
-          <p:cNvPr id="4" name="Text 2"/>
-          <p:cNvSpPr/>
-          <p:nvPr/>
-        </p:nvSpPr>
-        <p:spPr>
-          <a:xfrm>
-            <a:off x="594360" y="411480"/>
-            <a:ext cx="9875520" cy="502920"/>
-          </a:xfrm>
-          <a:prstGeom prst="rect">
-            <a:avLst/>
-          </a:prstGeom>
-          <a:noFill/>
-          <a:ln/>
-        </p:spPr>
-        <p:txBody>
-          <a:bodyPr wrap="square" lIns="254" tIns="254" rIns="254" bIns="254" rtlCol="0" anchor="ctr">
-            <a:normAutofit/>
-          </a:bodyPr>
-          <a:lstStyle/>
-          <a:p>
-            <a:pPr indent="0" marL="0">
-              <a:buNone/>
-            </a:pPr>
-            <a:r>
-              <a:rPr lang="en-US" sz="2500" b="1" dirty="0">
-                <a:solidFill>
-                  <a:srgbClr val="0E1B2A"/>
-                </a:solidFill>
-              </a:rPr>
-              <a:t>7. Onde apareceu transformação de dados?</a:t>
-            </a:r>
-            <a:endParaRPr lang="en-US" sz="2500" dirty="0"/>
-          </a:p>
-        </p:txBody>
-      </p:sp>
-      <p:sp>
-        <p:nvSpPr>
-          <p:cNvPr id="5" name="Text 3"/>
-          <p:cNvSpPr/>
-          <p:nvPr/>
-        </p:nvSpPr>
-        <p:spPr>
-          <a:xfrm>
-            <a:off x="621792" y="960120"/>
-            <a:ext cx="10698480" cy="292608"/>
-          </a:xfrm>
-          <a:prstGeom prst="rect">
-            <a:avLst/>
-          </a:prstGeom>
-          <a:noFill/>
-          <a:ln/>
-        </p:spPr>
-        <p:txBody>
-          <a:bodyPr wrap="square" lIns="0" tIns="0" rIns="0" bIns="0" rtlCol="0" anchor="ctr"/>
-          <a:lstStyle/>
-          <a:p>
-            <a:pPr indent="0" marL="0">
-              <a:buNone/>
-            </a:pPr>
-            <a:r>
-              <a:rPr lang="en-US" sz="1250" dirty="0">
-                <a:solidFill>
-                  <a:srgbClr val="52616B"/>
-                </a:solidFill>
-              </a:rPr>
-              <a:t>Foco: transformar representações sem perder o sentido do dado.</a:t>
-            </a:r>
-            <a:endParaRPr lang="en-US" sz="1250" dirty="0"/>
-          </a:p>
-        </p:txBody>
-      </p:sp>
-      <p:sp>
-        <p:nvSpPr>
-          <p:cNvPr id="6" name="Shape 4"/>
-          <p:cNvSpPr/>
-          <p:nvPr/>
-        </p:nvSpPr>
-        <p:spPr>
-          <a:xfrm>
-            <a:off x="594360" y="1316736"/>
-            <a:ext cx="10972800" cy="0"/>
-          </a:xfrm>
-          <a:prstGeom prst="line">
-            <a:avLst/>
-          </a:prstGeom>
-          <a:noFill/>
-          <a:ln w="15240">
-            <a:solidFill>
-              <a:srgbClr val="E9EEF3"/>
-            </a:solidFill>
-            <a:prstDash val="solid"/>
-          </a:ln>
-        </p:spPr>
-      </p:sp>
-      <p:sp>
-        <p:nvSpPr>
-          <p:cNvPr id="7" name="Shape 5"/>
-          <p:cNvSpPr/>
-          <p:nvPr/>
-        </p:nvSpPr>
-        <p:spPr>
-          <a:xfrm>
-            <a:off x="640080" y="1554480"/>
-            <a:ext cx="4892040" cy="3611880"/>
-          </a:xfrm>
-          <a:prstGeom prst="roundRect">
-            <a:avLst>
-              <a:gd name="adj" fmla="val 2025"/>
-            </a:avLst>
-          </a:prstGeom>
-          <a:solidFill>
-            <a:srgbClr val="111827"/>
-          </a:solidFill>
-          <a:ln w="12700">
-            <a:solidFill>
-              <a:srgbClr val="111827"/>
-            </a:solidFill>
-            <a:prstDash val="solid"/>
-          </a:ln>
-          <a:effectLst>
-            <a:outerShdw sx="100000" sy="100000" kx="0" ky="0" algn="bl" rotWithShape="0" blurRad="25400" dist="12700" dir="2700000">
-              <a:srgbClr val="000000">
-                <a:alpha val="12000"/>
-              </a:srgbClr>
-            </a:outerShdw>
-          </a:effectLst>
-        </p:spPr>
-      </p:sp>
-      <p:sp>
-        <p:nvSpPr>
-          <p:cNvPr id="8" name="Text 6"/>
-          <p:cNvSpPr/>
-          <p:nvPr/>
-        </p:nvSpPr>
-        <p:spPr>
-          <a:xfrm>
-            <a:off x="804672" y="1700784"/>
-            <a:ext cx="4562856" cy="3355848"/>
-          </a:xfrm>
-          <a:prstGeom prst="rect">
-            <a:avLst/>
-          </a:prstGeom>
-          <a:noFill/>
-          <a:ln/>
-        </p:spPr>
-        <p:txBody>
-          <a:bodyPr wrap="square" lIns="254" tIns="254" rIns="254" bIns="254" rtlCol="0" anchor="ctr">
-            <a:normAutofit/>
-          </a:bodyPr>
-          <a:lstStyle/>
-          <a:p>
-            <a:pPr indent="0" marL="0">
-              <a:buNone/>
-            </a:pPr>
-            <a:r>
-              <a:rPr lang="en-US" sz="1220" dirty="0">
-                <a:solidFill>
-                  <a:srgbClr val="E5E7EB"/>
-                </a:solidFill>
-                <a:latin typeface="Aptos Mono" pitchFamily="34" charset="0"/>
-                <a:ea typeface="Aptos Mono" pitchFamily="34" charset="-122"/>
-                <a:cs typeface="Aptos Mono" pitchFamily="34" charset="-120"/>
-              </a:rPr>
-              <a:t>celsius = [25, 28, 30]</a:t>
-            </a:r>
-            <a:endParaRPr lang="en-US" sz="1220" dirty="0"/>
-          </a:p>
-          <a:p>
-            <a:pPr indent="0" marL="0">
-              <a:buNone/>
-            </a:pPr>
-            <a:r>
-              <a:rPr lang="en-US" sz="1220" dirty="0">
-                <a:solidFill>
-                  <a:srgbClr val="E5E7EB"/>
-                </a:solidFill>
-                <a:latin typeface="Aptos Mono" pitchFamily="34" charset="0"/>
-                <a:ea typeface="Aptos Mono" pitchFamily="34" charset="-122"/>
-                <a:cs typeface="Aptos Mono" pitchFamily="34" charset="-120"/>
-              </a:rPr>
-              <a:t>fahrenheit = celsius .* 9/5 .+ 32</a:t>
-            </a:r>
-            <a:endParaRPr lang="en-US" sz="1220" dirty="0"/>
-          </a:p>
-          <a:p>
-            <a:pPr indent="0" marL="0">
-              <a:buNone/>
-            </a:pPr>
-            <a:r>
-              <a:rPr lang="en-US" sz="1220" dirty="0">
-                <a:solidFill>
-                  <a:srgbClr val="E5E7EB"/>
-                </a:solidFill>
-                <a:latin typeface="Aptos Mono" pitchFamily="34" charset="0"/>
-                <a:ea typeface="Aptos Mono" pitchFamily="34" charset="-122"/>
-                <a:cs typeface="Aptos Mono" pitchFamily="34" charset="-120"/>
-              </a:rPr>
-              <a:t>pares = [celsius fahrenheit]</a:t>
-            </a:r>
-            <a:endParaRPr lang="en-US" sz="1220" dirty="0"/>
-          </a:p>
-        </p:txBody>
-      </p:sp>
-      <p:sp>
-        <p:nvSpPr>
-          <p:cNvPr id="9" name="Text 7"/>
-          <p:cNvSpPr/>
-          <p:nvPr/>
-        </p:nvSpPr>
-        <p:spPr>
-          <a:xfrm>
-            <a:off x="5897880" y="1536192"/>
-            <a:ext cx="5349240" cy="274320"/>
-          </a:xfrm>
-          <a:prstGeom prst="rect">
-            <a:avLst/>
-          </a:prstGeom>
-          <a:noFill/>
-          <a:ln/>
-        </p:spPr>
-        <p:txBody>
-          <a:bodyPr wrap="square" lIns="0" tIns="0" rIns="0" bIns="0" rtlCol="0" anchor="ctr"/>
-          <a:lstStyle/>
-          <a:p>
-            <a:pPr indent="0" marL="0">
-              <a:buNone/>
-            </a:pPr>
-            <a:r>
-              <a:rPr lang="en-US" sz="1550" b="1" dirty="0">
-                <a:solidFill>
-                  <a:srgbClr val="0E1B2A"/>
-                </a:solidFill>
-              </a:rPr>
-              <a:t>Pequena tarefa no Pluto</a:t>
-            </a:r>
-            <a:endParaRPr lang="en-US" sz="1550" dirty="0"/>
-          </a:p>
-        </p:txBody>
-      </p:sp>
-      <p:sp>
-        <p:nvSpPr>
-          <p:cNvPr id="10" name="Shape 8"/>
-          <p:cNvSpPr/>
-          <p:nvPr/>
-        </p:nvSpPr>
-        <p:spPr>
-          <a:xfrm>
-            <a:off x="5897880" y="1901952"/>
-            <a:ext cx="512064" cy="512064"/>
-          </a:xfrm>
-          <a:prstGeom prst="ellipse">
-            <a:avLst/>
-          </a:prstGeom>
-          <a:solidFill>
-            <a:srgbClr val="A23E48"/>
-          </a:solidFill>
-          <a:ln w="12700">
-            <a:solidFill>
-              <a:srgbClr val="A23E48"/>
-            </a:solidFill>
-            <a:prstDash val="solid"/>
-          </a:ln>
-        </p:spPr>
-      </p:sp>
-      <p:sp>
-        <p:nvSpPr>
-          <p:cNvPr id="11" name="Text 9"/>
-          <p:cNvSpPr/>
-          <p:nvPr/>
-        </p:nvSpPr>
-        <p:spPr>
-          <a:xfrm>
-            <a:off x="5897880" y="1984248"/>
-            <a:ext cx="512064" cy="182880"/>
-          </a:xfrm>
-          <a:prstGeom prst="rect">
-            <a:avLst/>
-          </a:prstGeom>
-          <a:noFill/>
-          <a:ln/>
-        </p:spPr>
-        <p:txBody>
-          <a:bodyPr wrap="square" lIns="0" tIns="0" rIns="0" bIns="0" rtlCol="0" anchor="ctr"/>
-          <a:lstStyle/>
-          <a:p>
-            <a:pPr algn="ctr" indent="0" marL="0">
-              <a:buNone/>
-            </a:pPr>
-            <a:r>
-              <a:rPr lang="en-US" sz="1500" b="1" dirty="0">
-                <a:solidFill>
-                  <a:srgbClr val="FFFFFF"/>
-                </a:solidFill>
-              </a:rPr>
-              <a:t>1</a:t>
-            </a:r>
-            <a:endParaRPr lang="en-US" sz="1500" dirty="0"/>
-          </a:p>
-        </p:txBody>
-      </p:sp>
-      <p:sp>
-        <p:nvSpPr>
-          <p:cNvPr id="12" name="Text 10"/>
-          <p:cNvSpPr/>
-          <p:nvPr/>
-        </p:nvSpPr>
-        <p:spPr>
-          <a:xfrm>
-            <a:off x="6510528" y="1901952"/>
-            <a:ext cx="4892040" cy="384048"/>
-          </a:xfrm>
-          <a:prstGeom prst="rect">
-            <a:avLst/>
-          </a:prstGeom>
-          <a:noFill/>
-          <a:ln/>
-        </p:spPr>
-        <p:txBody>
-          <a:bodyPr wrap="square" lIns="254" tIns="254" rIns="254" bIns="254" rtlCol="0" anchor="ctr">
-            <a:normAutofit/>
-          </a:bodyPr>
-          <a:lstStyle/>
-          <a:p>
-            <a:pPr indent="0" marL="0">
-              <a:buNone/>
-            </a:pPr>
-            <a:r>
-              <a:rPr lang="en-US" sz="1220" dirty="0">
-                <a:solidFill>
-                  <a:srgbClr val="0E1B2A"/>
-                </a:solidFill>
-              </a:rPr>
-              <a:t>Explicar o significado dos dados originais.</a:t>
-            </a:r>
-            <a:endParaRPr lang="en-US" sz="1220" dirty="0"/>
-          </a:p>
-        </p:txBody>
-      </p:sp>
-      <p:sp>
-        <p:nvSpPr>
-          <p:cNvPr id="13" name="Shape 11"/>
-          <p:cNvSpPr/>
-          <p:nvPr/>
-        </p:nvSpPr>
-        <p:spPr>
-          <a:xfrm>
-            <a:off x="5897880" y="2505456"/>
-            <a:ext cx="512064" cy="512064"/>
-          </a:xfrm>
-          <a:prstGeom prst="ellipse">
-            <a:avLst/>
-          </a:prstGeom>
-          <a:solidFill>
-            <a:srgbClr val="A23E48"/>
-          </a:solidFill>
-          <a:ln w="12700">
-            <a:solidFill>
-              <a:srgbClr val="A23E48"/>
-            </a:solidFill>
-            <a:prstDash val="solid"/>
-          </a:ln>
-        </p:spPr>
-      </p:sp>
-      <p:sp>
-        <p:nvSpPr>
-          <p:cNvPr id="14" name="Text 12"/>
-          <p:cNvSpPr/>
-          <p:nvPr/>
-        </p:nvSpPr>
-        <p:spPr>
-          <a:xfrm>
-            <a:off x="5897880" y="2587752"/>
-            <a:ext cx="512064" cy="182880"/>
-          </a:xfrm>
-          <a:prstGeom prst="rect">
-            <a:avLst/>
-          </a:prstGeom>
-          <a:noFill/>
-          <a:ln/>
-        </p:spPr>
-        <p:txBody>
-          <a:bodyPr wrap="square" lIns="0" tIns="0" rIns="0" bIns="0" rtlCol="0" anchor="ctr"/>
-          <a:lstStyle/>
-          <a:p>
-            <a:pPr algn="ctr" indent="0" marL="0">
-              <a:buNone/>
-            </a:pPr>
-            <a:r>
-              <a:rPr lang="en-US" sz="1500" b="1" dirty="0">
-                <a:solidFill>
-                  <a:srgbClr val="FFFFFF"/>
-                </a:solidFill>
-              </a:rPr>
-              <a:t>2</a:t>
-            </a:r>
-            <a:endParaRPr lang="en-US" sz="1500" dirty="0"/>
-          </a:p>
-        </p:txBody>
-      </p:sp>
-      <p:sp>
-        <p:nvSpPr>
-          <p:cNvPr id="15" name="Text 13"/>
-          <p:cNvSpPr/>
-          <p:nvPr/>
-        </p:nvSpPr>
-        <p:spPr>
-          <a:xfrm>
-            <a:off x="6510528" y="2523744"/>
-            <a:ext cx="4892040" cy="384048"/>
-          </a:xfrm>
-          <a:prstGeom prst="rect">
-            <a:avLst/>
-          </a:prstGeom>
-          <a:noFill/>
-          <a:ln/>
-        </p:spPr>
-        <p:txBody>
-          <a:bodyPr wrap="square" lIns="254" tIns="254" rIns="254" bIns="254" rtlCol="0" anchor="ctr">
-            <a:normAutofit/>
-          </a:bodyPr>
-          <a:lstStyle/>
-          <a:p>
-            <a:pPr indent="0" marL="0">
-              <a:buNone/>
-            </a:pPr>
-            <a:r>
-              <a:rPr lang="en-US" sz="1220" dirty="0">
-                <a:solidFill>
-                  <a:srgbClr val="0E1B2A"/>
-                </a:solidFill>
-              </a:rPr>
-              <a:t>Aplicar uma regra de transformação.</a:t>
-            </a:r>
-            <a:endParaRPr lang="en-US" sz="1220" dirty="0"/>
-          </a:p>
-        </p:txBody>
-      </p:sp>
-      <p:sp>
-        <p:nvSpPr>
-          <p:cNvPr id="16" name="Shape 14"/>
-          <p:cNvSpPr/>
-          <p:nvPr/>
-        </p:nvSpPr>
-        <p:spPr>
-          <a:xfrm>
-            <a:off x="5897880" y="3108960"/>
-            <a:ext cx="512064" cy="512064"/>
-          </a:xfrm>
-          <a:prstGeom prst="ellipse">
-            <a:avLst/>
-          </a:prstGeom>
-          <a:solidFill>
-            <a:srgbClr val="A23E48"/>
-          </a:solidFill>
-          <a:ln w="12700">
-            <a:solidFill>
-              <a:srgbClr val="A23E48"/>
-            </a:solidFill>
-            <a:prstDash val="solid"/>
-          </a:ln>
-        </p:spPr>
-      </p:sp>
-      <p:sp>
-        <p:nvSpPr>
-          <p:cNvPr id="17" name="Text 15"/>
-          <p:cNvSpPr/>
-          <p:nvPr/>
-        </p:nvSpPr>
-        <p:spPr>
-          <a:xfrm>
-            <a:off x="5897880" y="3191256"/>
-            <a:ext cx="512064" cy="182880"/>
-          </a:xfrm>
-          <a:prstGeom prst="rect">
-            <a:avLst/>
-          </a:prstGeom>
-          <a:noFill/>
-          <a:ln/>
-        </p:spPr>
-        <p:txBody>
-          <a:bodyPr wrap="square" lIns="0" tIns="0" rIns="0" bIns="0" rtlCol="0" anchor="ctr"/>
-          <a:lstStyle/>
-          <a:p>
-            <a:pPr algn="ctr" indent="0" marL="0">
-              <a:buNone/>
-            </a:pPr>
-            <a:r>
-              <a:rPr lang="en-US" sz="1500" b="1" dirty="0">
-                <a:solidFill>
-                  <a:srgbClr val="FFFFFF"/>
-                </a:solidFill>
-              </a:rPr>
-              <a:t>3</a:t>
-            </a:r>
-            <a:endParaRPr lang="en-US" sz="1500" dirty="0"/>
-          </a:p>
-        </p:txBody>
-      </p:sp>
-      <p:sp>
-        <p:nvSpPr>
-          <p:cNvPr id="18" name="Text 16"/>
-          <p:cNvSpPr/>
-          <p:nvPr/>
-        </p:nvSpPr>
-        <p:spPr>
-          <a:xfrm>
-            <a:off x="6510528" y="3145536"/>
-            <a:ext cx="4892040" cy="384048"/>
-          </a:xfrm>
-          <a:prstGeom prst="rect">
-            <a:avLst/>
-          </a:prstGeom>
-          <a:noFill/>
-          <a:ln/>
-        </p:spPr>
-        <p:txBody>
-          <a:bodyPr wrap="square" lIns="254" tIns="254" rIns="254" bIns="254" rtlCol="0" anchor="ctr">
-            <a:normAutofit/>
-          </a:bodyPr>
-          <a:lstStyle/>
-          <a:p>
-            <a:pPr indent="0" marL="0">
-              <a:buNone/>
-            </a:pPr>
-            <a:r>
-              <a:rPr lang="en-US" sz="1220" dirty="0">
-                <a:solidFill>
-                  <a:srgbClr val="0E1B2A"/>
-                </a:solidFill>
-              </a:rPr>
-              <a:t>Comparar as duas representações e interpretar.</a:t>
-            </a:r>
-            <a:endParaRPr lang="en-US" sz="1220" dirty="0"/>
-          </a:p>
-        </p:txBody>
-      </p:sp>
-      <p:sp>
-        <p:nvSpPr>
-          <p:cNvPr id="19" name="Shape 17"/>
-          <p:cNvSpPr/>
-          <p:nvPr/>
-        </p:nvSpPr>
-        <p:spPr>
-          <a:xfrm>
-            <a:off x="5897880" y="4754880"/>
-            <a:ext cx="2240280" cy="914400"/>
-          </a:xfrm>
-          <a:prstGeom prst="roundRect">
-            <a:avLst>
-              <a:gd name="adj" fmla="val 8000"/>
-            </a:avLst>
-          </a:prstGeom>
-          <a:solidFill>
-            <a:srgbClr val="D8F1F6"/>
-          </a:solidFill>
-          <a:ln w="12700">
-            <a:solidFill>
-              <a:srgbClr val="D8F1F6"/>
-            </a:solidFill>
-            <a:prstDash val="solid"/>
-          </a:ln>
-        </p:spPr>
-      </p:sp>
-      <p:sp>
-        <p:nvSpPr>
-          <p:cNvPr id="20" name="Text 18"/>
-          <p:cNvSpPr/>
-          <p:nvPr/>
-        </p:nvSpPr>
-        <p:spPr>
-          <a:xfrm>
-            <a:off x="6062472" y="4892040"/>
-            <a:ext cx="1920240" cy="182880"/>
-          </a:xfrm>
-          <a:prstGeom prst="rect">
-            <a:avLst/>
-          </a:prstGeom>
-          <a:noFill/>
-          <a:ln/>
-        </p:spPr>
-        <p:txBody>
-          <a:bodyPr wrap="square" lIns="0" tIns="0" rIns="0" bIns="0" rtlCol="0" anchor="ctr"/>
-          <a:lstStyle/>
-          <a:p>
-            <a:pPr indent="0" marL="0">
-              <a:buNone/>
-            </a:pPr>
-            <a:r>
-              <a:rPr lang="en-US" sz="950" b="1" dirty="0">
-                <a:solidFill>
-                  <a:srgbClr val="1B4E7A"/>
-                </a:solidFill>
-              </a:rPr>
-              <a:t>Aspecto qualitativo</a:t>
-            </a:r>
-            <a:endParaRPr lang="en-US" sz="950" dirty="0"/>
-          </a:p>
-        </p:txBody>
-      </p:sp>
-      <p:sp>
-        <p:nvSpPr>
-          <p:cNvPr id="21" name="Text 19"/>
-          <p:cNvSpPr/>
-          <p:nvPr/>
-        </p:nvSpPr>
-        <p:spPr>
-          <a:xfrm>
-            <a:off x="6062472" y="5120640"/>
-            <a:ext cx="1920240" cy="292608"/>
-          </a:xfrm>
-          <a:prstGeom prst="rect">
-            <a:avLst/>
-          </a:prstGeom>
-          <a:noFill/>
-          <a:ln/>
-        </p:spPr>
-        <p:txBody>
-          <a:bodyPr wrap="square" lIns="0" tIns="0" rIns="0" bIns="0" rtlCol="0" anchor="ctr">
-            <a:normAutofit/>
-          </a:bodyPr>
-          <a:lstStyle/>
-          <a:p>
-            <a:pPr indent="0" marL="0">
-              <a:buNone/>
-            </a:pPr>
-            <a:r>
-              <a:rPr lang="en-US" sz="980" dirty="0">
-                <a:solidFill>
-                  <a:srgbClr val="0E1B2A"/>
-                </a:solidFill>
-              </a:rPr>
-              <a:t>Representação + transformação</a:t>
-            </a:r>
-            <a:endParaRPr lang="en-US" sz="980" dirty="0"/>
-          </a:p>
-        </p:txBody>
-      </p:sp>
-      <p:sp>
-        <p:nvSpPr>
-          <p:cNvPr id="22" name="Shape 20"/>
-          <p:cNvSpPr/>
-          <p:nvPr/>
-        </p:nvSpPr>
-        <p:spPr>
-          <a:xfrm>
-            <a:off x="8366760" y="4754880"/>
-            <a:ext cx="2926080" cy="914400"/>
-          </a:xfrm>
-          <a:prstGeom prst="roundRect">
-            <a:avLst>
-              <a:gd name="adj" fmla="val 8000"/>
-            </a:avLst>
-          </a:prstGeom>
-          <a:solidFill>
-            <a:srgbClr val="FEF3C7"/>
-          </a:solidFill>
-          <a:ln w="12700">
-            <a:solidFill>
-              <a:srgbClr val="FEF3C7"/>
-            </a:solidFill>
-            <a:prstDash val="solid"/>
-          </a:ln>
-        </p:spPr>
-      </p:sp>
-      <p:sp>
-        <p:nvSpPr>
-          <p:cNvPr id="23" name="Text 21"/>
-          <p:cNvSpPr/>
-          <p:nvPr/>
-        </p:nvSpPr>
-        <p:spPr>
-          <a:xfrm>
-            <a:off x="8549640" y="4892040"/>
-            <a:ext cx="2560320" cy="182880"/>
-          </a:xfrm>
-          <a:prstGeom prst="rect">
-            <a:avLst/>
-          </a:prstGeom>
-          <a:noFill/>
-          <a:ln/>
-        </p:spPr>
-        <p:txBody>
-          <a:bodyPr wrap="square" lIns="0" tIns="0" rIns="0" bIns="0" rtlCol="0" anchor="ctr"/>
-          <a:lstStyle/>
-          <a:p>
-            <a:pPr indent="0" marL="0">
-              <a:buNone/>
-            </a:pPr>
-            <a:r>
-              <a:rPr lang="en-US" sz="950" b="1" dirty="0">
-                <a:solidFill>
-                  <a:srgbClr val="92400E"/>
-                </a:solidFill>
-              </a:rPr>
-              <a:t>Registro esperado</a:t>
-            </a:r>
-            <a:endParaRPr lang="en-US" sz="950" dirty="0"/>
-          </a:p>
-        </p:txBody>
-      </p:sp>
-      <p:sp>
-        <p:nvSpPr>
-          <p:cNvPr id="24" name="Text 22"/>
-          <p:cNvSpPr/>
-          <p:nvPr/>
-        </p:nvSpPr>
-        <p:spPr>
-          <a:xfrm>
-            <a:off x="8549640" y="5120640"/>
-            <a:ext cx="2560320" cy="292608"/>
-          </a:xfrm>
-          <a:prstGeom prst="rect">
-            <a:avLst/>
-          </a:prstGeom>
-          <a:noFill/>
-          <a:ln/>
-        </p:spPr>
-        <p:txBody>
-          <a:bodyPr wrap="square" lIns="0" tIns="0" rIns="0" bIns="0" rtlCol="0" anchor="ctr">
-            <a:normAutofit/>
-          </a:bodyPr>
-          <a:lstStyle/>
-          <a:p>
-            <a:pPr indent="0" marL="0">
-              <a:buNone/>
-            </a:pPr>
-            <a:r>
-              <a:rPr lang="en-US" sz="980" dirty="0">
-                <a:solidFill>
-                  <a:srgbClr val="0E1B2A"/>
-                </a:solidFill>
-              </a:rPr>
-              <a:t>Antes/depois com explicação do que mudou.</a:t>
-            </a:r>
-            <a:endParaRPr lang="en-US" sz="980" dirty="0"/>
-          </a:p>
-        </p:txBody>
-      </p:sp>
-      <p:sp>
-        <p:nvSpPr>
-          <p:cNvPr id="25" name="Text 23"/>
-          <p:cNvSpPr/>
-          <p:nvPr/>
-        </p:nvSpPr>
-        <p:spPr>
-          <a:xfrm>
-            <a:off x="502920" y="6510528"/>
-            <a:ext cx="8686800" cy="201168"/>
-          </a:xfrm>
-          <a:prstGeom prst="rect">
-            <a:avLst/>
-          </a:prstGeom>
-          <a:noFill/>
-          <a:ln/>
-        </p:spPr>
-        <p:txBody>
-          <a:bodyPr wrap="square" lIns="0" tIns="0" rIns="0" bIns="0" rtlCol="0" anchor="ctr"/>
-          <a:lstStyle/>
-          <a:p>
-            <a:pPr indent="0" marL="0">
-              <a:buNone/>
-            </a:pPr>
-            <a:r>
-              <a:rPr lang="en-US" sz="850" dirty="0">
-                <a:solidFill>
-                  <a:srgbClr val="52616B"/>
-                </a:solidFill>
-              </a:rPr>
-              <a:t>PROFCOMP · Pensamento Computacional · Julia + Pluto</a:t>
-            </a:r>
-            <a:endParaRPr lang="en-US" sz="850" dirty="0"/>
-          </a:p>
-        </p:txBody>
-      </p:sp>
-      <p:sp>
-        <p:nvSpPr>
-          <p:cNvPr id="26" name="Text 24"/>
-          <p:cNvSpPr/>
-          <p:nvPr/>
-        </p:nvSpPr>
-        <p:spPr>
-          <a:xfrm>
-            <a:off x="11384280" y="6437376"/>
-            <a:ext cx="347472" cy="228600"/>
-          </a:xfrm>
-          <a:prstGeom prst="rect">
-            <a:avLst/>
-          </a:prstGeom>
-          <a:solidFill>
-            <a:srgbClr val="1B4E7A"/>
-          </a:solidFill>
-          <a:ln>
-            <a:solidFill>
-              <a:srgbClr val="1B4E7A"/>
-            </a:solidFill>
-          </a:ln>
-        </p:spPr>
-        <p:txBody>
-          <a:bodyPr wrap="square" lIns="0" tIns="0" rIns="0" bIns="0" rtlCol="0" anchor="ctr"/>
-          <a:lstStyle/>
-          <a:p>
-            <a:pPr algn="ctr" indent="0" marL="0">
-              <a:buNone/>
-            </a:pPr>
-            <a:r>
-              <a:rPr lang="en-US" sz="850" b="1" dirty="0">
-                <a:solidFill>
-                  <a:srgbClr val="FFFFFF"/>
-                </a:solidFill>
-              </a:rPr>
-              <a:t>09</a:t>
             </a:r>
             <a:endParaRPr lang="en-US" sz="850" dirty="0"/>
           </a:p>
